--- a/presentacion/BioEmu_LBPCheY.pptx
+++ b/presentacion/BioEmu_LBPCheY.pptx
@@ -21,9 +21,11 @@
     <p:sldId id="269" r:id="rId15"/>
     <p:sldId id="270" r:id="rId16"/>
     <p:sldId id="271" r:id="rId17"/>
+    <p:sldId id="272" r:id="rId18"/>
+    <p:sldId id="273" r:id="rId19"/>
   </p:sldIdLst>
   <p:notesMasterIdLst>
-    <p:notesMasterId r:id="rId18"/>
+    <p:notesMasterId r:id="rId20"/>
   </p:notesMasterIdLst>
   <p:sldSz cx="12192000" cy="6858000"/>
   <p:notesSz cx="6858000" cy="12192000"/>
@@ -122,13 +124,13 @@
   <p:extLst>
     <p:ext uri="{521415D9-36F7-43E2-AB2F-B90AF26B5E84}">
       <p14:sectionLst xmlns:p14="http://schemas.microsoft.com/office/powerpoint/2010/main">
-        <p14:section name="Introducción" id="{8548e6e6-2c81-2735-69d2-cee7eb434d10}">
+        <p14:section name="Introducción" id="{0cc5084e-2ec1-8d51-24a9-ba5d3491c280}">
           <p14:sldIdLst>
             <p14:sldId id="256"/>
             <p14:sldId id="257"/>
           </p14:sldIdLst>
         </p14:section>
-        <p14:section name="BioEmu" id="{2ff92eee-f7fc-89e0-c23a-486f6669ecb0}">
+        <p14:section name="BioEmu" id="{7482f73f-05fc-8566-0703-e73098316985}">
           <p14:sldIdLst>
             <p14:sldId id="258"/>
             <p14:sldId id="259"/>
@@ -136,26 +138,28 @@
             <p14:sldId id="261"/>
           </p14:sldIdLst>
         </p14:section>
-        <p14:section name="Entradas y salidas" id="{e74af6c9-f7eb-3f0e-b3af-a1d91e195cb0}">
+        <p14:section name="Entradas y salidas" id="{4ba187f2-78e4-95cb-c362-f6fed13e6021}">
           <p14:sldIdLst>
             <p14:sldId id="262"/>
             <p14:sldId id="263"/>
           </p14:sldIdLst>
         </p14:section>
-        <p14:section name="Caso LBPCheY" id="{8fb3cb34-c4ee-b986-4832-4c152820f5c6}">
+        <p14:section name="Caso LBPCheY" id="{efbaa07c-78a5-2c1a-bcf0-ddd8e4b59081}">
           <p14:sldIdLst>
             <p14:sldId id="264"/>
             <p14:sldId id="265"/>
             <p14:sldId id="266"/>
             <p14:sldId id="267"/>
             <p14:sldId id="268"/>
+            <p14:sldId id="269"/>
+            <p14:sldId id="270"/>
           </p14:sldIdLst>
         </p14:section>
-        <p14:section name="Conclusiones" id="{31291094-82b4-900d-75a5-68b9d78f9555}">
+        <p14:section name="Conclusiones" id="{9ebdc98f-6dac-ec81-117d-442c89c70c81}">
           <p14:sldIdLst>
-            <p14:sldId id="269"/>
-            <p14:sldId id="270"/>
             <p14:sldId id="271"/>
+            <p14:sldId id="272"/>
+            <p14:sldId id="273"/>
           </p14:sldIdLst>
         </p14:section>
       </p14:sectionLst>
@@ -566,6 +570,309 @@
 </c:chartSpace>
 </file>
 
+<file path=ppt/charts/chart2.xml><?xml version="1.0" encoding="utf-8"?>
+<c:chartSpace xmlns:c="http://schemas.openxmlformats.org/drawingml/2006/chart" xmlns:a="http://schemas.openxmlformats.org/drawingml/2006/main" xmlns:r="http://schemas.openxmlformats.org/officeDocument/2006/relationships">
+  <c:date1904 val="0"/>
+  <c:roundedCorners val="1"/>
+  <c:chart>
+    <c:title>
+      <c:tx>
+        <c:rich>
+          <a:bodyPr/>
+          <a:lstStyle/>
+          <a:p>
+            <a:pPr>
+              <a:defRPr sz="1400" b="0" i="0" u="none" strike="noStrike">
+                <a:solidFill>
+                  <a:srgbClr val="13233A"/>
+                </a:solidFill>
+                <a:latin typeface="+mn-lt"/>
+              </a:defRPr>
+            </a:pPr>
+            <a:r>
+              <a:rPr sz="1400" b="0" i="0" u="none" strike="noStrike">
+                <a:solidFill>
+                  <a:srgbClr val="13233A"/>
+                </a:solidFill>
+                <a:latin typeface="+mn-lt"/>
+              </a:rPr>
+              <a:t>Población (% de 246 muestras)</a:t>
+            </a:r>
+          </a:p>
+        </c:rich>
+      </c:tx>
+      <c:layout/>
+      <c:overlay val="0"/>
+    </c:title>
+    <c:autoTitleDeleted val="0"/>
+    <c:plotArea>
+      <c:layout/>
+      <c:barChart>
+        <c:barDir val="col"/>
+        <c:grouping val="clustered"/>
+        <c:varyColors val="0"/>
+        <c:ser>
+          <c:idx val="0"/>
+          <c:order val="0"/>
+          <c:tx>
+            <c:strRef>
+              <c:f>Sheet1!$B$1</c:f>
+              <c:strCache>
+                <c:ptCount val="1"/>
+                <c:pt idx="0">
+                  <c:v>Población</c:v>
+                </c:pt>
+              </c:strCache>
+            </c:strRef>
+          </c:tx>
+          <c:spPr>
+            <a:solidFill>
+              <a:srgbClr val="E8792B"/>
+            </a:solidFill>
+            <a:effectLst/>
+          </c:spPr>
+          <c:invertIfNegative val="0"/>
+          <c:dLbls>
+            <c:numFmt formatCode="0.0&quot;%&quot;" sourceLinked="0"/>
+            <c:txPr>
+              <a:bodyPr/>
+              <a:lstStyle/>
+              <a:p>
+                <a:pPr>
+                  <a:defRPr b="1" i="0" strike="noStrike" sz="1300" u="none">
+                    <a:solidFill>
+                      <a:srgbClr val="13233A"/>
+                    </a:solidFill>
+                    <a:latin typeface="+mn-lt"/>
+                  </a:defRPr>
+                </a:pPr>
+              </a:p>
+            </c:txPr>
+            <c:showLegendKey val="0"/>
+            <c:showVal val="1"/>
+            <c:showCatName val="0"/>
+            <c:showSerName val="0"/>
+            <c:showPercent val="0"/>
+            <c:showBubbleSize val="0"/>
+            <c:showLeaderLines val="0"/>
+          </c:dLbls>
+          <c:dPt>
+            <c:idx val="0"/>
+            <c:invertIfNegative val="0"/>
+            <c:bubble3D val="0"/>
+            <c:spPr>
+              <a:solidFill>
+                <a:srgbClr val="E8792B"/>
+              </a:solidFill>
+              <a:effectLst/>
+            </c:spPr>
+          </c:dPt>
+          <c:dPt>
+            <c:idx val="1"/>
+            <c:invertIfNegative val="0"/>
+            <c:bubble3D val="0"/>
+            <c:spPr>
+              <a:solidFill>
+                <a:srgbClr val="2A9D8F"/>
+              </a:solidFill>
+              <a:effectLst/>
+            </c:spPr>
+          </c:dPt>
+          <c:dPt>
+            <c:idx val="2"/>
+            <c:invertIfNegative val="0"/>
+            <c:bubble3D val="0"/>
+            <c:spPr>
+              <a:solidFill>
+                <a:srgbClr val="5B6B78"/>
+              </a:solidFill>
+              <a:effectLst/>
+            </c:spPr>
+          </c:dPt>
+          <c:cat>
+            <c:multiLvlStrRef>
+              <c:f>Sheet1!$A$2:$A$4</c:f>
+              <c:multiLvlStrCache>
+                <c:ptCount val="3"/>
+                <c:lvl>
+                  <c:pt idx="0">
+                    <c:v>Conf. 1</c:v>
+                  </c:pt>
+                  <c:pt idx="1">
+                    <c:v>Conf. 2</c:v>
+                  </c:pt>
+                  <c:pt idx="2">
+                    <c:v>Conf. 3</c:v>
+                  </c:pt>
+                </c:lvl>
+              </c:multiLvlStrCache>
+            </c:multiLvlStrRef>
+          </c:cat>
+          <c:val>
+            <c:numRef>
+              <c:f>Sheet1!$B$2:$B$4</c:f>
+              <c:numCache>
+                <c:formatCode>General</c:formatCode>
+                <c:ptCount val="3"/>
+                <c:pt idx="0">
+                  <c:v>69.9</c:v>
+                </c:pt>
+                <c:pt idx="1">
+                  <c:v>22</c:v>
+                </c:pt>
+                <c:pt idx="2">
+                  <c:v>8.1</c:v>
+                </c:pt>
+              </c:numCache>
+            </c:numRef>
+          </c:val>
+        </c:ser>
+        <c:dLbls>
+          <c:numFmt formatCode="0.0&quot;%&quot;" sourceLinked="0"/>
+          <c:txPr>
+            <a:bodyPr/>
+            <a:lstStyle/>
+            <a:p>
+              <a:pPr>
+                <a:defRPr b="1" i="0" strike="noStrike" sz="1300" u="none">
+                  <a:solidFill>
+                    <a:srgbClr val="13233A"/>
+                  </a:solidFill>
+                  <a:latin typeface="+mn-lt"/>
+                </a:defRPr>
+              </a:pPr>
+            </a:p>
+          </c:txPr>
+          <c:showLegendKey val="0"/>
+          <c:showVal val="1"/>
+          <c:showCatName val="0"/>
+          <c:showSerName val="0"/>
+          <c:showPercent val="0"/>
+          <c:showBubbleSize val="0"/>
+          <c:showLeaderLines val="0"/>
+        </c:dLbls>
+        <c:gapWidth val="45"/>
+        <c:overlap val="0"/>
+        <c:axId val="2094734554"/>
+        <c:axId val="2094734552"/>
+        <c:axId val="2094734556"/>
+      </c:barChart>
+      <c:catAx>
+        <c:axId val="2094734554"/>
+        <c:scaling>
+          <c:orientation val="minMax"/>
+        </c:scaling>
+        <c:delete val="0"/>
+        <c:axPos val="b"/>
+        <c:numFmt formatCode="General" sourceLinked="1"/>
+        <c:majorTickMark val="out"/>
+        <c:minorTickMark val="none"/>
+        <c:tickLblPos val="low"/>
+        <c:spPr>
+          <a:ln w="12700" cap="flat">
+            <a:solidFill>
+              <a:srgbClr val="888888"/>
+            </a:solidFill>
+            <a:prstDash val="solid"/>
+            <a:round/>
+          </a:ln>
+        </c:spPr>
+        <c:txPr>
+          <a:bodyPr/>
+          <a:lstStyle/>
+          <a:p>
+            <a:pPr>
+              <a:defRPr sz="1200" b="0" i="0" u="none" strike="noStrike">
+                <a:solidFill>
+                  <a:srgbClr val="5B6B78"/>
+                </a:solidFill>
+                <a:latin typeface="+mn-lt"/>
+              </a:defRPr>
+            </a:pPr>
+            <a:endParaRPr lang="en-US"/>
+          </a:p>
+        </c:txPr>
+        <c:crossAx val="2094734552"/>
+        <c:crosses val="autoZero"/>
+        <c:auto val="1"/>
+        <c:lblAlgn val="ctr"/>
+        <c:noMultiLvlLbl val="1"/>
+      </c:catAx>
+      <c:valAx>
+        <c:axId val="2094734552"/>
+        <c:scaling>
+          <c:orientation val="minMax"/>
+          <c:max val="80"/>
+        </c:scaling>
+        <c:delete val="0"/>
+        <c:axPos val="l"/>
+        <c:majorGridlines>
+          <c:spPr>
+            <a:ln w="6350" cap="flat">
+              <a:solidFill>
+                <a:srgbClr val="E1E6EA"/>
+              </a:solidFill>
+              <a:prstDash val="solid"/>
+              <a:round/>
+            </a:ln>
+          </c:spPr>
+        </c:majorGridlines>
+        <c:numFmt formatCode="General" sourceLinked="0"/>
+        <c:majorTickMark val="out"/>
+        <c:minorTickMark val="none"/>
+        <c:tickLblPos val="nextTo"/>
+        <c:spPr>
+          <a:ln w="12700" cap="flat">
+            <a:solidFill>
+              <a:srgbClr val="888888"/>
+            </a:solidFill>
+            <a:prstDash val="solid"/>
+            <a:round/>
+          </a:ln>
+        </c:spPr>
+        <c:txPr>
+          <a:bodyPr/>
+          <a:lstStyle/>
+          <a:p>
+            <a:pPr>
+              <a:defRPr sz="1100" b="0" i="0" u="none" strike="noStrike">
+                <a:solidFill>
+                  <a:srgbClr val="5B6B78"/>
+                </a:solidFill>
+                <a:latin typeface="+mn-lt"/>
+              </a:defRPr>
+            </a:pPr>
+            <a:endParaRPr lang="en-US"/>
+          </a:p>
+        </c:txPr>
+        <c:crossAx val="2094734554"/>
+        <c:crosses val="autoZero"/>
+        <c:crossBetween val="between"/>
+      </c:valAx>
+      <c:spPr>
+        <a:noFill/>
+        <a:ln>
+          <a:noFill/>
+        </a:ln>
+        <a:effectLst/>
+      </c:spPr>
+    </c:plotArea>
+    <c:plotVisOnly val="1"/>
+    <c:dispBlanksAs val="span"/>
+  </c:chart>
+  <c:spPr>
+    <a:noFill/>
+    <a:ln>
+      <a:noFill/>
+    </a:ln>
+    <a:effectLst/>
+  </c:spPr>
+  <c:externalData r:id="rId1">
+    <c:autoUpdate val="0"/>
+  </c:externalData>
+</c:chartSpace>
+</file>
+
 <file path=ppt/notesMasters/notesMaster1.xml><?xml version="1.0" encoding="utf-8"?>
 <p:notesMaster xmlns:a="http://schemas.openxmlformats.org/drawingml/2006/main" xmlns:r="http://schemas.openxmlformats.org/officeDocument/2006/relationships" xmlns:p="http://schemas.openxmlformats.org/presentationml/2006/main">
   <p:cSld>
@@ -1401,7 +1708,7 @@
           <a:p>
             <a:r>
               <a:rPr lang="en-US" dirty="0"/>
-              <a:t/>
+              <a:t>Las conformaciones 2 y 3 están a menos de 1.3 kcal/mol (≈2 kT): son accesibles a temperatura ambiente. Silueta ~0.4: más un continuo que estados discretos; con k = 2 queda 77/23%, ΔG 0.71 kcal/mol.</a:t>
             </a:r>
             <a:endParaRPr lang="en-US" dirty="0"/>
           </a:p>
@@ -1601,6 +1908,182 @@
             <a:fld id="{F7021451-1387-4CA6-816F-3879F97B5CBC}" type="slidenum">
               <a:rPr lang="en-US"/>
               <a:t>16</a:t>
+            </a:fld>
+            <a:endParaRPr lang="en-US"/>
+          </a:p>
+        </p:txBody>
+      </p:sp>
+    </p:spTree>
+    <p:extLst>
+      <p:ext uri="{BB962C8B-B14F-4D97-AF65-F5344CB8AC3E}">
+        <p14:creationId xmlns:p14="http://schemas.microsoft.com/office/powerpoint/2010/main" val="1024086991"/>
+      </p:ext>
+    </p:extLst>
+  </p:cSld>
+  <p:clrMapOvr>
+    <a:masterClrMapping/>
+  </p:clrMapOvr>
+</p:notes>
+</file>
+
+<file path=ppt/notesSlides/notesSlide17.xml><?xml version="1.0" encoding="utf-8"?>
+<p:notes xmlns:a="http://schemas.openxmlformats.org/drawingml/2006/main" xmlns:r="http://schemas.openxmlformats.org/officeDocument/2006/relationships" xmlns:p="http://schemas.openxmlformats.org/presentationml/2006/main">
+  <p:cSld>
+    <p:spTree>
+      <p:nvGrpSpPr>
+        <p:cNvPr id="1" name=""/>
+        <p:cNvGrpSpPr/>
+        <p:nvPr/>
+      </p:nvGrpSpPr>
+      <p:grpSpPr>
+        <a:xfrm>
+          <a:off x="0" y="0"/>
+          <a:ext cx="0" cy="0"/>
+          <a:chOff x="0" y="0"/>
+          <a:chExt cx="0" cy="0"/>
+        </a:xfrm>
+      </p:grpSpPr>
+      <p:sp>
+        <p:nvSpPr>
+          <p:cNvPr id="2" name="Slide Image Placeholder 1"/>
+          <p:cNvSpPr>
+            <a:spLocks noGrp="1" noRot="1" noChangeAspect="1"/>
+          </p:cNvSpPr>
+          <p:nvPr>
+            <p:ph type="sldImg"/>
+          </p:nvPr>
+        </p:nvSpPr>
+        <p:spPr/>
+      </p:sp>
+      <p:sp>
+        <p:nvSpPr>
+          <p:cNvPr id="3" name="Notes Placeholder 2"/>
+          <p:cNvSpPr>
+            <a:spLocks noGrp="1"/>
+          </p:cNvSpPr>
+          <p:nvPr>
+            <p:ph type="body" idx="1"/>
+          </p:nvPr>
+        </p:nvSpPr>
+        <p:spPr/>
+        <p:txBody>
+          <a:bodyPr/>
+          <a:lstStyle/>
+          <a:p>
+            <a:r>
+              <a:rPr lang="en-US" dirty="0"/>
+              <a:t/>
+            </a:r>
+            <a:endParaRPr lang="en-US" dirty="0"/>
+          </a:p>
+        </p:txBody>
+      </p:sp>
+      <p:sp>
+        <p:nvSpPr>
+          <p:cNvPr id="4" name="Slide Number Placeholder 3"/>
+          <p:cNvSpPr>
+            <a:spLocks noGrp="1"/>
+          </p:cNvSpPr>
+          <p:nvPr>
+            <p:ph type="sldNum" sz="quarter" idx="10"/>
+          </p:nvPr>
+        </p:nvSpPr>
+        <p:spPr/>
+        <p:txBody>
+          <a:bodyPr/>
+          <a:lstStyle/>
+          <a:p>
+            <a:fld id="{F7021451-1387-4CA6-816F-3879F97B5CBC}" type="slidenum">
+              <a:rPr lang="en-US"/>
+              <a:t>17</a:t>
+            </a:fld>
+            <a:endParaRPr lang="en-US"/>
+          </a:p>
+        </p:txBody>
+      </p:sp>
+    </p:spTree>
+    <p:extLst>
+      <p:ext uri="{BB962C8B-B14F-4D97-AF65-F5344CB8AC3E}">
+        <p14:creationId xmlns:p14="http://schemas.microsoft.com/office/powerpoint/2010/main" val="1024086991"/>
+      </p:ext>
+    </p:extLst>
+  </p:cSld>
+  <p:clrMapOvr>
+    <a:masterClrMapping/>
+  </p:clrMapOvr>
+</p:notes>
+</file>
+
+<file path=ppt/notesSlides/notesSlide18.xml><?xml version="1.0" encoding="utf-8"?>
+<p:notes xmlns:a="http://schemas.openxmlformats.org/drawingml/2006/main" xmlns:r="http://schemas.openxmlformats.org/officeDocument/2006/relationships" xmlns:p="http://schemas.openxmlformats.org/presentationml/2006/main">
+  <p:cSld>
+    <p:spTree>
+      <p:nvGrpSpPr>
+        <p:cNvPr id="1" name=""/>
+        <p:cNvGrpSpPr/>
+        <p:nvPr/>
+      </p:nvGrpSpPr>
+      <p:grpSpPr>
+        <a:xfrm>
+          <a:off x="0" y="0"/>
+          <a:ext cx="0" cy="0"/>
+          <a:chOff x="0" y="0"/>
+          <a:chExt cx="0" cy="0"/>
+        </a:xfrm>
+      </p:grpSpPr>
+      <p:sp>
+        <p:nvSpPr>
+          <p:cNvPr id="2" name="Slide Image Placeholder 1"/>
+          <p:cNvSpPr>
+            <a:spLocks noGrp="1" noRot="1" noChangeAspect="1"/>
+          </p:cNvSpPr>
+          <p:nvPr>
+            <p:ph type="sldImg"/>
+          </p:nvPr>
+        </p:nvSpPr>
+        <p:spPr/>
+      </p:sp>
+      <p:sp>
+        <p:nvSpPr>
+          <p:cNvPr id="3" name="Notes Placeholder 2"/>
+          <p:cNvSpPr>
+            <a:spLocks noGrp="1"/>
+          </p:cNvSpPr>
+          <p:nvPr>
+            <p:ph type="body" idx="1"/>
+          </p:nvPr>
+        </p:nvSpPr>
+        <p:spPr/>
+        <p:txBody>
+          <a:bodyPr/>
+          <a:lstStyle/>
+          <a:p>
+            <a:r>
+              <a:rPr lang="en-US" dirty="0"/>
+              <a:t/>
+            </a:r>
+            <a:endParaRPr lang="en-US" dirty="0"/>
+          </a:p>
+        </p:txBody>
+      </p:sp>
+      <p:sp>
+        <p:nvSpPr>
+          <p:cNvPr id="4" name="Slide Number Placeholder 3"/>
+          <p:cNvSpPr>
+            <a:spLocks noGrp="1"/>
+          </p:cNvSpPr>
+          <p:nvPr>
+            <p:ph type="sldNum" sz="quarter" idx="10"/>
+          </p:nvPr>
+        </p:nvSpPr>
+        <p:spPr/>
+        <p:txBody>
+          <a:bodyPr/>
+          <a:lstStyle/>
+          <a:p>
+            <a:fld id="{F7021451-1387-4CA6-816F-3879F97B5CBC}" type="slidenum">
+              <a:rPr lang="en-US"/>
+              <a:t>18</a:t>
             </a:fld>
             <a:endParaRPr lang="en-US"/>
           </a:p>
@@ -5562,26 +6045,1443 @@
                 <a:ea typeface="Cambria" pitchFamily="34" charset="-122"/>
                 <a:cs typeface="Cambria" pitchFamily="34" charset="-120"/>
               </a:rPr>
-              <a:t>Qué tener en cuenta al interpretar el ensamble</a:t>
+              <a:t>Una conformación dominante y dos giros de CheY</a:t>
             </a:r>
             <a:endParaRPr lang="en-US" sz="3200" dirty="0"/>
           </a:p>
         </p:txBody>
       </p:sp>
-      <p:sp>
-        <p:nvSpPr>
-          <p:cNvPr id="3" name="limite-0"/>
+      <p:graphicFrame>
+        <p:nvGraphicFramePr>
+          <p:cNvPr id="3" name="grafica-poblaciones" descr=""/>
+          <p:cNvGraphicFramePr/>
+          <p:nvPr/>
+        </p:nvGraphicFramePr>
+        <p:xfrm>
+          <a:off x="548640" y="1371600"/>
+          <a:ext cx="4206240" cy="3657600"/>
+        </p:xfrm>
+        <a:graphic xmlns:a="http://schemas.openxmlformats.org/drawingml/2006/main">
+          <a:graphicData uri="http://schemas.openxmlformats.org/drawingml/2006/chart">
+            <c:chart xmlns:c="http://schemas.openxmlformats.org/drawingml/2006/chart" r:id="rId1"/>
+          </a:graphicData>
+        </a:graphic>
+      </p:graphicFrame>
+      <p:graphicFrame>
+        <p:nvGraphicFramePr>
+          <p:cNvPr id="15" name="tabla-conformaciones"/>
+          <p:cNvGraphicFramePr>
+            <a:graphicFrameLocks noGrp="1"/>
+          </p:cNvGraphicFramePr>
+          <p:nvPr>
+            <p:extLst>
+              <p:ext uri="{D42A27DB-BD31-4B8C-83A1-F6EECF244321}">
+                <p14:modId xmlns:p14="http://schemas.microsoft.com/office/powerpoint/2010/main" val="1579011935"/>
+              </p:ext>
+            </p:extLst>
+          </p:nvPr>
+        </p:nvGraphicFramePr>
+        <p:xfrm>
+          <a:off x="5074920" y="1417320"/>
+          <a:ext cx="6568135" cy="914400"/>
+        </p:xfrm>
+        <a:graphic>
+          <a:graphicData uri="http://schemas.openxmlformats.org/drawingml/2006/table">
+            <a:tbl>
+              <a:tblPr/>
+              <a:tblGrid>
+                <a:gridCol w="685800"/>
+                <a:gridCol w="960120"/>
+                <a:gridCol w="1691640"/>
+                <a:gridCol w="1965960"/>
+                <a:gridCol w="1261872"/>
+              </a:tblGrid>
+              <a:tr h="502920">
+                <a:tc>
+                  <a:txBody>
+                    <a:bodyPr/>
+                    <a:lstStyle/>
+                    <a:p>
+                      <a:pPr algn="ctr" indent="0" marL="0">
+                        <a:buNone/>
+                      </a:pPr>
+                      <a:r>
+                        <a:rPr lang="en-US" sz="1300" b="1" dirty="0">
+                          <a:solidFill>
+                            <a:srgbClr val="FFFFFF"/>
+                          </a:solidFill>
+                          <a:latin typeface="Calibri" pitchFamily="34" charset="0"/>
+                          <a:ea typeface="Calibri" pitchFamily="34" charset="-122"/>
+                          <a:cs typeface="Calibri" pitchFamily="34" charset="-120"/>
+                        </a:rPr>
+                        <a:t>Conf.</a:t>
+                      </a:r>
+                      <a:endParaRPr lang="en-US" sz="1300" dirty="0">
+                        <a:latin typeface="Calibri" charset="0"/>
+                        <a:ea typeface="Calibri" charset="0"/>
+                        <a:cs typeface="Calibri" charset="0"/>
+                      </a:endParaRPr>
+                    </a:p>
+                  </a:txBody>
+                  <a:tcPr marL="73152" marR="73152" marT="36576" marB="36576" anchor="ctr">
+                    <a:lnL w="9525" cap="flat" cmpd="sng" algn="ctr">
+                      <a:solidFill>
+                        <a:srgbClr val="D5DBE1"/>
+                      </a:solidFill>
+                      <a:prstDash val="solid"/>
+                      <a:round/>
+                      <a:headEnd type="none" w="med" len="med"/>
+                      <a:tailEnd type="none" w="med" len="med"/>
+                    </a:lnL>
+                    <a:lnR w="9525" cap="flat" cmpd="sng" algn="ctr">
+                      <a:solidFill>
+                        <a:srgbClr val="D5DBE1"/>
+                      </a:solidFill>
+                      <a:prstDash val="solid"/>
+                      <a:round/>
+                      <a:headEnd type="none" w="med" len="med"/>
+                      <a:tailEnd type="none" w="med" len="med"/>
+                    </a:lnR>
+                    <a:lnT w="9525" cap="flat" cmpd="sng" algn="ctr">
+                      <a:solidFill>
+                        <a:srgbClr val="D5DBE1"/>
+                      </a:solidFill>
+                      <a:prstDash val="solid"/>
+                      <a:round/>
+                      <a:headEnd type="none" w="med" len="med"/>
+                      <a:tailEnd type="none" w="med" len="med"/>
+                    </a:lnT>
+                    <a:lnB w="9525" cap="flat" cmpd="sng" algn="ctr">
+                      <a:solidFill>
+                        <a:srgbClr val="D5DBE1"/>
+                      </a:solidFill>
+                      <a:prstDash val="solid"/>
+                      <a:round/>
+                      <a:headEnd type="none" w="med" len="med"/>
+                      <a:tailEnd type="none" w="med" len="med"/>
+                    </a:lnB>
+                    <a:solidFill>
+                      <a:srgbClr val="13233A"/>
+                    </a:solidFill>
+                  </a:tcPr>
+                </a:tc>
+                <a:tc>
+                  <a:txBody>
+                    <a:bodyPr/>
+                    <a:lstStyle/>
+                    <a:p>
+                      <a:pPr algn="ctr" indent="0" marL="0">
+                        <a:buNone/>
+                      </a:pPr>
+                      <a:r>
+                        <a:rPr lang="en-US" sz="1300" b="1" dirty="0">
+                          <a:solidFill>
+                            <a:srgbClr val="FFFFFF"/>
+                          </a:solidFill>
+                          <a:latin typeface="Calibri" pitchFamily="34" charset="0"/>
+                          <a:ea typeface="Calibri" pitchFamily="34" charset="-122"/>
+                          <a:cs typeface="Calibri" pitchFamily="34" charset="-120"/>
+                        </a:rPr>
+                        <a:t>Muestras</a:t>
+                      </a:r>
+                      <a:endParaRPr lang="en-US" sz="1300" dirty="0">
+                        <a:latin typeface="Calibri" charset="0"/>
+                        <a:ea typeface="Calibri" charset="0"/>
+                        <a:cs typeface="Calibri" charset="0"/>
+                      </a:endParaRPr>
+                    </a:p>
+                  </a:txBody>
+                  <a:tcPr marL="73152" marR="73152" marT="36576" marB="36576" anchor="ctr">
+                    <a:lnL w="9525" cap="flat" cmpd="sng" algn="ctr">
+                      <a:solidFill>
+                        <a:srgbClr val="D5DBE1"/>
+                      </a:solidFill>
+                      <a:prstDash val="solid"/>
+                      <a:round/>
+                      <a:headEnd type="none" w="med" len="med"/>
+                      <a:tailEnd type="none" w="med" len="med"/>
+                    </a:lnL>
+                    <a:lnR w="9525" cap="flat" cmpd="sng" algn="ctr">
+                      <a:solidFill>
+                        <a:srgbClr val="D5DBE1"/>
+                      </a:solidFill>
+                      <a:prstDash val="solid"/>
+                      <a:round/>
+                      <a:headEnd type="none" w="med" len="med"/>
+                      <a:tailEnd type="none" w="med" len="med"/>
+                    </a:lnR>
+                    <a:lnT w="9525" cap="flat" cmpd="sng" algn="ctr">
+                      <a:solidFill>
+                        <a:srgbClr val="D5DBE1"/>
+                      </a:solidFill>
+                      <a:prstDash val="solid"/>
+                      <a:round/>
+                      <a:headEnd type="none" w="med" len="med"/>
+                      <a:tailEnd type="none" w="med" len="med"/>
+                    </a:lnT>
+                    <a:lnB w="9525" cap="flat" cmpd="sng" algn="ctr">
+                      <a:solidFill>
+                        <a:srgbClr val="D5DBE1"/>
+                      </a:solidFill>
+                      <a:prstDash val="solid"/>
+                      <a:round/>
+                      <a:headEnd type="none" w="med" len="med"/>
+                      <a:tailEnd type="none" w="med" len="med"/>
+                    </a:lnB>
+                    <a:solidFill>
+                      <a:srgbClr val="13233A"/>
+                    </a:solidFill>
+                  </a:tcPr>
+                </a:tc>
+                <a:tc>
+                  <a:txBody>
+                    <a:bodyPr/>
+                    <a:lstStyle/>
+                    <a:p>
+                      <a:pPr algn="ctr" indent="0" marL="0">
+                        <a:buNone/>
+                      </a:pPr>
+                      <a:r>
+                        <a:rPr lang="en-US" sz="1300" b="1" dirty="0">
+                          <a:solidFill>
+                            <a:srgbClr val="FFFFFF"/>
+                          </a:solidFill>
+                          <a:latin typeface="Calibri" pitchFamily="34" charset="0"/>
+                          <a:ea typeface="Calibri" pitchFamily="34" charset="-122"/>
+                          <a:cs typeface="Calibri" pitchFamily="34" charset="-120"/>
+                        </a:rPr>
+                        <a:t>Población (IC 95%)</a:t>
+                      </a:r>
+                      <a:endParaRPr lang="en-US" sz="1300" dirty="0">
+                        <a:latin typeface="Calibri" charset="0"/>
+                        <a:ea typeface="Calibri" charset="0"/>
+                        <a:cs typeface="Calibri" charset="0"/>
+                      </a:endParaRPr>
+                    </a:p>
+                  </a:txBody>
+                  <a:tcPr marL="73152" marR="73152" marT="36576" marB="36576" anchor="ctr">
+                    <a:lnL w="9525" cap="flat" cmpd="sng" algn="ctr">
+                      <a:solidFill>
+                        <a:srgbClr val="D5DBE1"/>
+                      </a:solidFill>
+                      <a:prstDash val="solid"/>
+                      <a:round/>
+                      <a:headEnd type="none" w="med" len="med"/>
+                      <a:tailEnd type="none" w="med" len="med"/>
+                    </a:lnL>
+                    <a:lnR w="9525" cap="flat" cmpd="sng" algn="ctr">
+                      <a:solidFill>
+                        <a:srgbClr val="D5DBE1"/>
+                      </a:solidFill>
+                      <a:prstDash val="solid"/>
+                      <a:round/>
+                      <a:headEnd type="none" w="med" len="med"/>
+                      <a:tailEnd type="none" w="med" len="med"/>
+                    </a:lnR>
+                    <a:lnT w="9525" cap="flat" cmpd="sng" algn="ctr">
+                      <a:solidFill>
+                        <a:srgbClr val="D5DBE1"/>
+                      </a:solidFill>
+                      <a:prstDash val="solid"/>
+                      <a:round/>
+                      <a:headEnd type="none" w="med" len="med"/>
+                      <a:tailEnd type="none" w="med" len="med"/>
+                    </a:lnT>
+                    <a:lnB w="9525" cap="flat" cmpd="sng" algn="ctr">
+                      <a:solidFill>
+                        <a:srgbClr val="D5DBE1"/>
+                      </a:solidFill>
+                      <a:prstDash val="solid"/>
+                      <a:round/>
+                      <a:headEnd type="none" w="med" len="med"/>
+                      <a:tailEnd type="none" w="med" len="med"/>
+                    </a:lnB>
+                    <a:solidFill>
+                      <a:srgbClr val="13233A"/>
+                    </a:solidFill>
+                  </a:tcPr>
+                </a:tc>
+                <a:tc>
+                  <a:txBody>
+                    <a:bodyPr/>
+                    <a:lstStyle/>
+                    <a:p>
+                      <a:pPr algn="ctr" indent="0" marL="0">
+                        <a:buNone/>
+                      </a:pPr>
+                      <a:r>
+                        <a:rPr lang="en-US" sz="1300" b="1" dirty="0">
+                          <a:solidFill>
+                            <a:srgbClr val="FFFFFF"/>
+                          </a:solidFill>
+                          <a:latin typeface="Calibri" pitchFamily="34" charset="0"/>
+                          <a:ea typeface="Calibri" pitchFamily="34" charset="-122"/>
+                          <a:cs typeface="Calibri" pitchFamily="34" charset="-120"/>
+                        </a:rPr>
+                        <a:t>ΔG kcal/mol (IC 95%)</a:t>
+                      </a:r>
+                      <a:endParaRPr lang="en-US" sz="1300" dirty="0">
+                        <a:latin typeface="Calibri" charset="0"/>
+                        <a:ea typeface="Calibri" charset="0"/>
+                        <a:cs typeface="Calibri" charset="0"/>
+                      </a:endParaRPr>
+                    </a:p>
+                  </a:txBody>
+                  <a:tcPr marL="73152" marR="73152" marT="36576" marB="36576" anchor="ctr">
+                    <a:lnL w="9525" cap="flat" cmpd="sng" algn="ctr">
+                      <a:solidFill>
+                        <a:srgbClr val="D5DBE1"/>
+                      </a:solidFill>
+                      <a:prstDash val="solid"/>
+                      <a:round/>
+                      <a:headEnd type="none" w="med" len="med"/>
+                      <a:tailEnd type="none" w="med" len="med"/>
+                    </a:lnL>
+                    <a:lnR w="9525" cap="flat" cmpd="sng" algn="ctr">
+                      <a:solidFill>
+                        <a:srgbClr val="D5DBE1"/>
+                      </a:solidFill>
+                      <a:prstDash val="solid"/>
+                      <a:round/>
+                      <a:headEnd type="none" w="med" len="med"/>
+                      <a:tailEnd type="none" w="med" len="med"/>
+                    </a:lnR>
+                    <a:lnT w="9525" cap="flat" cmpd="sng" algn="ctr">
+                      <a:solidFill>
+                        <a:srgbClr val="D5DBE1"/>
+                      </a:solidFill>
+                      <a:prstDash val="solid"/>
+                      <a:round/>
+                      <a:headEnd type="none" w="med" len="med"/>
+                      <a:tailEnd type="none" w="med" len="med"/>
+                    </a:lnT>
+                    <a:lnB w="9525" cap="flat" cmpd="sng" algn="ctr">
+                      <a:solidFill>
+                        <a:srgbClr val="D5DBE1"/>
+                      </a:solidFill>
+                      <a:prstDash val="solid"/>
+                      <a:round/>
+                      <a:headEnd type="none" w="med" len="med"/>
+                      <a:tailEnd type="none" w="med" len="med"/>
+                    </a:lnB>
+                    <a:solidFill>
+                      <a:srgbClr val="13233A"/>
+                    </a:solidFill>
+                  </a:tcPr>
+                </a:tc>
+                <a:tc>
+                  <a:txBody>
+                    <a:bodyPr/>
+                    <a:lstStyle/>
+                    <a:p>
+                      <a:pPr algn="ctr" indent="0" marL="0">
+                        <a:buNone/>
+                      </a:pPr>
+                      <a:r>
+                        <a:rPr lang="en-US" sz="1300" b="1" dirty="0">
+                          <a:solidFill>
+                            <a:srgbClr val="FFFFFF"/>
+                          </a:solidFill>
+                          <a:latin typeface="Calibri" pitchFamily="34" charset="0"/>
+                          <a:ea typeface="Calibri" pitchFamily="34" charset="-122"/>
+                          <a:cs typeface="Calibri" pitchFamily="34" charset="-120"/>
+                        </a:rPr>
+                        <a:t>Giro de CheY</a:t>
+                      </a:r>
+                      <a:endParaRPr lang="en-US" sz="1300" dirty="0">
+                        <a:latin typeface="Calibri" charset="0"/>
+                        <a:ea typeface="Calibri" charset="0"/>
+                        <a:cs typeface="Calibri" charset="0"/>
+                      </a:endParaRPr>
+                    </a:p>
+                  </a:txBody>
+                  <a:tcPr marL="73152" marR="73152" marT="36576" marB="36576" anchor="ctr">
+                    <a:lnL w="9525" cap="flat" cmpd="sng" algn="ctr">
+                      <a:solidFill>
+                        <a:srgbClr val="D5DBE1"/>
+                      </a:solidFill>
+                      <a:prstDash val="solid"/>
+                      <a:round/>
+                      <a:headEnd type="none" w="med" len="med"/>
+                      <a:tailEnd type="none" w="med" len="med"/>
+                    </a:lnL>
+                    <a:lnR w="9525" cap="flat" cmpd="sng" algn="ctr">
+                      <a:solidFill>
+                        <a:srgbClr val="D5DBE1"/>
+                      </a:solidFill>
+                      <a:prstDash val="solid"/>
+                      <a:round/>
+                      <a:headEnd type="none" w="med" len="med"/>
+                      <a:tailEnd type="none" w="med" len="med"/>
+                    </a:lnR>
+                    <a:lnT w="9525" cap="flat" cmpd="sng" algn="ctr">
+                      <a:solidFill>
+                        <a:srgbClr val="D5DBE1"/>
+                      </a:solidFill>
+                      <a:prstDash val="solid"/>
+                      <a:round/>
+                      <a:headEnd type="none" w="med" len="med"/>
+                      <a:tailEnd type="none" w="med" len="med"/>
+                    </a:lnT>
+                    <a:lnB w="9525" cap="flat" cmpd="sng" algn="ctr">
+                      <a:solidFill>
+                        <a:srgbClr val="D5DBE1"/>
+                      </a:solidFill>
+                      <a:prstDash val="solid"/>
+                      <a:round/>
+                      <a:headEnd type="none" w="med" len="med"/>
+                      <a:tailEnd type="none" w="med" len="med"/>
+                    </a:lnB>
+                    <a:solidFill>
+                      <a:srgbClr val="13233A"/>
+                    </a:solidFill>
+                  </a:tcPr>
+                </a:tc>
+              </a:tr>
+              <a:tr h="502920">
+                <a:tc>
+                  <a:txBody>
+                    <a:bodyPr/>
+                    <a:lstStyle/>
+                    <a:p>
+                      <a:pPr algn="ctr" indent="0" marL="0">
+                        <a:buNone/>
+                      </a:pPr>
+                      <a:r>
+                        <a:rPr lang="en-US" sz="1300" b="1" dirty="0">
+                          <a:solidFill>
+                            <a:srgbClr val="E8792B"/>
+                          </a:solidFill>
+                          <a:latin typeface="Calibri" pitchFamily="34" charset="0"/>
+                          <a:ea typeface="Calibri" pitchFamily="34" charset="-122"/>
+                          <a:cs typeface="Calibri" pitchFamily="34" charset="-120"/>
+                        </a:rPr>
+                        <a:t>1</a:t>
+                      </a:r>
+                      <a:endParaRPr lang="en-US" sz="1300" dirty="0">
+                        <a:latin typeface="Calibri" charset="0"/>
+                        <a:ea typeface="Calibri" charset="0"/>
+                        <a:cs typeface="Calibri" charset="0"/>
+                      </a:endParaRPr>
+                    </a:p>
+                  </a:txBody>
+                  <a:tcPr marL="73152" marR="73152" marT="36576" marB="36576" anchor="ctr">
+                    <a:lnL w="9525" cap="flat" cmpd="sng" algn="ctr">
+                      <a:solidFill>
+                        <a:srgbClr val="D5DBE1"/>
+                      </a:solidFill>
+                      <a:prstDash val="solid"/>
+                      <a:round/>
+                      <a:headEnd type="none" w="med" len="med"/>
+                      <a:tailEnd type="none" w="med" len="med"/>
+                    </a:lnL>
+                    <a:lnR w="9525" cap="flat" cmpd="sng" algn="ctr">
+                      <a:solidFill>
+                        <a:srgbClr val="D5DBE1"/>
+                      </a:solidFill>
+                      <a:prstDash val="solid"/>
+                      <a:round/>
+                      <a:headEnd type="none" w="med" len="med"/>
+                      <a:tailEnd type="none" w="med" len="med"/>
+                    </a:lnR>
+                    <a:lnT w="9525" cap="flat" cmpd="sng" algn="ctr">
+                      <a:solidFill>
+                        <a:srgbClr val="D5DBE1"/>
+                      </a:solidFill>
+                      <a:prstDash val="solid"/>
+                      <a:round/>
+                      <a:headEnd type="none" w="med" len="med"/>
+                      <a:tailEnd type="none" w="med" len="med"/>
+                    </a:lnT>
+                    <a:lnB w="9525" cap="flat" cmpd="sng" algn="ctr">
+                      <a:solidFill>
+                        <a:srgbClr val="D5DBE1"/>
+                      </a:solidFill>
+                      <a:prstDash val="solid"/>
+                      <a:round/>
+                      <a:headEnd type="none" w="med" len="med"/>
+                      <a:tailEnd type="none" w="med" len="med"/>
+                    </a:lnB>
+                    <a:solidFill>
+                      <a:srgbClr val="FFFFFF"/>
+                    </a:solidFill>
+                  </a:tcPr>
+                </a:tc>
+                <a:tc>
+                  <a:txBody>
+                    <a:bodyPr/>
+                    <a:lstStyle/>
+                    <a:p>
+                      <a:pPr algn="ctr" indent="0" marL="0">
+                        <a:buNone/>
+                      </a:pPr>
+                      <a:r>
+                        <a:rPr lang="en-US" sz="1300" dirty="0">
+                          <a:solidFill>
+                            <a:srgbClr val="1B2430"/>
+                          </a:solidFill>
+                          <a:latin typeface="Calibri" pitchFamily="34" charset="0"/>
+                          <a:ea typeface="Calibri" pitchFamily="34" charset="-122"/>
+                          <a:cs typeface="Calibri" pitchFamily="34" charset="-120"/>
+                        </a:rPr>
+                        <a:t>172</a:t>
+                      </a:r>
+                      <a:endParaRPr lang="en-US" sz="1300" dirty="0">
+                        <a:latin typeface="Calibri" charset="0"/>
+                        <a:ea typeface="Calibri" charset="0"/>
+                        <a:cs typeface="Calibri" charset="0"/>
+                      </a:endParaRPr>
+                    </a:p>
+                  </a:txBody>
+                  <a:tcPr marL="73152" marR="73152" marT="36576" marB="36576" anchor="ctr">
+                    <a:lnL w="9525" cap="flat" cmpd="sng" algn="ctr">
+                      <a:solidFill>
+                        <a:srgbClr val="D5DBE1"/>
+                      </a:solidFill>
+                      <a:prstDash val="solid"/>
+                      <a:round/>
+                      <a:headEnd type="none" w="med" len="med"/>
+                      <a:tailEnd type="none" w="med" len="med"/>
+                    </a:lnL>
+                    <a:lnR w="9525" cap="flat" cmpd="sng" algn="ctr">
+                      <a:solidFill>
+                        <a:srgbClr val="D5DBE1"/>
+                      </a:solidFill>
+                      <a:prstDash val="solid"/>
+                      <a:round/>
+                      <a:headEnd type="none" w="med" len="med"/>
+                      <a:tailEnd type="none" w="med" len="med"/>
+                    </a:lnR>
+                    <a:lnT w="9525" cap="flat" cmpd="sng" algn="ctr">
+                      <a:solidFill>
+                        <a:srgbClr val="D5DBE1"/>
+                      </a:solidFill>
+                      <a:prstDash val="solid"/>
+                      <a:round/>
+                      <a:headEnd type="none" w="med" len="med"/>
+                      <a:tailEnd type="none" w="med" len="med"/>
+                    </a:lnT>
+                    <a:lnB w="9525" cap="flat" cmpd="sng" algn="ctr">
+                      <a:solidFill>
+                        <a:srgbClr val="D5DBE1"/>
+                      </a:solidFill>
+                      <a:prstDash val="solid"/>
+                      <a:round/>
+                      <a:headEnd type="none" w="med" len="med"/>
+                      <a:tailEnd type="none" w="med" len="med"/>
+                    </a:lnB>
+                    <a:solidFill>
+                      <a:srgbClr val="FFFFFF"/>
+                    </a:solidFill>
+                  </a:tcPr>
+                </a:tc>
+                <a:tc>
+                  <a:txBody>
+                    <a:bodyPr/>
+                    <a:lstStyle/>
+                    <a:p>
+                      <a:pPr algn="ctr" indent="0" marL="0">
+                        <a:buNone/>
+                      </a:pPr>
+                      <a:r>
+                        <a:rPr lang="en-US" sz="1300" dirty="0">
+                          <a:solidFill>
+                            <a:srgbClr val="1B2430"/>
+                          </a:solidFill>
+                          <a:latin typeface="Calibri" pitchFamily="34" charset="0"/>
+                          <a:ea typeface="Calibri" pitchFamily="34" charset="-122"/>
+                          <a:cs typeface="Calibri" pitchFamily="34" charset="-120"/>
+                        </a:rPr>
+                        <a:t>69.9% (64–76)</a:t>
+                      </a:r>
+                      <a:endParaRPr lang="en-US" sz="1300" dirty="0">
+                        <a:latin typeface="Calibri" charset="0"/>
+                        <a:ea typeface="Calibri" charset="0"/>
+                        <a:cs typeface="Calibri" charset="0"/>
+                      </a:endParaRPr>
+                    </a:p>
+                  </a:txBody>
+                  <a:tcPr marL="73152" marR="73152" marT="36576" marB="36576" anchor="ctr">
+                    <a:lnL w="9525" cap="flat" cmpd="sng" algn="ctr">
+                      <a:solidFill>
+                        <a:srgbClr val="D5DBE1"/>
+                      </a:solidFill>
+                      <a:prstDash val="solid"/>
+                      <a:round/>
+                      <a:headEnd type="none" w="med" len="med"/>
+                      <a:tailEnd type="none" w="med" len="med"/>
+                    </a:lnL>
+                    <a:lnR w="9525" cap="flat" cmpd="sng" algn="ctr">
+                      <a:solidFill>
+                        <a:srgbClr val="D5DBE1"/>
+                      </a:solidFill>
+                      <a:prstDash val="solid"/>
+                      <a:round/>
+                      <a:headEnd type="none" w="med" len="med"/>
+                      <a:tailEnd type="none" w="med" len="med"/>
+                    </a:lnR>
+                    <a:lnT w="9525" cap="flat" cmpd="sng" algn="ctr">
+                      <a:solidFill>
+                        <a:srgbClr val="D5DBE1"/>
+                      </a:solidFill>
+                      <a:prstDash val="solid"/>
+                      <a:round/>
+                      <a:headEnd type="none" w="med" len="med"/>
+                      <a:tailEnd type="none" w="med" len="med"/>
+                    </a:lnT>
+                    <a:lnB w="9525" cap="flat" cmpd="sng" algn="ctr">
+                      <a:solidFill>
+                        <a:srgbClr val="D5DBE1"/>
+                      </a:solidFill>
+                      <a:prstDash val="solid"/>
+                      <a:round/>
+                      <a:headEnd type="none" w="med" len="med"/>
+                      <a:tailEnd type="none" w="med" len="med"/>
+                    </a:lnB>
+                    <a:solidFill>
+                      <a:srgbClr val="FFFFFF"/>
+                    </a:solidFill>
+                  </a:tcPr>
+                </a:tc>
+                <a:tc>
+                  <a:txBody>
+                    <a:bodyPr/>
+                    <a:lstStyle/>
+                    <a:p>
+                      <a:pPr algn="ctr" indent="0" marL="0">
+                        <a:buNone/>
+                      </a:pPr>
+                      <a:r>
+                        <a:rPr lang="en-US" sz="1300" dirty="0">
+                          <a:solidFill>
+                            <a:srgbClr val="1B2430"/>
+                          </a:solidFill>
+                          <a:latin typeface="Calibri" pitchFamily="34" charset="0"/>
+                          <a:ea typeface="Calibri" pitchFamily="34" charset="-122"/>
+                          <a:cs typeface="Calibri" pitchFamily="34" charset="-120"/>
+                        </a:rPr>
+                        <a:t>0 (referencia)</a:t>
+                      </a:r>
+                      <a:endParaRPr lang="en-US" sz="1300" dirty="0">
+                        <a:latin typeface="Calibri" charset="0"/>
+                        <a:ea typeface="Calibri" charset="0"/>
+                        <a:cs typeface="Calibri" charset="0"/>
+                      </a:endParaRPr>
+                    </a:p>
+                  </a:txBody>
+                  <a:tcPr marL="73152" marR="73152" marT="36576" marB="36576" anchor="ctr">
+                    <a:lnL w="9525" cap="flat" cmpd="sng" algn="ctr">
+                      <a:solidFill>
+                        <a:srgbClr val="D5DBE1"/>
+                      </a:solidFill>
+                      <a:prstDash val="solid"/>
+                      <a:round/>
+                      <a:headEnd type="none" w="med" len="med"/>
+                      <a:tailEnd type="none" w="med" len="med"/>
+                    </a:lnL>
+                    <a:lnR w="9525" cap="flat" cmpd="sng" algn="ctr">
+                      <a:solidFill>
+                        <a:srgbClr val="D5DBE1"/>
+                      </a:solidFill>
+                      <a:prstDash val="solid"/>
+                      <a:round/>
+                      <a:headEnd type="none" w="med" len="med"/>
+                      <a:tailEnd type="none" w="med" len="med"/>
+                    </a:lnR>
+                    <a:lnT w="9525" cap="flat" cmpd="sng" algn="ctr">
+                      <a:solidFill>
+                        <a:srgbClr val="D5DBE1"/>
+                      </a:solidFill>
+                      <a:prstDash val="solid"/>
+                      <a:round/>
+                      <a:headEnd type="none" w="med" len="med"/>
+                      <a:tailEnd type="none" w="med" len="med"/>
+                    </a:lnT>
+                    <a:lnB w="9525" cap="flat" cmpd="sng" algn="ctr">
+                      <a:solidFill>
+                        <a:srgbClr val="D5DBE1"/>
+                      </a:solidFill>
+                      <a:prstDash val="solid"/>
+                      <a:round/>
+                      <a:headEnd type="none" w="med" len="med"/>
+                      <a:tailEnd type="none" w="med" len="med"/>
+                    </a:lnB>
+                    <a:solidFill>
+                      <a:srgbClr val="FFFFFF"/>
+                    </a:solidFill>
+                  </a:tcPr>
+                </a:tc>
+                <a:tc>
+                  <a:txBody>
+                    <a:bodyPr/>
+                    <a:lstStyle/>
+                    <a:p>
+                      <a:pPr algn="ctr" indent="0" marL="0">
+                        <a:buNone/>
+                      </a:pPr>
+                      <a:r>
+                        <a:rPr lang="en-US" sz="1300" dirty="0">
+                          <a:solidFill>
+                            <a:srgbClr val="1B2430"/>
+                          </a:solidFill>
+                          <a:latin typeface="Calibri" pitchFamily="34" charset="0"/>
+                          <a:ea typeface="Calibri" pitchFamily="34" charset="-122"/>
+                          <a:cs typeface="Calibri" pitchFamily="34" charset="-120"/>
+                        </a:rPr>
+                        <a:t>−3.5 ± 12°</a:t>
+                      </a:r>
+                      <a:endParaRPr lang="en-US" sz="1300" dirty="0">
+                        <a:latin typeface="Calibri" charset="0"/>
+                        <a:ea typeface="Calibri" charset="0"/>
+                        <a:cs typeface="Calibri" charset="0"/>
+                      </a:endParaRPr>
+                    </a:p>
+                  </a:txBody>
+                  <a:tcPr marL="73152" marR="73152" marT="36576" marB="36576" anchor="ctr">
+                    <a:lnL w="9525" cap="flat" cmpd="sng" algn="ctr">
+                      <a:solidFill>
+                        <a:srgbClr val="D5DBE1"/>
+                      </a:solidFill>
+                      <a:prstDash val="solid"/>
+                      <a:round/>
+                      <a:headEnd type="none" w="med" len="med"/>
+                      <a:tailEnd type="none" w="med" len="med"/>
+                    </a:lnL>
+                    <a:lnR w="9525" cap="flat" cmpd="sng" algn="ctr">
+                      <a:solidFill>
+                        <a:srgbClr val="D5DBE1"/>
+                      </a:solidFill>
+                      <a:prstDash val="solid"/>
+                      <a:round/>
+                      <a:headEnd type="none" w="med" len="med"/>
+                      <a:tailEnd type="none" w="med" len="med"/>
+                    </a:lnR>
+                    <a:lnT w="9525" cap="flat" cmpd="sng" algn="ctr">
+                      <a:solidFill>
+                        <a:srgbClr val="D5DBE1"/>
+                      </a:solidFill>
+                      <a:prstDash val="solid"/>
+                      <a:round/>
+                      <a:headEnd type="none" w="med" len="med"/>
+                      <a:tailEnd type="none" w="med" len="med"/>
+                    </a:lnT>
+                    <a:lnB w="9525" cap="flat" cmpd="sng" algn="ctr">
+                      <a:solidFill>
+                        <a:srgbClr val="D5DBE1"/>
+                      </a:solidFill>
+                      <a:prstDash val="solid"/>
+                      <a:round/>
+                      <a:headEnd type="none" w="med" len="med"/>
+                      <a:tailEnd type="none" w="med" len="med"/>
+                    </a:lnB>
+                    <a:solidFill>
+                      <a:srgbClr val="FFFFFF"/>
+                    </a:solidFill>
+                  </a:tcPr>
+                </a:tc>
+              </a:tr>
+              <a:tr h="502920">
+                <a:tc>
+                  <a:txBody>
+                    <a:bodyPr/>
+                    <a:lstStyle/>
+                    <a:p>
+                      <a:pPr algn="ctr" indent="0" marL="0">
+                        <a:buNone/>
+                      </a:pPr>
+                      <a:r>
+                        <a:rPr lang="en-US" sz="1300" b="1" dirty="0">
+                          <a:solidFill>
+                            <a:srgbClr val="2A9D8F"/>
+                          </a:solidFill>
+                          <a:latin typeface="Calibri" pitchFamily="34" charset="0"/>
+                          <a:ea typeface="Calibri" pitchFamily="34" charset="-122"/>
+                          <a:cs typeface="Calibri" pitchFamily="34" charset="-120"/>
+                        </a:rPr>
+                        <a:t>2</a:t>
+                      </a:r>
+                      <a:endParaRPr lang="en-US" sz="1300" dirty="0">
+                        <a:latin typeface="Calibri" charset="0"/>
+                        <a:ea typeface="Calibri" charset="0"/>
+                        <a:cs typeface="Calibri" charset="0"/>
+                      </a:endParaRPr>
+                    </a:p>
+                  </a:txBody>
+                  <a:tcPr marL="73152" marR="73152" marT="36576" marB="36576" anchor="ctr">
+                    <a:lnL w="9525" cap="flat" cmpd="sng" algn="ctr">
+                      <a:solidFill>
+                        <a:srgbClr val="D5DBE1"/>
+                      </a:solidFill>
+                      <a:prstDash val="solid"/>
+                      <a:round/>
+                      <a:headEnd type="none" w="med" len="med"/>
+                      <a:tailEnd type="none" w="med" len="med"/>
+                    </a:lnL>
+                    <a:lnR w="9525" cap="flat" cmpd="sng" algn="ctr">
+                      <a:solidFill>
+                        <a:srgbClr val="D5DBE1"/>
+                      </a:solidFill>
+                      <a:prstDash val="solid"/>
+                      <a:round/>
+                      <a:headEnd type="none" w="med" len="med"/>
+                      <a:tailEnd type="none" w="med" len="med"/>
+                    </a:lnR>
+                    <a:lnT w="9525" cap="flat" cmpd="sng" algn="ctr">
+                      <a:solidFill>
+                        <a:srgbClr val="D5DBE1"/>
+                      </a:solidFill>
+                      <a:prstDash val="solid"/>
+                      <a:round/>
+                      <a:headEnd type="none" w="med" len="med"/>
+                      <a:tailEnd type="none" w="med" len="med"/>
+                    </a:lnT>
+                    <a:lnB w="9525" cap="flat" cmpd="sng" algn="ctr">
+                      <a:solidFill>
+                        <a:srgbClr val="D5DBE1"/>
+                      </a:solidFill>
+                      <a:prstDash val="solid"/>
+                      <a:round/>
+                      <a:headEnd type="none" w="med" len="med"/>
+                      <a:tailEnd type="none" w="med" len="med"/>
+                    </a:lnB>
+                    <a:solidFill>
+                      <a:srgbClr val="FFFFFF"/>
+                    </a:solidFill>
+                  </a:tcPr>
+                </a:tc>
+                <a:tc>
+                  <a:txBody>
+                    <a:bodyPr/>
+                    <a:lstStyle/>
+                    <a:p>
+                      <a:pPr algn="ctr" indent="0" marL="0">
+                        <a:buNone/>
+                      </a:pPr>
+                      <a:r>
+                        <a:rPr lang="en-US" sz="1300" dirty="0">
+                          <a:solidFill>
+                            <a:srgbClr val="1B2430"/>
+                          </a:solidFill>
+                          <a:latin typeface="Calibri" pitchFamily="34" charset="0"/>
+                          <a:ea typeface="Calibri" pitchFamily="34" charset="-122"/>
+                          <a:cs typeface="Calibri" pitchFamily="34" charset="-120"/>
+                        </a:rPr>
+                        <a:t>54</a:t>
+                      </a:r>
+                      <a:endParaRPr lang="en-US" sz="1300" dirty="0">
+                        <a:latin typeface="Calibri" charset="0"/>
+                        <a:ea typeface="Calibri" charset="0"/>
+                        <a:cs typeface="Calibri" charset="0"/>
+                      </a:endParaRPr>
+                    </a:p>
+                  </a:txBody>
+                  <a:tcPr marL="73152" marR="73152" marT="36576" marB="36576" anchor="ctr">
+                    <a:lnL w="9525" cap="flat" cmpd="sng" algn="ctr">
+                      <a:solidFill>
+                        <a:srgbClr val="D5DBE1"/>
+                      </a:solidFill>
+                      <a:prstDash val="solid"/>
+                      <a:round/>
+                      <a:headEnd type="none" w="med" len="med"/>
+                      <a:tailEnd type="none" w="med" len="med"/>
+                    </a:lnL>
+                    <a:lnR w="9525" cap="flat" cmpd="sng" algn="ctr">
+                      <a:solidFill>
+                        <a:srgbClr val="D5DBE1"/>
+                      </a:solidFill>
+                      <a:prstDash val="solid"/>
+                      <a:round/>
+                      <a:headEnd type="none" w="med" len="med"/>
+                      <a:tailEnd type="none" w="med" len="med"/>
+                    </a:lnR>
+                    <a:lnT w="9525" cap="flat" cmpd="sng" algn="ctr">
+                      <a:solidFill>
+                        <a:srgbClr val="D5DBE1"/>
+                      </a:solidFill>
+                      <a:prstDash val="solid"/>
+                      <a:round/>
+                      <a:headEnd type="none" w="med" len="med"/>
+                      <a:tailEnd type="none" w="med" len="med"/>
+                    </a:lnT>
+                    <a:lnB w="9525" cap="flat" cmpd="sng" algn="ctr">
+                      <a:solidFill>
+                        <a:srgbClr val="D5DBE1"/>
+                      </a:solidFill>
+                      <a:prstDash val="solid"/>
+                      <a:round/>
+                      <a:headEnd type="none" w="med" len="med"/>
+                      <a:tailEnd type="none" w="med" len="med"/>
+                    </a:lnB>
+                    <a:solidFill>
+                      <a:srgbClr val="FFFFFF"/>
+                    </a:solidFill>
+                  </a:tcPr>
+                </a:tc>
+                <a:tc>
+                  <a:txBody>
+                    <a:bodyPr/>
+                    <a:lstStyle/>
+                    <a:p>
+                      <a:pPr algn="ctr" indent="0" marL="0">
+                        <a:buNone/>
+                      </a:pPr>
+                      <a:r>
+                        <a:rPr lang="en-US" sz="1300" dirty="0">
+                          <a:solidFill>
+                            <a:srgbClr val="1B2430"/>
+                          </a:solidFill>
+                          <a:latin typeface="Calibri" pitchFamily="34" charset="0"/>
+                          <a:ea typeface="Calibri" pitchFamily="34" charset="-122"/>
+                          <a:cs typeface="Calibri" pitchFamily="34" charset="-120"/>
+                        </a:rPr>
+                        <a:t>22.0% (17–27)</a:t>
+                      </a:r>
+                      <a:endParaRPr lang="en-US" sz="1300" dirty="0">
+                        <a:latin typeface="Calibri" charset="0"/>
+                        <a:ea typeface="Calibri" charset="0"/>
+                        <a:cs typeface="Calibri" charset="0"/>
+                      </a:endParaRPr>
+                    </a:p>
+                  </a:txBody>
+                  <a:tcPr marL="73152" marR="73152" marT="36576" marB="36576" anchor="ctr">
+                    <a:lnL w="9525" cap="flat" cmpd="sng" algn="ctr">
+                      <a:solidFill>
+                        <a:srgbClr val="D5DBE1"/>
+                      </a:solidFill>
+                      <a:prstDash val="solid"/>
+                      <a:round/>
+                      <a:headEnd type="none" w="med" len="med"/>
+                      <a:tailEnd type="none" w="med" len="med"/>
+                    </a:lnL>
+                    <a:lnR w="9525" cap="flat" cmpd="sng" algn="ctr">
+                      <a:solidFill>
+                        <a:srgbClr val="D5DBE1"/>
+                      </a:solidFill>
+                      <a:prstDash val="solid"/>
+                      <a:round/>
+                      <a:headEnd type="none" w="med" len="med"/>
+                      <a:tailEnd type="none" w="med" len="med"/>
+                    </a:lnR>
+                    <a:lnT w="9525" cap="flat" cmpd="sng" algn="ctr">
+                      <a:solidFill>
+                        <a:srgbClr val="D5DBE1"/>
+                      </a:solidFill>
+                      <a:prstDash val="solid"/>
+                      <a:round/>
+                      <a:headEnd type="none" w="med" len="med"/>
+                      <a:tailEnd type="none" w="med" len="med"/>
+                    </a:lnT>
+                    <a:lnB w="9525" cap="flat" cmpd="sng" algn="ctr">
+                      <a:solidFill>
+                        <a:srgbClr val="D5DBE1"/>
+                      </a:solidFill>
+                      <a:prstDash val="solid"/>
+                      <a:round/>
+                      <a:headEnd type="none" w="med" len="med"/>
+                      <a:tailEnd type="none" w="med" len="med"/>
+                    </a:lnB>
+                    <a:solidFill>
+                      <a:srgbClr val="FFFFFF"/>
+                    </a:solidFill>
+                  </a:tcPr>
+                </a:tc>
+                <a:tc>
+                  <a:txBody>
+                    <a:bodyPr/>
+                    <a:lstStyle/>
+                    <a:p>
+                      <a:pPr algn="ctr" indent="0" marL="0">
+                        <a:buNone/>
+                      </a:pPr>
+                      <a:r>
+                        <a:rPr lang="en-US" sz="1300" dirty="0">
+                          <a:solidFill>
+                            <a:srgbClr val="1B2430"/>
+                          </a:solidFill>
+                          <a:latin typeface="Calibri" pitchFamily="34" charset="0"/>
+                          <a:ea typeface="Calibri" pitchFamily="34" charset="-122"/>
+                          <a:cs typeface="Calibri" pitchFamily="34" charset="-120"/>
+                        </a:rPr>
+                        <a:t>+0.69 (0.52–0.89)</a:t>
+                      </a:r>
+                      <a:endParaRPr lang="en-US" sz="1300" dirty="0">
+                        <a:latin typeface="Calibri" charset="0"/>
+                        <a:ea typeface="Calibri" charset="0"/>
+                        <a:cs typeface="Calibri" charset="0"/>
+                      </a:endParaRPr>
+                    </a:p>
+                  </a:txBody>
+                  <a:tcPr marL="73152" marR="73152" marT="36576" marB="36576" anchor="ctr">
+                    <a:lnL w="9525" cap="flat" cmpd="sng" algn="ctr">
+                      <a:solidFill>
+                        <a:srgbClr val="D5DBE1"/>
+                      </a:solidFill>
+                      <a:prstDash val="solid"/>
+                      <a:round/>
+                      <a:headEnd type="none" w="med" len="med"/>
+                      <a:tailEnd type="none" w="med" len="med"/>
+                    </a:lnL>
+                    <a:lnR w="9525" cap="flat" cmpd="sng" algn="ctr">
+                      <a:solidFill>
+                        <a:srgbClr val="D5DBE1"/>
+                      </a:solidFill>
+                      <a:prstDash val="solid"/>
+                      <a:round/>
+                      <a:headEnd type="none" w="med" len="med"/>
+                      <a:tailEnd type="none" w="med" len="med"/>
+                    </a:lnR>
+                    <a:lnT w="9525" cap="flat" cmpd="sng" algn="ctr">
+                      <a:solidFill>
+                        <a:srgbClr val="D5DBE1"/>
+                      </a:solidFill>
+                      <a:prstDash val="solid"/>
+                      <a:round/>
+                      <a:headEnd type="none" w="med" len="med"/>
+                      <a:tailEnd type="none" w="med" len="med"/>
+                    </a:lnT>
+                    <a:lnB w="9525" cap="flat" cmpd="sng" algn="ctr">
+                      <a:solidFill>
+                        <a:srgbClr val="D5DBE1"/>
+                      </a:solidFill>
+                      <a:prstDash val="solid"/>
+                      <a:round/>
+                      <a:headEnd type="none" w="med" len="med"/>
+                      <a:tailEnd type="none" w="med" len="med"/>
+                    </a:lnB>
+                    <a:solidFill>
+                      <a:srgbClr val="FFFFFF"/>
+                    </a:solidFill>
+                  </a:tcPr>
+                </a:tc>
+                <a:tc>
+                  <a:txBody>
+                    <a:bodyPr/>
+                    <a:lstStyle/>
+                    <a:p>
+                      <a:pPr algn="ctr" indent="0" marL="0">
+                        <a:buNone/>
+                      </a:pPr>
+                      <a:r>
+                        <a:rPr lang="en-US" sz="1300" dirty="0">
+                          <a:solidFill>
+                            <a:srgbClr val="1B2430"/>
+                          </a:solidFill>
+                          <a:latin typeface="Calibri" pitchFamily="34" charset="0"/>
+                          <a:ea typeface="Calibri" pitchFamily="34" charset="-122"/>
+                          <a:cs typeface="Calibri" pitchFamily="34" charset="-120"/>
+                        </a:rPr>
+                        <a:t>+32 ± 21°</a:t>
+                      </a:r>
+                      <a:endParaRPr lang="en-US" sz="1300" dirty="0">
+                        <a:latin typeface="Calibri" charset="0"/>
+                        <a:ea typeface="Calibri" charset="0"/>
+                        <a:cs typeface="Calibri" charset="0"/>
+                      </a:endParaRPr>
+                    </a:p>
+                  </a:txBody>
+                  <a:tcPr marL="73152" marR="73152" marT="36576" marB="36576" anchor="ctr">
+                    <a:lnL w="9525" cap="flat" cmpd="sng" algn="ctr">
+                      <a:solidFill>
+                        <a:srgbClr val="D5DBE1"/>
+                      </a:solidFill>
+                      <a:prstDash val="solid"/>
+                      <a:round/>
+                      <a:headEnd type="none" w="med" len="med"/>
+                      <a:tailEnd type="none" w="med" len="med"/>
+                    </a:lnL>
+                    <a:lnR w="9525" cap="flat" cmpd="sng" algn="ctr">
+                      <a:solidFill>
+                        <a:srgbClr val="D5DBE1"/>
+                      </a:solidFill>
+                      <a:prstDash val="solid"/>
+                      <a:round/>
+                      <a:headEnd type="none" w="med" len="med"/>
+                      <a:tailEnd type="none" w="med" len="med"/>
+                    </a:lnR>
+                    <a:lnT w="9525" cap="flat" cmpd="sng" algn="ctr">
+                      <a:solidFill>
+                        <a:srgbClr val="D5DBE1"/>
+                      </a:solidFill>
+                      <a:prstDash val="solid"/>
+                      <a:round/>
+                      <a:headEnd type="none" w="med" len="med"/>
+                      <a:tailEnd type="none" w="med" len="med"/>
+                    </a:lnT>
+                    <a:lnB w="9525" cap="flat" cmpd="sng" algn="ctr">
+                      <a:solidFill>
+                        <a:srgbClr val="D5DBE1"/>
+                      </a:solidFill>
+                      <a:prstDash val="solid"/>
+                      <a:round/>
+                      <a:headEnd type="none" w="med" len="med"/>
+                      <a:tailEnd type="none" w="med" len="med"/>
+                    </a:lnB>
+                    <a:solidFill>
+                      <a:srgbClr val="FFFFFF"/>
+                    </a:solidFill>
+                  </a:tcPr>
+                </a:tc>
+              </a:tr>
+              <a:tr h="502920">
+                <a:tc>
+                  <a:txBody>
+                    <a:bodyPr/>
+                    <a:lstStyle/>
+                    <a:p>
+                      <a:pPr algn="ctr" indent="0" marL="0">
+                        <a:buNone/>
+                      </a:pPr>
+                      <a:r>
+                        <a:rPr lang="en-US" sz="1300" b="1" dirty="0">
+                          <a:solidFill>
+                            <a:srgbClr val="5B6B78"/>
+                          </a:solidFill>
+                          <a:latin typeface="Calibri" pitchFamily="34" charset="0"/>
+                          <a:ea typeface="Calibri" pitchFamily="34" charset="-122"/>
+                          <a:cs typeface="Calibri" pitchFamily="34" charset="-120"/>
+                        </a:rPr>
+                        <a:t>3</a:t>
+                      </a:r>
+                      <a:endParaRPr lang="en-US" sz="1300" dirty="0">
+                        <a:latin typeface="Calibri" charset="0"/>
+                        <a:ea typeface="Calibri" charset="0"/>
+                        <a:cs typeface="Calibri" charset="0"/>
+                      </a:endParaRPr>
+                    </a:p>
+                  </a:txBody>
+                  <a:tcPr marL="73152" marR="73152" marT="36576" marB="36576" anchor="ctr">
+                    <a:lnL w="9525" cap="flat" cmpd="sng" algn="ctr">
+                      <a:solidFill>
+                        <a:srgbClr val="D5DBE1"/>
+                      </a:solidFill>
+                      <a:prstDash val="solid"/>
+                      <a:round/>
+                      <a:headEnd type="none" w="med" len="med"/>
+                      <a:tailEnd type="none" w="med" len="med"/>
+                    </a:lnL>
+                    <a:lnR w="9525" cap="flat" cmpd="sng" algn="ctr">
+                      <a:solidFill>
+                        <a:srgbClr val="D5DBE1"/>
+                      </a:solidFill>
+                      <a:prstDash val="solid"/>
+                      <a:round/>
+                      <a:headEnd type="none" w="med" len="med"/>
+                      <a:tailEnd type="none" w="med" len="med"/>
+                    </a:lnR>
+                    <a:lnT w="9525" cap="flat" cmpd="sng" algn="ctr">
+                      <a:solidFill>
+                        <a:srgbClr val="D5DBE1"/>
+                      </a:solidFill>
+                      <a:prstDash val="solid"/>
+                      <a:round/>
+                      <a:headEnd type="none" w="med" len="med"/>
+                      <a:tailEnd type="none" w="med" len="med"/>
+                    </a:lnT>
+                    <a:lnB w="9525" cap="flat" cmpd="sng" algn="ctr">
+                      <a:solidFill>
+                        <a:srgbClr val="D5DBE1"/>
+                      </a:solidFill>
+                      <a:prstDash val="solid"/>
+                      <a:round/>
+                      <a:headEnd type="none" w="med" len="med"/>
+                      <a:tailEnd type="none" w="med" len="med"/>
+                    </a:lnB>
+                    <a:solidFill>
+                      <a:srgbClr val="FFFFFF"/>
+                    </a:solidFill>
+                  </a:tcPr>
+                </a:tc>
+                <a:tc>
+                  <a:txBody>
+                    <a:bodyPr/>
+                    <a:lstStyle/>
+                    <a:p>
+                      <a:pPr algn="ctr" indent="0" marL="0">
+                        <a:buNone/>
+                      </a:pPr>
+                      <a:r>
+                        <a:rPr lang="en-US" sz="1300" dirty="0">
+                          <a:solidFill>
+                            <a:srgbClr val="1B2430"/>
+                          </a:solidFill>
+                          <a:latin typeface="Calibri" pitchFamily="34" charset="0"/>
+                          <a:ea typeface="Calibri" pitchFamily="34" charset="-122"/>
+                          <a:cs typeface="Calibri" pitchFamily="34" charset="-120"/>
+                        </a:rPr>
+                        <a:t>20</a:t>
+                      </a:r>
+                      <a:endParaRPr lang="en-US" sz="1300" dirty="0">
+                        <a:latin typeface="Calibri" charset="0"/>
+                        <a:ea typeface="Calibri" charset="0"/>
+                        <a:cs typeface="Calibri" charset="0"/>
+                      </a:endParaRPr>
+                    </a:p>
+                  </a:txBody>
+                  <a:tcPr marL="73152" marR="73152" marT="36576" marB="36576" anchor="ctr">
+                    <a:lnL w="9525" cap="flat" cmpd="sng" algn="ctr">
+                      <a:solidFill>
+                        <a:srgbClr val="D5DBE1"/>
+                      </a:solidFill>
+                      <a:prstDash val="solid"/>
+                      <a:round/>
+                      <a:headEnd type="none" w="med" len="med"/>
+                      <a:tailEnd type="none" w="med" len="med"/>
+                    </a:lnL>
+                    <a:lnR w="9525" cap="flat" cmpd="sng" algn="ctr">
+                      <a:solidFill>
+                        <a:srgbClr val="D5DBE1"/>
+                      </a:solidFill>
+                      <a:prstDash val="solid"/>
+                      <a:round/>
+                      <a:headEnd type="none" w="med" len="med"/>
+                      <a:tailEnd type="none" w="med" len="med"/>
+                    </a:lnR>
+                    <a:lnT w="9525" cap="flat" cmpd="sng" algn="ctr">
+                      <a:solidFill>
+                        <a:srgbClr val="D5DBE1"/>
+                      </a:solidFill>
+                      <a:prstDash val="solid"/>
+                      <a:round/>
+                      <a:headEnd type="none" w="med" len="med"/>
+                      <a:tailEnd type="none" w="med" len="med"/>
+                    </a:lnT>
+                    <a:lnB w="9525" cap="flat" cmpd="sng" algn="ctr">
+                      <a:solidFill>
+                        <a:srgbClr val="D5DBE1"/>
+                      </a:solidFill>
+                      <a:prstDash val="solid"/>
+                      <a:round/>
+                      <a:headEnd type="none" w="med" len="med"/>
+                      <a:tailEnd type="none" w="med" len="med"/>
+                    </a:lnB>
+                    <a:solidFill>
+                      <a:srgbClr val="FFFFFF"/>
+                    </a:solidFill>
+                  </a:tcPr>
+                </a:tc>
+                <a:tc>
+                  <a:txBody>
+                    <a:bodyPr/>
+                    <a:lstStyle/>
+                    <a:p>
+                      <a:pPr algn="ctr" indent="0" marL="0">
+                        <a:buNone/>
+                      </a:pPr>
+                      <a:r>
+                        <a:rPr lang="en-US" sz="1300" dirty="0">
+                          <a:solidFill>
+                            <a:srgbClr val="1B2430"/>
+                          </a:solidFill>
+                          <a:latin typeface="Calibri" pitchFamily="34" charset="0"/>
+                          <a:ea typeface="Calibri" pitchFamily="34" charset="-122"/>
+                          <a:cs typeface="Calibri" pitchFamily="34" charset="-120"/>
+                        </a:rPr>
+                        <a:t>8.1% (5–12)</a:t>
+                      </a:r>
+                      <a:endParaRPr lang="en-US" sz="1300" dirty="0">
+                        <a:latin typeface="Calibri" charset="0"/>
+                        <a:ea typeface="Calibri" charset="0"/>
+                        <a:cs typeface="Calibri" charset="0"/>
+                      </a:endParaRPr>
+                    </a:p>
+                  </a:txBody>
+                  <a:tcPr marL="73152" marR="73152" marT="36576" marB="36576" anchor="ctr">
+                    <a:lnL w="9525" cap="flat" cmpd="sng" algn="ctr">
+                      <a:solidFill>
+                        <a:srgbClr val="D5DBE1"/>
+                      </a:solidFill>
+                      <a:prstDash val="solid"/>
+                      <a:round/>
+                      <a:headEnd type="none" w="med" len="med"/>
+                      <a:tailEnd type="none" w="med" len="med"/>
+                    </a:lnL>
+                    <a:lnR w="9525" cap="flat" cmpd="sng" algn="ctr">
+                      <a:solidFill>
+                        <a:srgbClr val="D5DBE1"/>
+                      </a:solidFill>
+                      <a:prstDash val="solid"/>
+                      <a:round/>
+                      <a:headEnd type="none" w="med" len="med"/>
+                      <a:tailEnd type="none" w="med" len="med"/>
+                    </a:lnR>
+                    <a:lnT w="9525" cap="flat" cmpd="sng" algn="ctr">
+                      <a:solidFill>
+                        <a:srgbClr val="D5DBE1"/>
+                      </a:solidFill>
+                      <a:prstDash val="solid"/>
+                      <a:round/>
+                      <a:headEnd type="none" w="med" len="med"/>
+                      <a:tailEnd type="none" w="med" len="med"/>
+                    </a:lnT>
+                    <a:lnB w="9525" cap="flat" cmpd="sng" algn="ctr">
+                      <a:solidFill>
+                        <a:srgbClr val="D5DBE1"/>
+                      </a:solidFill>
+                      <a:prstDash val="solid"/>
+                      <a:round/>
+                      <a:headEnd type="none" w="med" len="med"/>
+                      <a:tailEnd type="none" w="med" len="med"/>
+                    </a:lnB>
+                    <a:solidFill>
+                      <a:srgbClr val="FFFFFF"/>
+                    </a:solidFill>
+                  </a:tcPr>
+                </a:tc>
+                <a:tc>
+                  <a:txBody>
+                    <a:bodyPr/>
+                    <a:lstStyle/>
+                    <a:p>
+                      <a:pPr algn="ctr" indent="0" marL="0">
+                        <a:buNone/>
+                      </a:pPr>
+                      <a:r>
+                        <a:rPr lang="en-US" sz="1300" dirty="0">
+                          <a:solidFill>
+                            <a:srgbClr val="1B2430"/>
+                          </a:solidFill>
+                          <a:latin typeface="Calibri" pitchFamily="34" charset="0"/>
+                          <a:ea typeface="Calibri" pitchFamily="34" charset="-122"/>
+                          <a:cs typeface="Calibri" pitchFamily="34" charset="-120"/>
+                        </a:rPr>
+                        <a:t>+1.28 (1.04–1.59)</a:t>
+                      </a:r>
+                      <a:endParaRPr lang="en-US" sz="1300" dirty="0">
+                        <a:latin typeface="Calibri" charset="0"/>
+                        <a:ea typeface="Calibri" charset="0"/>
+                        <a:cs typeface="Calibri" charset="0"/>
+                      </a:endParaRPr>
+                    </a:p>
+                  </a:txBody>
+                  <a:tcPr marL="73152" marR="73152" marT="36576" marB="36576" anchor="ctr">
+                    <a:lnL w="9525" cap="flat" cmpd="sng" algn="ctr">
+                      <a:solidFill>
+                        <a:srgbClr val="D5DBE1"/>
+                      </a:solidFill>
+                      <a:prstDash val="solid"/>
+                      <a:round/>
+                      <a:headEnd type="none" w="med" len="med"/>
+                      <a:tailEnd type="none" w="med" len="med"/>
+                    </a:lnL>
+                    <a:lnR w="9525" cap="flat" cmpd="sng" algn="ctr">
+                      <a:solidFill>
+                        <a:srgbClr val="D5DBE1"/>
+                      </a:solidFill>
+                      <a:prstDash val="solid"/>
+                      <a:round/>
+                      <a:headEnd type="none" w="med" len="med"/>
+                      <a:tailEnd type="none" w="med" len="med"/>
+                    </a:lnR>
+                    <a:lnT w="9525" cap="flat" cmpd="sng" algn="ctr">
+                      <a:solidFill>
+                        <a:srgbClr val="D5DBE1"/>
+                      </a:solidFill>
+                      <a:prstDash val="solid"/>
+                      <a:round/>
+                      <a:headEnd type="none" w="med" len="med"/>
+                      <a:tailEnd type="none" w="med" len="med"/>
+                    </a:lnT>
+                    <a:lnB w="9525" cap="flat" cmpd="sng" algn="ctr">
+                      <a:solidFill>
+                        <a:srgbClr val="D5DBE1"/>
+                      </a:solidFill>
+                      <a:prstDash val="solid"/>
+                      <a:round/>
+                      <a:headEnd type="none" w="med" len="med"/>
+                      <a:tailEnd type="none" w="med" len="med"/>
+                    </a:lnB>
+                    <a:solidFill>
+                      <a:srgbClr val="FFFFFF"/>
+                    </a:solidFill>
+                  </a:tcPr>
+                </a:tc>
+                <a:tc>
+                  <a:txBody>
+                    <a:bodyPr/>
+                    <a:lstStyle/>
+                    <a:p>
+                      <a:pPr algn="ctr" indent="0" marL="0">
+                        <a:buNone/>
+                      </a:pPr>
+                      <a:r>
+                        <a:rPr lang="en-US" sz="1300" dirty="0">
+                          <a:solidFill>
+                            <a:srgbClr val="1B2430"/>
+                          </a:solidFill>
+                          <a:latin typeface="Calibri" pitchFamily="34" charset="0"/>
+                          <a:ea typeface="Calibri" pitchFamily="34" charset="-122"/>
+                          <a:cs typeface="Calibri" pitchFamily="34" charset="-120"/>
+                        </a:rPr>
+                        <a:t>−44 ± 47°</a:t>
+                      </a:r>
+                      <a:endParaRPr lang="en-US" sz="1300" dirty="0">
+                        <a:latin typeface="Calibri" charset="0"/>
+                        <a:ea typeface="Calibri" charset="0"/>
+                        <a:cs typeface="Calibri" charset="0"/>
+                      </a:endParaRPr>
+                    </a:p>
+                  </a:txBody>
+                  <a:tcPr marL="73152" marR="73152" marT="36576" marB="36576" anchor="ctr">
+                    <a:lnL w="9525" cap="flat" cmpd="sng" algn="ctr">
+                      <a:solidFill>
+                        <a:srgbClr val="D5DBE1"/>
+                      </a:solidFill>
+                      <a:prstDash val="solid"/>
+                      <a:round/>
+                      <a:headEnd type="none" w="med" len="med"/>
+                      <a:tailEnd type="none" w="med" len="med"/>
+                    </a:lnL>
+                    <a:lnR w="9525" cap="flat" cmpd="sng" algn="ctr">
+                      <a:solidFill>
+                        <a:srgbClr val="D5DBE1"/>
+                      </a:solidFill>
+                      <a:prstDash val="solid"/>
+                      <a:round/>
+                      <a:headEnd type="none" w="med" len="med"/>
+                      <a:tailEnd type="none" w="med" len="med"/>
+                    </a:lnR>
+                    <a:lnT w="9525" cap="flat" cmpd="sng" algn="ctr">
+                      <a:solidFill>
+                        <a:srgbClr val="D5DBE1"/>
+                      </a:solidFill>
+                      <a:prstDash val="solid"/>
+                      <a:round/>
+                      <a:headEnd type="none" w="med" len="med"/>
+                      <a:tailEnd type="none" w="med" len="med"/>
+                    </a:lnT>
+                    <a:lnB w="9525" cap="flat" cmpd="sng" algn="ctr">
+                      <a:solidFill>
+                        <a:srgbClr val="D5DBE1"/>
+                      </a:solidFill>
+                      <a:prstDash val="solid"/>
+                      <a:round/>
+                      <a:headEnd type="none" w="med" len="med"/>
+                      <a:tailEnd type="none" w="med" len="med"/>
+                    </a:lnB>
+                    <a:solidFill>
+                      <a:srgbClr val="FFFFFF"/>
+                    </a:solidFill>
+                  </a:tcPr>
+                </a:tc>
+              </a:tr>
+            </a:tbl>
+          </a:graphicData>
+        </a:graphic>
+      </p:graphicFrame>
+      <p:sp>
+        <p:nvSpPr>
+          <p:cNvPr id="5" name="nota-plegado"/>
           <p:cNvSpPr/>
           <p:nvPr/>
         </p:nvSpPr>
         <p:spPr>
           <a:xfrm>
-            <a:off x="548640" y="1417320"/>
-            <a:ext cx="5410048" cy="1325880"/>
+            <a:off x="5074920" y="3611880"/>
+            <a:ext cx="6568135" cy="1417320"/>
           </a:xfrm>
           <a:prstGeom prst="roundRect">
             <a:avLst>
-              <a:gd name="adj" fmla="val 5517"/>
+              <a:gd name="adj" fmla="val 5161"/>
             </a:avLst>
           </a:prstGeom>
           <a:solidFill>
@@ -5597,17 +7497,66 @@
       </p:sp>
       <p:sp>
         <p:nvSpPr>
-          <p:cNvPr id="4" name="limite-0-circulo"/>
+          <p:cNvPr id="6" name="Text 2"/>
+          <p:cNvSpPr txBox="1"/>
+          <p:nvPr/>
+        </p:nvSpPr>
+        <p:spPr>
+          <a:xfrm>
+            <a:off x="5349240" y="3703320"/>
+            <a:ext cx="6019495" cy="1234440"/>
+          </a:xfrm>
+          <a:prstGeom prst="rect">
+            <a:avLst/>
+          </a:prstGeom>
+          <a:noFill/>
+          <a:ln/>
+        </p:spPr>
+        <p:txBody>
+          <a:bodyPr wrap="square" lIns="0" tIns="0" rIns="0" bIns="0" rtlCol="0" anchor="ctr"/>
+          <a:lstStyle/>
+          <a:p>
+            <a:pPr indent="0" marL="0">
+              <a:buNone/>
+            </a:pPr>
+            <a:r>
+              <a:rPr lang="en-US" sz="1400" b="1" dirty="0">
+                <a:solidFill>
+                  <a:schemeClr val="tx2"/>
+                </a:solidFill>
+              </a:rPr>
+              <a:t>Ambos lóbulos plegados en 246/246 muestras </a:t>
+            </a:r>
+            <a:pPr indent="0" marL="0">
+              <a:buNone/>
+            </a:pPr>
+            <a:r>
+              <a:rPr lang="en-US" sz="1400" dirty="0">
+                <a:solidFill>
+                  <a:schemeClr val="tx1"/>
+                </a:solidFill>
+              </a:rPr>
+              <a:t>(contactos nativos ≥ 0.65, criterio de BioEmu): ΔG de desplegamiento &gt; 3.3 kcal/mol, el máximo medible con 246 muestras.</a:t>
+            </a:r>
+            <a:endParaRPr lang="en-US" sz="1400" dirty="0"/>
+          </a:p>
+        </p:txBody>
+      </p:sp>
+      <p:sp>
+        <p:nvSpPr>
+          <p:cNvPr id="7" name="formula"/>
           <p:cNvSpPr/>
           <p:nvPr/>
         </p:nvSpPr>
         <p:spPr>
           <a:xfrm>
-            <a:off x="822960" y="1737360"/>
-            <a:ext cx="685800" cy="685800"/>
-          </a:xfrm>
-          <a:prstGeom prst="ellipse">
-            <a:avLst/>
+            <a:off x="548640" y="5257800"/>
+            <a:ext cx="11094415" cy="868680"/>
+          </a:xfrm>
+          <a:prstGeom prst="roundRect">
+            <a:avLst>
+              <a:gd name="adj" fmla="val 8421"/>
+            </a:avLst>
           </a:prstGeom>
           <a:solidFill>
             <a:schemeClr val="tx2"/>
@@ -5620,40 +7569,16 @@
           </a:ln>
         </p:spPr>
       </p:sp>
-      <p:pic>
-        <p:nvPicPr>
-          <p:cNvPr id="5" name="limite-0-icono" descr="preencoded.png">    </p:cNvPr>
-          <p:cNvPicPr>
-            <a:picLocks noChangeAspect="1"/>
-          </p:cNvPicPr>
-          <p:nvPr/>
-        </p:nvPicPr>
-        <p:blipFill>
-          <a:blip r:embed="rId1"/>
-          <a:stretch>
-            <a:fillRect/>
-          </a:stretch>
-        </p:blipFill>
-        <p:spPr>
-          <a:xfrm>
-            <a:off x="994410" y="1908810"/>
-            <a:ext cx="342900" cy="342900"/>
-          </a:xfrm>
-          <a:prstGeom prst="rect">
-            <a:avLst/>
-          </a:prstGeom>
-        </p:spPr>
-      </p:pic>
-      <p:sp>
-        <p:nvSpPr>
-          <p:cNvPr id="6" name="Text 3"/>
+      <p:sp>
+        <p:nvSpPr>
+          <p:cNvPr id="8" name="Text 4"/>
           <p:cNvSpPr txBox="1"/>
           <p:nvPr/>
         </p:nvSpPr>
         <p:spPr>
           <a:xfrm>
-            <a:off x="1737360" y="1600200"/>
-            <a:ext cx="3992728" cy="365760"/>
+            <a:off x="868680" y="5303520"/>
+            <a:ext cx="10454335" cy="777240"/>
           </a:xfrm>
           <a:prstGeom prst="rect">
             <a:avLst/>
@@ -5669,788 +7594,26 @@
               <a:buNone/>
             </a:pPr>
             <a:r>
-              <a:rPr lang="en-US" sz="1700" b="1" dirty="0">
-                <a:solidFill>
-                  <a:schemeClr val="tx2"/>
-                </a:solidFill>
-              </a:rPr>
-              <a:t>Sin información temporal</a:t>
-            </a:r>
-            <a:endParaRPr lang="en-US" sz="1700" dirty="0"/>
-          </a:p>
-        </p:txBody>
-      </p:sp>
-      <p:sp>
-        <p:nvSpPr>
-          <p:cNvPr id="7" name="Text 4"/>
-          <p:cNvSpPr txBox="1"/>
-          <p:nvPr/>
-        </p:nvSpPr>
-        <p:spPr>
-          <a:xfrm>
-            <a:off x="1737360" y="1984248"/>
-            <a:ext cx="3992728" cy="640080"/>
-          </a:xfrm>
-          <a:prstGeom prst="rect">
-            <a:avLst/>
-          </a:prstGeom>
-          <a:noFill/>
-          <a:ln/>
-        </p:spPr>
-        <p:txBody>
-          <a:bodyPr wrap="square" lIns="0" tIns="0" rIns="0" bIns="0" rtlCol="0" anchor="t"/>
-          <a:lstStyle/>
-          <a:p>
+              <a:rPr lang="en-US" sz="1400" b="1" dirty="0">
+                <a:solidFill>
+                  <a:schemeClr val="accent5"/>
+                </a:solidFill>
+                <a:latin typeface="Cambria" pitchFamily="34" charset="0"/>
+                <a:ea typeface="Cambria" pitchFamily="34" charset="-122"/>
+                <a:cs typeface="Cambria" pitchFamily="34" charset="-120"/>
+              </a:rPr>
+              <a:t>ΔG = −kT·ln(pᵢ / p₁)</a:t>
+            </a:r>
             <a:pPr indent="0" marL="0">
               <a:buNone/>
             </a:pPr>
             <a:r>
               <a:rPr lang="en-US" sz="1400" dirty="0">
                 <a:solidFill>
-                  <a:schemeClr val="tx1"/>
-                </a:solidFill>
-              </a:rPr>
-              <a:t>Las muestras son del equilibrio; no dan cinéticas ni rutas de transición.</a:t>
-            </a:r>
-            <a:endParaRPr lang="en-US" sz="1400" dirty="0"/>
-          </a:p>
-        </p:txBody>
-      </p:sp>
-      <p:sp>
-        <p:nvSpPr>
-          <p:cNvPr id="8" name="limite-1"/>
-          <p:cNvSpPr/>
-          <p:nvPr/>
-        </p:nvSpPr>
-        <p:spPr>
-          <a:xfrm>
-            <a:off x="6233008" y="1417320"/>
-            <a:ext cx="5410048" cy="1325880"/>
-          </a:xfrm>
-          <a:prstGeom prst="roundRect">
-            <a:avLst>
-              <a:gd name="adj" fmla="val 5517"/>
-            </a:avLst>
-          </a:prstGeom>
-          <a:solidFill>
-            <a:schemeClr val="bg2"/>
-          </a:solidFill>
-          <a:ln w="12700">
-            <a:solidFill>
-              <a:schemeClr val="bg2"/>
-            </a:solidFill>
-            <a:prstDash val="solid"/>
-          </a:ln>
-        </p:spPr>
-      </p:sp>
-      <p:sp>
-        <p:nvSpPr>
-          <p:cNvPr id="9" name="limite-1-circulo"/>
-          <p:cNvSpPr/>
-          <p:nvPr/>
-        </p:nvSpPr>
-        <p:spPr>
-          <a:xfrm>
-            <a:off x="6507328" y="1737360"/>
-            <a:ext cx="685800" cy="685800"/>
-          </a:xfrm>
-          <a:prstGeom prst="ellipse">
-            <a:avLst/>
-          </a:prstGeom>
-          <a:solidFill>
-            <a:schemeClr val="tx2"/>
-          </a:solidFill>
-          <a:ln w="12700">
-            <a:solidFill>
-              <a:schemeClr val="tx2"/>
-            </a:solidFill>
-            <a:prstDash val="solid"/>
-          </a:ln>
-        </p:spPr>
-      </p:sp>
-      <p:pic>
-        <p:nvPicPr>
-          <p:cNvPr id="10" name="limite-1-icono" descr="preencoded.png">    </p:cNvPr>
-          <p:cNvPicPr>
-            <a:picLocks noChangeAspect="1"/>
-          </p:cNvPicPr>
-          <p:nvPr/>
-        </p:nvPicPr>
-        <p:blipFill>
-          <a:blip r:embed="rId2"/>
-          <a:stretch>
-            <a:fillRect/>
-          </a:stretch>
-        </p:blipFill>
-        <p:spPr>
-          <a:xfrm>
-            <a:off x="6678778" y="1908810"/>
-            <a:ext cx="342900" cy="342900"/>
-          </a:xfrm>
-          <a:prstGeom prst="rect">
-            <a:avLst/>
-          </a:prstGeom>
-        </p:spPr>
-      </p:pic>
-      <p:sp>
-        <p:nvSpPr>
-          <p:cNvPr id="11" name="Text 7"/>
-          <p:cNvSpPr txBox="1"/>
-          <p:nvPr/>
-        </p:nvSpPr>
-        <p:spPr>
-          <a:xfrm>
-            <a:off x="7421728" y="1600200"/>
-            <a:ext cx="3992728" cy="365760"/>
-          </a:xfrm>
-          <a:prstGeom prst="rect">
-            <a:avLst/>
-          </a:prstGeom>
-          <a:noFill/>
-          <a:ln/>
-        </p:spPr>
-        <p:txBody>
-          <a:bodyPr wrap="square" lIns="0" tIns="0" rIns="0" bIns="0" rtlCol="0" anchor="ctr"/>
-          <a:lstStyle/>
-          <a:p>
-            <a:pPr indent="0" marL="0">
-              <a:buNone/>
-            </a:pPr>
-            <a:r>
-              <a:rPr lang="en-US" sz="1700" b="1" dirty="0">
-                <a:solidFill>
-                  <a:schemeClr val="tx2"/>
-                </a:solidFill>
-              </a:rPr>
-              <a:t>Solo backbone</a:t>
-            </a:r>
-            <a:endParaRPr lang="en-US" sz="1700" dirty="0"/>
-          </a:p>
-        </p:txBody>
-      </p:sp>
-      <p:sp>
-        <p:nvSpPr>
-          <p:cNvPr id="12" name="Text 8"/>
-          <p:cNvSpPr txBox="1"/>
-          <p:nvPr/>
-        </p:nvSpPr>
-        <p:spPr>
-          <a:xfrm>
-            <a:off x="7421728" y="1984248"/>
-            <a:ext cx="3992728" cy="640080"/>
-          </a:xfrm>
-          <a:prstGeom prst="rect">
-            <a:avLst/>
-          </a:prstGeom>
-          <a:noFill/>
-          <a:ln/>
-        </p:spPr>
-        <p:txBody>
-          <a:bodyPr wrap="square" lIns="0" tIns="0" rIns="0" bIns="0" rtlCol="0" anchor="t"/>
-          <a:lstStyle/>
-          <a:p>
-            <a:pPr indent="0" marL="0">
-              <a:buNone/>
-            </a:pPr>
-            <a:r>
-              <a:rPr lang="en-US" sz="1400" dirty="0">
-                <a:solidFill>
-                  <a:schemeClr val="tx1"/>
-                </a:solidFill>
-              </a:rPr>
-              <a:t>Las cadenas laterales se reconstruyen después con HPacker y OpenMM.</a:t>
-            </a:r>
-            <a:endParaRPr lang="en-US" sz="1400" dirty="0"/>
-          </a:p>
-        </p:txBody>
-      </p:sp>
-      <p:sp>
-        <p:nvSpPr>
-          <p:cNvPr id="13" name="limite-2"/>
-          <p:cNvSpPr/>
-          <p:nvPr/>
-        </p:nvSpPr>
-        <p:spPr>
-          <a:xfrm>
-            <a:off x="548640" y="2971800"/>
-            <a:ext cx="5410048" cy="1325880"/>
-          </a:xfrm>
-          <a:prstGeom prst="roundRect">
-            <a:avLst>
-              <a:gd name="adj" fmla="val 5517"/>
-            </a:avLst>
-          </a:prstGeom>
-          <a:solidFill>
-            <a:schemeClr val="bg2"/>
-          </a:solidFill>
-          <a:ln w="12700">
-            <a:solidFill>
-              <a:schemeClr val="bg2"/>
-            </a:solidFill>
-            <a:prstDash val="solid"/>
-          </a:ln>
-        </p:spPr>
-      </p:sp>
-      <p:sp>
-        <p:nvSpPr>
-          <p:cNvPr id="14" name="limite-2-circulo"/>
-          <p:cNvSpPr/>
-          <p:nvPr/>
-        </p:nvSpPr>
-        <p:spPr>
-          <a:xfrm>
-            <a:off x="822960" y="3291840"/>
-            <a:ext cx="685800" cy="685800"/>
-          </a:xfrm>
-          <a:prstGeom prst="ellipse">
-            <a:avLst/>
-          </a:prstGeom>
-          <a:solidFill>
-            <a:schemeClr val="tx2"/>
-          </a:solidFill>
-          <a:ln w="12700">
-            <a:solidFill>
-              <a:schemeClr val="tx2"/>
-            </a:solidFill>
-            <a:prstDash val="solid"/>
-          </a:ln>
-        </p:spPr>
-      </p:sp>
-      <p:pic>
-        <p:nvPicPr>
-          <p:cNvPr id="15" name="limite-2-icono" descr="preencoded.png">    </p:cNvPr>
-          <p:cNvPicPr>
-            <a:picLocks noChangeAspect="1"/>
-          </p:cNvPicPr>
-          <p:nvPr/>
-        </p:nvPicPr>
-        <p:blipFill>
-          <a:blip r:embed="rId3"/>
-          <a:stretch>
-            <a:fillRect/>
-          </a:stretch>
-        </p:blipFill>
-        <p:spPr>
-          <a:xfrm>
-            <a:off x="994410" y="3463290"/>
-            <a:ext cx="342900" cy="342900"/>
-          </a:xfrm>
-          <a:prstGeom prst="rect">
-            <a:avLst/>
-          </a:prstGeom>
-        </p:spPr>
-      </p:pic>
-      <p:sp>
-        <p:nvSpPr>
-          <p:cNvPr id="16" name="Text 11"/>
-          <p:cNvSpPr txBox="1"/>
-          <p:nvPr/>
-        </p:nvSpPr>
-        <p:spPr>
-          <a:xfrm>
-            <a:off x="1737360" y="3154680"/>
-            <a:ext cx="3992728" cy="365760"/>
-          </a:xfrm>
-          <a:prstGeom prst="rect">
-            <a:avLst/>
-          </a:prstGeom>
-          <a:noFill/>
-          <a:ln/>
-        </p:spPr>
-        <p:txBody>
-          <a:bodyPr wrap="square" lIns="0" tIns="0" rIns="0" bIns="0" rtlCol="0" anchor="ctr"/>
-          <a:lstStyle/>
-          <a:p>
-            <a:pPr indent="0" marL="0">
-              <a:buNone/>
-            </a:pPr>
-            <a:r>
-              <a:rPr lang="en-US" sz="1700" b="1" dirty="0">
-                <a:solidFill>
-                  <a:schemeClr val="tx2"/>
-                </a:solidFill>
-              </a:rPr>
-              <a:t>Una sola cadena</a:t>
-            </a:r>
-            <a:endParaRPr lang="en-US" sz="1700" dirty="0"/>
-          </a:p>
-        </p:txBody>
-      </p:sp>
-      <p:sp>
-        <p:nvSpPr>
-          <p:cNvPr id="17" name="Text 12"/>
-          <p:cNvSpPr txBox="1"/>
-          <p:nvPr/>
-        </p:nvSpPr>
-        <p:spPr>
-          <a:xfrm>
-            <a:off x="1737360" y="3538728"/>
-            <a:ext cx="3992728" cy="640080"/>
-          </a:xfrm>
-          <a:prstGeom prst="rect">
-            <a:avLst/>
-          </a:prstGeom>
-          <a:noFill/>
-          <a:ln/>
-        </p:spPr>
-        <p:txBody>
-          <a:bodyPr wrap="square" lIns="0" tIns="0" rIns="0" bIns="0" rtlCol="0" anchor="t"/>
-          <a:lstStyle/>
-          <a:p>
-            <a:pPr indent="0" marL="0">
-              <a:buNone/>
-            </a:pPr>
-            <a:r>
-              <a:rPr lang="en-US" sz="1400" dirty="0">
-                <a:solidFill>
-                  <a:schemeClr val="tx1"/>
-                </a:solidFill>
-              </a:rPr>
-              <a:t>No modela complejos, ligandos ni cofactores.</a:t>
-            </a:r>
-            <a:endParaRPr lang="en-US" sz="1400" dirty="0"/>
-          </a:p>
-        </p:txBody>
-      </p:sp>
-      <p:sp>
-        <p:nvSpPr>
-          <p:cNvPr id="18" name="limite-3"/>
-          <p:cNvSpPr/>
-          <p:nvPr/>
-        </p:nvSpPr>
-        <p:spPr>
-          <a:xfrm>
-            <a:off x="6233008" y="2971800"/>
-            <a:ext cx="5410048" cy="1325880"/>
-          </a:xfrm>
-          <a:prstGeom prst="roundRect">
-            <a:avLst>
-              <a:gd name="adj" fmla="val 5517"/>
-            </a:avLst>
-          </a:prstGeom>
-          <a:solidFill>
-            <a:schemeClr val="bg2"/>
-          </a:solidFill>
-          <a:ln w="12700">
-            <a:solidFill>
-              <a:schemeClr val="bg2"/>
-            </a:solidFill>
-            <a:prstDash val="solid"/>
-          </a:ln>
-        </p:spPr>
-      </p:sp>
-      <p:sp>
-        <p:nvSpPr>
-          <p:cNvPr id="19" name="limite-3-circulo"/>
-          <p:cNvSpPr/>
-          <p:nvPr/>
-        </p:nvSpPr>
-        <p:spPr>
-          <a:xfrm>
-            <a:off x="6507328" y="3291840"/>
-            <a:ext cx="685800" cy="685800"/>
-          </a:xfrm>
-          <a:prstGeom prst="ellipse">
-            <a:avLst/>
-          </a:prstGeom>
-          <a:solidFill>
-            <a:schemeClr val="tx2"/>
-          </a:solidFill>
-          <a:ln w="12700">
-            <a:solidFill>
-              <a:schemeClr val="tx2"/>
-            </a:solidFill>
-            <a:prstDash val="solid"/>
-          </a:ln>
-        </p:spPr>
-      </p:sp>
-      <p:pic>
-        <p:nvPicPr>
-          <p:cNvPr id="20" name="limite-3-icono" descr="preencoded.png">    </p:cNvPr>
-          <p:cNvPicPr>
-            <a:picLocks noChangeAspect="1"/>
-          </p:cNvPicPr>
-          <p:nvPr/>
-        </p:nvPicPr>
-        <p:blipFill>
-          <a:blip r:embed="rId4"/>
-          <a:stretch>
-            <a:fillRect/>
-          </a:stretch>
-        </p:blipFill>
-        <p:spPr>
-          <a:xfrm>
-            <a:off x="6678778" y="3463290"/>
-            <a:ext cx="342900" cy="342900"/>
-          </a:xfrm>
-          <a:prstGeom prst="rect">
-            <a:avLst/>
-          </a:prstGeom>
-        </p:spPr>
-      </p:pic>
-      <p:sp>
-        <p:nvSpPr>
-          <p:cNvPr id="21" name="Text 15"/>
-          <p:cNvSpPr txBox="1"/>
-          <p:nvPr/>
-        </p:nvSpPr>
-        <p:spPr>
-          <a:xfrm>
-            <a:off x="7421728" y="3154680"/>
-            <a:ext cx="3992728" cy="365760"/>
-          </a:xfrm>
-          <a:prstGeom prst="rect">
-            <a:avLst/>
-          </a:prstGeom>
-          <a:noFill/>
-          <a:ln/>
-        </p:spPr>
-        <p:txBody>
-          <a:bodyPr wrap="square" lIns="0" tIns="0" rIns="0" bIns="0" rtlCol="0" anchor="ctr"/>
-          <a:lstStyle/>
-          <a:p>
-            <a:pPr indent="0" marL="0">
-              <a:buNone/>
-            </a:pPr>
-            <a:r>
-              <a:rPr lang="en-US" sz="1700" b="1" dirty="0">
-                <a:solidFill>
-                  <a:schemeClr val="tx2"/>
-                </a:solidFill>
-              </a:rPr>
-              <a:t>Filtro de calidad</a:t>
-            </a:r>
-            <a:endParaRPr lang="en-US" sz="1700" dirty="0"/>
-          </a:p>
-        </p:txBody>
-      </p:sp>
-      <p:sp>
-        <p:nvSpPr>
-          <p:cNvPr id="22" name="Text 16"/>
-          <p:cNvSpPr txBox="1"/>
-          <p:nvPr/>
-        </p:nvSpPr>
-        <p:spPr>
-          <a:xfrm>
-            <a:off x="7421728" y="3538728"/>
-            <a:ext cx="3992728" cy="640080"/>
-          </a:xfrm>
-          <a:prstGeom prst="rect">
-            <a:avLst/>
-          </a:prstGeom>
-          <a:noFill/>
-          <a:ln/>
-        </p:spPr>
-        <p:txBody>
-          <a:bodyPr wrap="square" lIns="0" tIns="0" rIns="0" bIns="0" rtlCol="0" anchor="t"/>
-          <a:lstStyle/>
-          <a:p>
-            <a:pPr indent="0" marL="0">
-              <a:buNone/>
-            </a:pPr>
-            <a:r>
-              <a:rPr lang="en-US" sz="1400" dirty="0">
-                <a:solidFill>
-                  <a:schemeClr val="tx1"/>
-                </a:solidFill>
-              </a:rPr>
-              <a:t>Se descartaron 54 de 300 muestras (18%) por choques o cadena rota.</a:t>
-            </a:r>
-            <a:endParaRPr lang="en-US" sz="1400" dirty="0"/>
-          </a:p>
-        </p:txBody>
-      </p:sp>
-      <p:sp>
-        <p:nvSpPr>
-          <p:cNvPr id="23" name="limite-4"/>
-          <p:cNvSpPr/>
-          <p:nvPr/>
-        </p:nvSpPr>
-        <p:spPr>
-          <a:xfrm>
-            <a:off x="548640" y="4526280"/>
-            <a:ext cx="5410048" cy="1325880"/>
-          </a:xfrm>
-          <a:prstGeom prst="roundRect">
-            <a:avLst>
-              <a:gd name="adj" fmla="val 5517"/>
-            </a:avLst>
-          </a:prstGeom>
-          <a:solidFill>
-            <a:schemeClr val="bg2"/>
-          </a:solidFill>
-          <a:ln w="12700">
-            <a:solidFill>
-              <a:schemeClr val="bg2"/>
-            </a:solidFill>
-            <a:prstDash val="solid"/>
-          </a:ln>
-        </p:spPr>
-      </p:sp>
-      <p:sp>
-        <p:nvSpPr>
-          <p:cNvPr id="24" name="limite-4-circulo"/>
-          <p:cNvSpPr/>
-          <p:nvPr/>
-        </p:nvSpPr>
-        <p:spPr>
-          <a:xfrm>
-            <a:off x="822960" y="4846320"/>
-            <a:ext cx="685800" cy="685800"/>
-          </a:xfrm>
-          <a:prstGeom prst="ellipse">
-            <a:avLst/>
-          </a:prstGeom>
-          <a:solidFill>
-            <a:schemeClr val="tx2"/>
-          </a:solidFill>
-          <a:ln w="12700">
-            <a:solidFill>
-              <a:schemeClr val="tx2"/>
-            </a:solidFill>
-            <a:prstDash val="solid"/>
-          </a:ln>
-        </p:spPr>
-      </p:sp>
-      <p:pic>
-        <p:nvPicPr>
-          <p:cNvPr id="25" name="limite-4-icono" descr="preencoded.png">    </p:cNvPr>
-          <p:cNvPicPr>
-            <a:picLocks noChangeAspect="1"/>
-          </p:cNvPicPr>
-          <p:nvPr/>
-        </p:nvPicPr>
-        <p:blipFill>
-          <a:blip r:embed="rId5"/>
-          <a:stretch>
-            <a:fillRect/>
-          </a:stretch>
-        </p:blipFill>
-        <p:spPr>
-          <a:xfrm>
-            <a:off x="994410" y="5017770"/>
-            <a:ext cx="342900" cy="342900"/>
-          </a:xfrm>
-          <a:prstGeom prst="rect">
-            <a:avLst/>
-          </a:prstGeom>
-        </p:spPr>
-      </p:pic>
-      <p:sp>
-        <p:nvSpPr>
-          <p:cNvPr id="26" name="Text 19"/>
-          <p:cNvSpPr txBox="1"/>
-          <p:nvPr/>
-        </p:nvSpPr>
-        <p:spPr>
-          <a:xfrm>
-            <a:off x="1737360" y="4709160"/>
-            <a:ext cx="3992728" cy="365760"/>
-          </a:xfrm>
-          <a:prstGeom prst="rect">
-            <a:avLst/>
-          </a:prstGeom>
-          <a:noFill/>
-          <a:ln/>
-        </p:spPr>
-        <p:txBody>
-          <a:bodyPr wrap="square" lIns="0" tIns="0" rIns="0" bIns="0" rtlCol="0" anchor="ctr"/>
-          <a:lstStyle/>
-          <a:p>
-            <a:pPr indent="0" marL="0">
-              <a:buNone/>
-            </a:pPr>
-            <a:r>
-              <a:rPr lang="en-US" sz="1700" b="1" dirty="0">
-                <a:solidFill>
-                  <a:schemeClr val="tx2"/>
-                </a:solidFill>
-              </a:rPr>
-              <a:t>Depende del MSA</a:t>
-            </a:r>
-            <a:endParaRPr lang="en-US" sz="1700" dirty="0"/>
-          </a:p>
-        </p:txBody>
-      </p:sp>
-      <p:sp>
-        <p:nvSpPr>
-          <p:cNvPr id="27" name="Text 20"/>
-          <p:cNvSpPr txBox="1"/>
-          <p:nvPr/>
-        </p:nvSpPr>
-        <p:spPr>
-          <a:xfrm>
-            <a:off x="1737360" y="5093208"/>
-            <a:ext cx="3992728" cy="640080"/>
-          </a:xfrm>
-          <a:prstGeom prst="rect">
-            <a:avLst/>
-          </a:prstGeom>
-          <a:noFill/>
-          <a:ln/>
-        </p:spPr>
-        <p:txBody>
-          <a:bodyPr wrap="square" lIns="0" tIns="0" rIns="0" bIns="0" rtlCol="0" anchor="t"/>
-          <a:lstStyle/>
-          <a:p>
-            <a:pPr indent="0" marL="0">
-              <a:buNone/>
-            </a:pPr>
-            <a:r>
-              <a:rPr lang="en-US" sz="1400" dirty="0">
-                <a:solidFill>
-                  <a:schemeClr val="tx1"/>
-                </a:solidFill>
-              </a:rPr>
-              <a:t>La calidad de los embeddings depende del alineamiento de ColabFold.</a:t>
-            </a:r>
-            <a:endParaRPr lang="en-US" sz="1400" dirty="0"/>
-          </a:p>
-        </p:txBody>
-      </p:sp>
-      <p:sp>
-        <p:nvSpPr>
-          <p:cNvPr id="28" name="limite-5"/>
-          <p:cNvSpPr/>
-          <p:nvPr/>
-        </p:nvSpPr>
-        <p:spPr>
-          <a:xfrm>
-            <a:off x="6233008" y="4526280"/>
-            <a:ext cx="5410048" cy="1325880"/>
-          </a:xfrm>
-          <a:prstGeom prst="roundRect">
-            <a:avLst>
-              <a:gd name="adj" fmla="val 5517"/>
-            </a:avLst>
-          </a:prstGeom>
-          <a:solidFill>
-            <a:schemeClr val="bg2"/>
-          </a:solidFill>
-          <a:ln w="12700">
-            <a:solidFill>
-              <a:schemeClr val="bg2"/>
-            </a:solidFill>
-            <a:prstDash val="solid"/>
-          </a:ln>
-        </p:spPr>
-      </p:sp>
-      <p:sp>
-        <p:nvSpPr>
-          <p:cNvPr id="29" name="limite-5-circulo"/>
-          <p:cNvSpPr/>
-          <p:nvPr/>
-        </p:nvSpPr>
-        <p:spPr>
-          <a:xfrm>
-            <a:off x="6507328" y="4846320"/>
-            <a:ext cx="685800" cy="685800"/>
-          </a:xfrm>
-          <a:prstGeom prst="ellipse">
-            <a:avLst/>
-          </a:prstGeom>
-          <a:solidFill>
-            <a:schemeClr val="tx2"/>
-          </a:solidFill>
-          <a:ln w="12700">
-            <a:solidFill>
-              <a:schemeClr val="tx2"/>
-            </a:solidFill>
-            <a:prstDash val="solid"/>
-          </a:ln>
-        </p:spPr>
-      </p:sp>
-      <p:pic>
-        <p:nvPicPr>
-          <p:cNvPr id="30" name="limite-5-icono" descr="preencoded.png">    </p:cNvPr>
-          <p:cNvPicPr>
-            <a:picLocks noChangeAspect="1"/>
-          </p:cNvPicPr>
-          <p:nvPr/>
-        </p:nvPicPr>
-        <p:blipFill>
-          <a:blip r:embed="rId6"/>
-          <a:stretch>
-            <a:fillRect/>
-          </a:stretch>
-        </p:blipFill>
-        <p:spPr>
-          <a:xfrm>
-            <a:off x="6678778" y="5017770"/>
-            <a:ext cx="342900" cy="342900"/>
-          </a:xfrm>
-          <a:prstGeom prst="rect">
-            <a:avLst/>
-          </a:prstGeom>
-        </p:spPr>
-      </p:pic>
-      <p:sp>
-        <p:nvSpPr>
-          <p:cNvPr id="31" name="Text 23"/>
-          <p:cNvSpPr txBox="1"/>
-          <p:nvPr/>
-        </p:nvSpPr>
-        <p:spPr>
-          <a:xfrm>
-            <a:off x="7421728" y="4709160"/>
-            <a:ext cx="3992728" cy="365760"/>
-          </a:xfrm>
-          <a:prstGeom prst="rect">
-            <a:avLst/>
-          </a:prstGeom>
-          <a:noFill/>
-          <a:ln/>
-        </p:spPr>
-        <p:txBody>
-          <a:bodyPr wrap="square" lIns="0" tIns="0" rIns="0" bIns="0" rtlCol="0" anchor="ctr"/>
-          <a:lstStyle/>
-          <a:p>
-            <a:pPr indent="0" marL="0">
-              <a:buNone/>
-            </a:pPr>
-            <a:r>
-              <a:rPr lang="en-US" sz="1700" b="1" dirty="0">
-                <a:solidFill>
-                  <a:schemeClr val="tx2"/>
-                </a:solidFill>
-              </a:rPr>
-              <a:t>Costo práctico</a:t>
-            </a:r>
-            <a:endParaRPr lang="en-US" sz="1700" dirty="0"/>
-          </a:p>
-        </p:txBody>
-      </p:sp>
-      <p:sp>
-        <p:nvSpPr>
-          <p:cNvPr id="32" name="Text 24"/>
-          <p:cNvSpPr txBox="1"/>
-          <p:nvPr/>
-        </p:nvSpPr>
-        <p:spPr>
-          <a:xfrm>
-            <a:off x="7421728" y="5093208"/>
-            <a:ext cx="3992728" cy="640080"/>
-          </a:xfrm>
-          <a:prstGeom prst="rect">
-            <a:avLst/>
-          </a:prstGeom>
-          <a:noFill/>
-          <a:ln/>
-        </p:spPr>
-        <p:txBody>
-          <a:bodyPr wrap="square" lIns="0" tIns="0" rIns="0" bIns="0" rtlCol="0" anchor="t"/>
-          <a:lstStyle/>
-          <a:p>
-            <a:pPr indent="0" marL="0">
-              <a:buNone/>
-            </a:pPr>
-            <a:r>
-              <a:rPr lang="en-US" sz="1400" dirty="0">
-                <a:solidFill>
-                  <a:schemeClr val="tx1"/>
-                </a:solidFill>
-              </a:rPr>
-              <a:t>Embeddings en CPU (~20 min) y relajación en un hilo (~3.5 h).</a:t>
+                  <a:schemeClr val="bg1"/>
+                </a:solidFill>
+              </a:rPr>
+              <a:t>   300 K · conformaciones por PCA + k-means de la posición de CheY · IC por bootstrap. BioEmu solo da estructuras: las poblaciones salen de contar muestras.</a:t>
             </a:r>
             <a:endParaRPr lang="en-US" sz="1400" dirty="0"/>
           </a:p>
@@ -6539,8 +7702,8 @@
         </p:nvSpPr>
         <p:spPr>
           <a:xfrm>
-            <a:off x="548640" y="457200"/>
-            <a:ext cx="11094415" cy="822960"/>
+            <a:off x="548640" y="365760"/>
+            <a:ext cx="11094415" cy="731520"/>
           </a:xfrm>
           <a:prstGeom prst="rect">
             <a:avLst/>
@@ -6556,44 +7719,102 @@
               <a:buNone/>
             </a:pPr>
             <a:r>
-              <a:rPr lang="en-US" sz="3600" b="1" dirty="0">
-                <a:solidFill>
-                  <a:schemeClr val="bg1"/>
+              <a:rPr lang="en-US" sz="3200" b="1" dirty="0">
+                <a:solidFill>
+                  <a:schemeClr val="tx2"/>
                 </a:solidFill>
                 <a:latin typeface="Cambria" pitchFamily="34" charset="0"/>
                 <a:ea typeface="Cambria" pitchFamily="34" charset="-122"/>
                 <a:cs typeface="Cambria" pitchFamily="34" charset="-120"/>
               </a:rPr>
-              <a:t>Conclusiones y siguientes pasos</a:t>
-            </a:r>
-            <a:endParaRPr lang="en-US" sz="3600" dirty="0"/>
-          </a:p>
-        </p:txBody>
-      </p:sp>
-      <p:sp>
-        <p:nvSpPr>
-          <p:cNvPr id="3" name="conclusion-0"/>
+              <a:t>Superficie de energía libre: el mínimo coincide con AF3</a:t>
+            </a:r>
+            <a:endParaRPr lang="en-US" sz="3200" dirty="0"/>
+          </a:p>
+        </p:txBody>
+      </p:sp>
+      <p:pic>
+        <p:nvPicPr>
+          <p:cNvPr id="3" name="superficie-fe" descr="superficie_energia_libre.png">    </p:cNvPr>
+          <p:cNvPicPr>
+            <a:picLocks noChangeAspect="1"/>
+          </p:cNvPicPr>
+          <p:nvPr/>
+        </p:nvPicPr>
+        <p:blipFill>
+          <a:blip r:embed="rId1"/>
+          <a:stretch>
+            <a:fillRect/>
+          </a:stretch>
+        </p:blipFill>
+        <p:spPr>
+          <a:xfrm>
+            <a:off x="548640" y="1417320"/>
+            <a:ext cx="7680960" cy="3925745"/>
+          </a:xfrm>
+          <a:prstGeom prst="rect">
+            <a:avLst/>
+          </a:prstGeom>
+        </p:spPr>
+      </p:pic>
+      <p:sp>
+        <p:nvSpPr>
+          <p:cNvPr id="4" name="Text 1"/>
+          <p:cNvSpPr txBox="1"/>
+          <p:nvPr/>
+        </p:nvSpPr>
+        <p:spPr>
+          <a:xfrm>
+            <a:off x="548640" y="5480225"/>
+            <a:ext cx="7680960" cy="548640"/>
+          </a:xfrm>
+          <a:prstGeom prst="rect">
+            <a:avLst/>
+          </a:prstGeom>
+          <a:noFill/>
+          <a:ln/>
+        </p:spPr>
+        <p:txBody>
+          <a:bodyPr wrap="square" lIns="0" tIns="0" rIns="0" bIns="0" rtlCol="0" anchor="ctr"/>
+          <a:lstStyle/>
+          <a:p>
+            <a:pPr indent="0" marL="0">
+              <a:buNone/>
+            </a:pPr>
+            <a:r>
+              <a:rPr lang="en-US" sz="1100" i="1" dirty="0">
+                <a:solidFill>
+                  <a:schemeClr val="accent2"/>
+                </a:solidFill>
+              </a:rPr>
+              <a:t>F = −kT·ln p (kernel gaussiano), curvas cada 0.5 kcal/mol. Estilo de la Fig. 3 del artículo de BioEmu; aquí con PCA y variables físicas en lugar de TICA (no hay MD).</a:t>
+            </a:r>
+            <a:endParaRPr lang="en-US" sz="1100" dirty="0"/>
+          </a:p>
+        </p:txBody>
+      </p:sp>
+      <p:sp>
+        <p:nvSpPr>
+          <p:cNvPr id="5" name="fe-0"/>
           <p:cNvSpPr/>
           <p:nvPr/>
         </p:nvSpPr>
         <p:spPr>
           <a:xfrm>
-            <a:off x="548640" y="1600200"/>
-            <a:ext cx="3520440" cy="2651760"/>
+            <a:off x="8503920" y="1417320"/>
+            <a:ext cx="3139135" cy="1234440"/>
           </a:xfrm>
           <a:prstGeom prst="roundRect">
             <a:avLst>
-              <a:gd name="adj" fmla="val 2759"/>
+              <a:gd name="adj" fmla="val 5926"/>
             </a:avLst>
           </a:prstGeom>
           <a:solidFill>
-            <a:srgbClr val="FFFFFF">
-              <a:alpha val="8000"/>
-            </a:srgbClr>
+            <a:schemeClr val="bg2"/>
           </a:solidFill>
           <a:ln w="12700">
             <a:solidFill>
-              <a:schemeClr val="accent2"/>
+              <a:schemeClr val="bg2"/>
             </a:solidFill>
             <a:prstDash val="solid"/>
           </a:ln>
@@ -6601,14 +7822,14 @@
       </p:sp>
       <p:sp>
         <p:nvSpPr>
-          <p:cNvPr id="4" name="Text 2"/>
+          <p:cNvPr id="6" name="Text 3"/>
           <p:cNvSpPr txBox="1"/>
           <p:nvPr/>
         </p:nvSpPr>
         <p:spPr>
           <a:xfrm>
-            <a:off x="868680" y="1828800"/>
-            <a:ext cx="914400" cy="548640"/>
+            <a:off x="8732520" y="1554480"/>
+            <a:ext cx="2681935" cy="365760"/>
           </a:xfrm>
           <a:prstGeom prst="rect">
             <a:avLst/>
@@ -6624,30 +7845,27 @@
               <a:buNone/>
             </a:pPr>
             <a:r>
-              <a:rPr lang="en-US" sz="3200" b="1" dirty="0">
+              <a:rPr lang="en-US" sz="1600" b="1" dirty="0">
                 <a:solidFill>
                   <a:schemeClr val="accent1"/>
                 </a:solidFill>
-                <a:latin typeface="Cambria" pitchFamily="34" charset="0"/>
-                <a:ea typeface="Cambria" pitchFamily="34" charset="-122"/>
-                <a:cs typeface="Cambria" pitchFamily="34" charset="-120"/>
-              </a:rPr>
-              <a:t>1</a:t>
-            </a:r>
-            <a:endParaRPr lang="en-US" sz="3200" dirty="0"/>
-          </a:p>
-        </p:txBody>
-      </p:sp>
-      <p:sp>
-        <p:nvSpPr>
-          <p:cNvPr id="5" name="Text 3"/>
+              </a:rPr>
+              <a:t>Mínimo en AF3</a:t>
+            </a:r>
+            <a:endParaRPr lang="en-US" sz="1600" dirty="0"/>
+          </a:p>
+        </p:txBody>
+      </p:sp>
+      <p:sp>
+        <p:nvSpPr>
+          <p:cNvPr id="7" name="Text 4"/>
           <p:cNvSpPr txBox="1"/>
           <p:nvPr/>
         </p:nvSpPr>
         <p:spPr>
           <a:xfrm>
-            <a:off x="868680" y="2423160"/>
-            <a:ext cx="2880360" cy="411480"/>
+            <a:off x="8732520" y="1920240"/>
+            <a:ext cx="2681935" cy="640080"/>
           </a:xfrm>
           <a:prstGeom prst="rect">
             <a:avLst/>
@@ -6656,84 +7874,46 @@
           <a:ln/>
         </p:spPr>
         <p:txBody>
-          <a:bodyPr wrap="square" lIns="0" tIns="0" rIns="0" bIns="0" rtlCol="0" anchor="ctr"/>
+          <a:bodyPr wrap="square" lIns="0" tIns="0" rIns="0" bIns="0" rtlCol="0" anchor="t"/>
           <a:lstStyle/>
           <a:p>
             <a:pPr indent="0" marL="0">
               <a:buNone/>
             </a:pPr>
             <a:r>
-              <a:rPr lang="en-US" sz="1900" b="1" dirty="0">
-                <a:solidFill>
-                  <a:schemeClr val="bg1"/>
-                </a:solidFill>
-              </a:rPr>
-              <a:t>Lóbulos estables</a:t>
-            </a:r>
-            <a:endParaRPr lang="en-US" sz="1900" dirty="0"/>
-          </a:p>
-        </p:txBody>
-      </p:sp>
-      <p:sp>
-        <p:nvSpPr>
-          <p:cNvPr id="6" name="Text 4"/>
-          <p:cNvSpPr txBox="1"/>
-          <p:nvPr/>
-        </p:nvSpPr>
-        <p:spPr>
-          <a:xfrm>
-            <a:off x="868680" y="2880360"/>
-            <a:ext cx="2880360" cy="1280160"/>
-          </a:xfrm>
-          <a:prstGeom prst="rect">
-            <a:avLst/>
-          </a:prstGeom>
-          <a:noFill/>
-          <a:ln/>
-        </p:spPr>
-        <p:txBody>
-          <a:bodyPr wrap="square" lIns="0" tIns="0" rIns="0" bIns="0" rtlCol="0" anchor="t"/>
-          <a:lstStyle/>
-          <a:p>
-            <a:pPr indent="0" marL="0">
-              <a:buNone/>
-            </a:pPr>
-            <a:r>
-              <a:rPr lang="en-US" sz="1400" dirty="0">
-                <a:solidFill>
-                  <a:schemeClr val="bg2"/>
-                </a:solidFill>
-              </a:rPr>
-              <a:t>CheY (0.8 Å) y LBP (mediana 1.8 Å) conservan el plegamiento del modelo de AlphaFold3.</a:t>
-            </a:r>
-            <a:endParaRPr lang="en-US" sz="1400" dirty="0"/>
-          </a:p>
-        </p:txBody>
-      </p:sp>
-      <p:sp>
-        <p:nvSpPr>
-          <p:cNvPr id="7" name="conclusion-1"/>
+              <a:rPr lang="en-US" sz="1300" dirty="0">
+                <a:solidFill>
+                  <a:schemeClr val="tx1"/>
+                </a:solidFill>
+              </a:rPr>
+              <a:t>La estrella (modelo 0) cae en el pozo más profundo de ambas superficies.</a:t>
+            </a:r>
+            <a:endParaRPr lang="en-US" sz="1300" dirty="0"/>
+          </a:p>
+        </p:txBody>
+      </p:sp>
+      <p:sp>
+        <p:nvSpPr>
+          <p:cNvPr id="8" name="fe-1"/>
           <p:cNvSpPr/>
           <p:nvPr/>
         </p:nvSpPr>
         <p:spPr>
           <a:xfrm>
-            <a:off x="4343400" y="1600200"/>
-            <a:ext cx="3520440" cy="2651760"/>
+            <a:off x="8503920" y="2834640"/>
+            <a:ext cx="3139135" cy="1234440"/>
           </a:xfrm>
           <a:prstGeom prst="roundRect">
             <a:avLst>
-              <a:gd name="adj" fmla="val 2759"/>
+              <a:gd name="adj" fmla="val 5926"/>
             </a:avLst>
           </a:prstGeom>
           <a:solidFill>
-            <a:srgbClr val="FFFFFF">
-              <a:alpha val="8000"/>
-            </a:srgbClr>
+            <a:schemeClr val="bg2"/>
           </a:solidFill>
           <a:ln w="12700">
             <a:solidFill>
-              <a:schemeClr val="accent2"/>
+              <a:schemeClr val="bg2"/>
             </a:solidFill>
             <a:prstDash val="solid"/>
           </a:ln>
@@ -6741,14 +7921,14 @@
       </p:sp>
       <p:sp>
         <p:nvSpPr>
-          <p:cNvPr id="8" name="Text 6"/>
+          <p:cNvPr id="9" name="Text 6"/>
           <p:cNvSpPr txBox="1"/>
           <p:nvPr/>
         </p:nvSpPr>
         <p:spPr>
           <a:xfrm>
-            <a:off x="4663440" y="1828800"/>
-            <a:ext cx="914400" cy="548640"/>
+            <a:off x="8732520" y="2971800"/>
+            <a:ext cx="2681935" cy="365760"/>
           </a:xfrm>
           <a:prstGeom prst="rect">
             <a:avLst/>
@@ -6764,30 +7944,27 @@
               <a:buNone/>
             </a:pPr>
             <a:r>
-              <a:rPr lang="en-US" sz="3200" b="1" dirty="0">
-                <a:solidFill>
-                  <a:schemeClr val="accent1"/>
-                </a:solidFill>
-                <a:latin typeface="Cambria" pitchFamily="34" charset="0"/>
-                <a:ea typeface="Cambria" pitchFamily="34" charset="-122"/>
-                <a:cs typeface="Cambria" pitchFamily="34" charset="-120"/>
-              </a:rPr>
-              <a:t>2</a:t>
-            </a:r>
-            <a:endParaRPr lang="en-US" sz="3200" dirty="0"/>
-          </a:p>
-        </p:txBody>
-      </p:sp>
-      <p:sp>
-        <p:nvSpPr>
-          <p:cNvPr id="9" name="Text 7"/>
+              <a:rPr lang="en-US" sz="1600" b="1" dirty="0">
+                <a:solidFill>
+                  <a:schemeClr val="tx2"/>
+                </a:solidFill>
+              </a:rPr>
+              <a:t>Sin apertura discreta</a:t>
+            </a:r>
+            <a:endParaRPr lang="en-US" sz="1600" dirty="0"/>
+          </a:p>
+        </p:txBody>
+      </p:sp>
+      <p:sp>
+        <p:nvSpPr>
+          <p:cNvPr id="10" name="Text 7"/>
           <p:cNvSpPr txBox="1"/>
           <p:nvPr/>
         </p:nvSpPr>
         <p:spPr>
           <a:xfrm>
-            <a:off x="4663440" y="2423160"/>
-            <a:ext cx="2880360" cy="411480"/>
+            <a:off x="8732520" y="3337560"/>
+            <a:ext cx="2681935" cy="640080"/>
           </a:xfrm>
           <a:prstGeom prst="rect">
             <a:avLst/>
@@ -6796,84 +7973,46 @@
           <a:ln/>
         </p:spPr>
         <p:txBody>
-          <a:bodyPr wrap="square" lIns="0" tIns="0" rIns="0" bIns="0" rtlCol="0" anchor="ctr"/>
+          <a:bodyPr wrap="square" lIns="0" tIns="0" rIns="0" bIns="0" rtlCol="0" anchor="t"/>
           <a:lstStyle/>
           <a:p>
             <a:pPr indent="0" marL="0">
               <a:buNone/>
             </a:pPr>
             <a:r>
-              <a:rPr lang="en-US" sz="1900" b="1" dirty="0">
-                <a:solidFill>
-                  <a:schemeClr val="bg1"/>
-                </a:solidFill>
-              </a:rPr>
-              <a:t>Bisagra flexible</a:t>
-            </a:r>
-            <a:endParaRPr lang="en-US" sz="1900" dirty="0"/>
-          </a:p>
-        </p:txBody>
-      </p:sp>
-      <p:sp>
-        <p:nvSpPr>
-          <p:cNvPr id="10" name="Text 8"/>
-          <p:cNvSpPr txBox="1"/>
-          <p:nvPr/>
-        </p:nvSpPr>
-        <p:spPr>
-          <a:xfrm>
-            <a:off x="4663440" y="2880360"/>
-            <a:ext cx="2880360" cy="1280160"/>
-          </a:xfrm>
-          <a:prstGeom prst="rect">
-            <a:avLst/>
-          </a:prstGeom>
-          <a:noFill/>
-          <a:ln/>
-        </p:spPr>
-        <p:txBody>
-          <a:bodyPr wrap="square" lIns="0" tIns="0" rIns="0" bIns="0" rtlCol="0" anchor="t"/>
-          <a:lstStyle/>
-          <a:p>
-            <a:pPr indent="0" marL="0">
-              <a:buNone/>
-            </a:pPr>
-            <a:r>
-              <a:rPr lang="en-US" sz="1400" dirty="0">
-                <a:solidFill>
-                  <a:schemeClr val="bg2"/>
-                </a:solidFill>
-              </a:rPr>
-              <a:t>La distancia entre lóbulos varía de 23 a 36 Å: apoya la idea de una orientación relativa variable, aún por contrastar con el cristal.</a:t>
-            </a:r>
-            <a:endParaRPr lang="en-US" sz="1400" dirty="0"/>
-          </a:p>
-        </p:txBody>
-      </p:sp>
-      <p:sp>
-        <p:nvSpPr>
-          <p:cNvPr id="11" name="conclusion-2"/>
+              <a:rPr lang="en-US" sz="1300" dirty="0">
+                <a:solidFill>
+                  <a:schemeClr val="tx1"/>
+                </a:solidFill>
+              </a:rPr>
+              <a:t>La distancia entre lóbulos forma un solo pozo amplio (~27–28 Å).</a:t>
+            </a:r>
+            <a:endParaRPr lang="en-US" sz="1300" dirty="0"/>
+          </a:p>
+        </p:txBody>
+      </p:sp>
+      <p:sp>
+        <p:nvSpPr>
+          <p:cNvPr id="11" name="fe-2"/>
           <p:cNvSpPr/>
           <p:nvPr/>
         </p:nvSpPr>
         <p:spPr>
           <a:xfrm>
-            <a:off x="8138160" y="1600200"/>
-            <a:ext cx="3520440" cy="2651760"/>
+            <a:off x="8503920" y="4251960"/>
+            <a:ext cx="3139135" cy="1234440"/>
           </a:xfrm>
           <a:prstGeom prst="roundRect">
             <a:avLst>
-              <a:gd name="adj" fmla="val 2759"/>
+              <a:gd name="adj" fmla="val 5926"/>
             </a:avLst>
           </a:prstGeom>
           <a:solidFill>
-            <a:srgbClr val="FFFFFF">
-              <a:alpha val="8000"/>
-            </a:srgbClr>
+            <a:schemeClr val="bg2"/>
           </a:solidFill>
           <a:ln w="12700">
             <a:solidFill>
-              <a:schemeClr val="accent2"/>
+              <a:schemeClr val="bg2"/>
             </a:solidFill>
             <a:prstDash val="solid"/>
           </a:ln>
@@ -6881,14 +8020,14 @@
       </p:sp>
       <p:sp>
         <p:nvSpPr>
-          <p:cNvPr id="12" name="Text 10"/>
+          <p:cNvPr id="12" name="Text 9"/>
           <p:cNvSpPr txBox="1"/>
           <p:nvPr/>
         </p:nvSpPr>
         <p:spPr>
           <a:xfrm>
-            <a:off x="8458200" y="1828800"/>
-            <a:ext cx="914400" cy="548640"/>
+            <a:off x="8732520" y="4389120"/>
+            <a:ext cx="2681935" cy="365760"/>
           </a:xfrm>
           <a:prstGeom prst="rect">
             <a:avLst/>
@@ -6904,30 +8043,27 @@
               <a:buNone/>
             </a:pPr>
             <a:r>
-              <a:rPr lang="en-US" sz="3200" b="1" dirty="0">
-                <a:solidFill>
-                  <a:schemeClr val="accent1"/>
-                </a:solidFill>
-                <a:latin typeface="Cambria" pitchFamily="34" charset="0"/>
-                <a:ea typeface="Cambria" pitchFamily="34" charset="-122"/>
-                <a:cs typeface="Cambria" pitchFamily="34" charset="-120"/>
-              </a:rPr>
-              <a:t>3</a:t>
-            </a:r>
-            <a:endParaRPr lang="en-US" sz="3200" dirty="0"/>
-          </a:p>
-        </p:txBody>
-      </p:sp>
-      <p:sp>
-        <p:nvSpPr>
-          <p:cNvPr id="13" name="Text 11"/>
+              <a:rPr lang="en-US" sz="1600" b="1" dirty="0">
+                <a:solidFill>
+                  <a:schemeClr val="tx2"/>
+                </a:solidFill>
+              </a:rPr>
+              <a:t>Giros opuestos</a:t>
+            </a:r>
+            <a:endParaRPr lang="en-US" sz="1600" dirty="0"/>
+          </a:p>
+        </p:txBody>
+      </p:sp>
+      <p:sp>
+        <p:nvSpPr>
+          <p:cNvPr id="13" name="Text 10"/>
           <p:cNvSpPr txBox="1"/>
           <p:nvPr/>
         </p:nvSpPr>
         <p:spPr>
           <a:xfrm>
-            <a:off x="8458200" y="2423160"/>
-            <a:ext cx="2880360" cy="411480"/>
+            <a:off x="8732520" y="4754880"/>
+            <a:ext cx="2681935" cy="640080"/>
           </a:xfrm>
           <a:prstGeom prst="rect">
             <a:avLst/>
@@ -6936,169 +8072,21 @@
           <a:ln/>
         </p:spPr>
         <p:txBody>
-          <a:bodyPr wrap="square" lIns="0" tIns="0" rIns="0" bIns="0" rtlCol="0" anchor="ctr"/>
+          <a:bodyPr wrap="square" lIns="0" tIns="0" rIns="0" bIns="0" rtlCol="0" anchor="t"/>
           <a:lstStyle/>
           <a:p>
             <a:pPr indent="0" marL="0">
               <a:buNone/>
             </a:pPr>
             <a:r>
-              <a:rPr lang="en-US" sz="1900" b="1" dirty="0">
-                <a:solidFill>
-                  <a:schemeClr val="bg1"/>
-                </a:solidFill>
-              </a:rPr>
-              <a:t>Pipeline reproducible</a:t>
-            </a:r>
-            <a:endParaRPr lang="en-US" sz="1900" dirty="0"/>
-          </a:p>
-        </p:txBody>
-      </p:sp>
-      <p:sp>
-        <p:nvSpPr>
-          <p:cNvPr id="14" name="Text 12"/>
-          <p:cNvSpPr txBox="1"/>
-          <p:nvPr/>
-        </p:nvSpPr>
-        <p:spPr>
-          <a:xfrm>
-            <a:off x="8458200" y="2880360"/>
-            <a:ext cx="2880360" cy="1280160"/>
-          </a:xfrm>
-          <a:prstGeom prst="rect">
-            <a:avLst/>
-          </a:prstGeom>
-          <a:noFill/>
-          <a:ln/>
-        </p:spPr>
-        <p:txBody>
-          <a:bodyPr wrap="square" lIns="0" tIns="0" rIns="0" bIns="0" rtlCol="0" anchor="t"/>
-          <a:lstStyle/>
-          <a:p>
-            <a:pPr indent="0" marL="0">
-              <a:buNone/>
-            </a:pPr>
-            <a:r>
-              <a:rPr lang="en-US" sz="1400" dirty="0">
-                <a:solidFill>
-                  <a:schemeClr val="bg2"/>
-                </a:solidFill>
-              </a:rPr>
-              <a:t>Scripts, tutorial y resultados en un repositorio. Cerca de 4 h en una GPU.</a:t>
-            </a:r>
-            <a:endParaRPr lang="en-US" sz="1400" dirty="0"/>
-          </a:p>
-        </p:txBody>
-      </p:sp>
-      <p:sp>
-        <p:nvSpPr>
-          <p:cNvPr id="15" name="Text 13"/>
-          <p:cNvSpPr txBox="1"/>
-          <p:nvPr/>
-        </p:nvSpPr>
-        <p:spPr>
-          <a:xfrm>
-            <a:off x="548640" y="4572000"/>
-            <a:ext cx="3657600" cy="365760"/>
-          </a:xfrm>
-          <a:prstGeom prst="rect">
-            <a:avLst/>
-          </a:prstGeom>
-          <a:noFill/>
-          <a:ln/>
-        </p:spPr>
-        <p:txBody>
-          <a:bodyPr wrap="square" lIns="0" tIns="0" rIns="0" bIns="0" rtlCol="0" anchor="ctr"/>
-          <a:lstStyle/>
-          <a:p>
-            <a:pPr indent="0" marL="0">
-              <a:buNone/>
-            </a:pPr>
-            <a:r>
-              <a:rPr lang="en-US" sz="1800" b="1" dirty="0">
-                <a:solidFill>
-                  <a:schemeClr val="accent5"/>
-                </a:solidFill>
-              </a:rPr>
-              <a:t>Siguientes pasos</a:t>
-            </a:r>
-            <a:endParaRPr lang="en-US" sz="1800" dirty="0"/>
-          </a:p>
-        </p:txBody>
-      </p:sp>
-      <p:sp>
-        <p:nvSpPr>
-          <p:cNvPr id="16" name="Text 14"/>
-          <p:cNvSpPr txBox="1"/>
-          <p:nvPr/>
-        </p:nvSpPr>
-        <p:spPr>
-          <a:xfrm>
-            <a:off x="548640" y="4983480"/>
-            <a:ext cx="11094415" cy="1280160"/>
-          </a:xfrm>
-          <a:prstGeom prst="rect">
-            <a:avLst/>
-          </a:prstGeom>
-          <a:noFill/>
-          <a:ln/>
-        </p:spPr>
-        <p:txBody>
-          <a:bodyPr wrap="square" lIns="0" tIns="0" rIns="0" bIns="0" rtlCol="0" anchor="t"/>
-          <a:lstStyle/>
-          <a:p>
-            <a:pPr marL="342900" indent="-342900">
-              <a:spcAft>
-                <a:spcPts val="400"/>
-              </a:spcAft>
-              <a:buSzPct val="100000"/>
-              <a:buChar char="•"/>
-            </a:pPr>
-            <a:r>
-              <a:rPr lang="en-US" sz="1500" dirty="0">
-                <a:solidFill>
-                  <a:schemeClr val="bg1"/>
-                </a:solidFill>
-              </a:rPr>
-              <a:t>Comparar el ensamble con la estructura cristalográfica (8Q52)</a:t>
-            </a:r>
-            <a:endParaRPr lang="en-US" sz="1500" dirty="0"/>
-          </a:p>
-          <a:p>
-            <a:pPr marL="342900" indent="-342900">
-              <a:spcAft>
-                <a:spcPts val="400"/>
-              </a:spcAft>
-              <a:buSzPct val="100000"/>
-              <a:buChar char="•"/>
-            </a:pPr>
-            <a:r>
-              <a:rPr lang="en-US" sz="1500" dirty="0">
-                <a:solidFill>
-                  <a:schemeClr val="bg1"/>
-                </a:solidFill>
-              </a:rPr>
-              <a:t>Correr la variante LBPCheY-dbb y más muestras (1000) para mejorar la estadística</a:t>
-            </a:r>
-            <a:endParaRPr lang="en-US" sz="1500" dirty="0"/>
-          </a:p>
-          <a:p>
-            <a:pPr marL="342900" indent="-342900">
-              <a:spcAft>
-                <a:spcPts val="400"/>
-              </a:spcAft>
-              <a:buSzPct val="100000"/>
-              <a:buChar char="•"/>
-            </a:pPr>
-            <a:r>
-              <a:rPr lang="en-US" sz="1500" dirty="0">
-                <a:solidFill>
-                  <a:schemeClr val="bg1"/>
-                </a:solidFill>
-              </a:rPr>
-              <a:t>Inspeccionar las muestras de LBP con RMSD &gt; 5 Å (posible desplegamiento local)</a:t>
-            </a:r>
-            <a:endParaRPr lang="en-US" sz="1500" dirty="0"/>
+              <a:rPr lang="en-US" sz="1300" dirty="0">
+                <a:solidFill>
+                  <a:schemeClr val="tx1"/>
+                </a:solidFill>
+              </a:rPr>
+              <a:t>Conf. 2 gira +32° y conf. 3 −44°, a ~1–1.5 kcal/mol.</a:t>
+            </a:r>
+            <a:endParaRPr lang="en-US" sz="1300" dirty="0"/>
           </a:p>
         </p:txBody>
       </p:sp>
@@ -7132,7 +8120,7 @@
             <a:lvl1pPr>
               <a:defRPr sz="1000">
                 <a:solidFill>
-                  <a:schemeClr val="accent4"/>
+                  <a:schemeClr val="accent2"/>
                 </a:solidFill>
                 <a:latin typeface="Calibri"/>
                 <a:ea typeface="Calibri"/>
@@ -7210,7 +8198,7 @@
                 <a:ea typeface="Cambria" pitchFamily="34" charset="-122"/>
                 <a:cs typeface="Cambria" pitchFamily="34" charset="-120"/>
               </a:rPr>
-              <a:t>Referencias y recursos</a:t>
+              <a:t>Qué tener en cuenta al interpretar el ensamble</a:t>
             </a:r>
             <a:endParaRPr lang="en-US" sz="3200" dirty="0"/>
           </a:p>
@@ -7218,13 +8206,40 @@
       </p:sp>
       <p:sp>
         <p:nvSpPr>
-          <p:cNvPr id="3" name="ref-0-circulo"/>
+          <p:cNvPr id="3" name="limite-0"/>
           <p:cNvSpPr/>
           <p:nvPr/>
         </p:nvSpPr>
         <p:spPr>
           <a:xfrm>
-            <a:off x="548640" y="1508760"/>
+            <a:off x="548640" y="1417320"/>
+            <a:ext cx="5410048" cy="1325880"/>
+          </a:xfrm>
+          <a:prstGeom prst="roundRect">
+            <a:avLst>
+              <a:gd name="adj" fmla="val 5517"/>
+            </a:avLst>
+          </a:prstGeom>
+          <a:solidFill>
+            <a:schemeClr val="bg2"/>
+          </a:solidFill>
+          <a:ln w="12700">
+            <a:solidFill>
+              <a:schemeClr val="bg2"/>
+            </a:solidFill>
+            <a:prstDash val="solid"/>
+          </a:ln>
+        </p:spPr>
+      </p:sp>
+      <p:sp>
+        <p:nvSpPr>
+          <p:cNvPr id="4" name="limite-0-circulo"/>
+          <p:cNvSpPr/>
+          <p:nvPr/>
+        </p:nvSpPr>
+        <p:spPr>
+          <a:xfrm>
+            <a:off x="822960" y="1737360"/>
             <a:ext cx="685800" cy="685800"/>
           </a:xfrm>
           <a:prstGeom prst="ellipse">
@@ -7243,7 +8258,7 @@
       </p:sp>
       <p:pic>
         <p:nvPicPr>
-          <p:cNvPr id="4" name="ref-0-icono" descr="preencoded.png">    </p:cNvPr>
+          <p:cNvPr id="5" name="limite-0-icono" descr="preencoded.png">    </p:cNvPr>
           <p:cNvPicPr>
             <a:picLocks noChangeAspect="1"/>
           </p:cNvPicPr>
@@ -7257,7 +8272,7 @@
         </p:blipFill>
         <p:spPr>
           <a:xfrm>
-            <a:off x="720090" y="1680210"/>
+            <a:off x="994410" y="1908810"/>
             <a:ext cx="342900" cy="342900"/>
           </a:xfrm>
           <a:prstGeom prst="rect">
@@ -7265,42 +8280,6 @@
           </a:prstGeom>
         </p:spPr>
       </p:pic>
-      <p:sp>
-        <p:nvSpPr>
-          <p:cNvPr id="5" name="Text 2"/>
-          <p:cNvSpPr txBox="1"/>
-          <p:nvPr/>
-        </p:nvSpPr>
-        <p:spPr>
-          <a:xfrm>
-            <a:off x="1508760" y="1417320"/>
-            <a:ext cx="10134295" cy="365760"/>
-          </a:xfrm>
-          <a:prstGeom prst="rect">
-            <a:avLst/>
-          </a:prstGeom>
-          <a:noFill/>
-          <a:ln/>
-        </p:spPr>
-        <p:txBody>
-          <a:bodyPr wrap="square" lIns="0" tIns="0" rIns="0" bIns="0" rtlCol="0" anchor="ctr"/>
-          <a:lstStyle/>
-          <a:p>
-            <a:pPr indent="0" marL="0">
-              <a:buNone/>
-            </a:pPr>
-            <a:r>
-              <a:rPr lang="en-US" sz="1700" b="1" dirty="0">
-                <a:solidFill>
-                  <a:schemeClr val="tx2"/>
-                </a:solidFill>
-              </a:rPr>
-              <a:t>Artículo</a:t>
-            </a:r>
-            <a:endParaRPr lang="en-US" sz="1700" dirty="0"/>
-          </a:p>
-        </p:txBody>
-      </p:sp>
       <p:sp>
         <p:nvSpPr>
           <p:cNvPr id="6" name="Text 3"/>
@@ -7309,8 +8288,8 @@
         </p:nvSpPr>
         <p:spPr>
           <a:xfrm>
-            <a:off x="1508760" y="1801368"/>
-            <a:ext cx="10134295" cy="594360"/>
+            <a:off x="1737360" y="1600200"/>
+            <a:ext cx="3992728" cy="365760"/>
           </a:xfrm>
           <a:prstGeom prst="rect">
             <a:avLst/>
@@ -7319,6 +8298,42 @@
           <a:ln/>
         </p:spPr>
         <p:txBody>
+          <a:bodyPr wrap="square" lIns="0" tIns="0" rIns="0" bIns="0" rtlCol="0" anchor="ctr"/>
+          <a:lstStyle/>
+          <a:p>
+            <a:pPr indent="0" marL="0">
+              <a:buNone/>
+            </a:pPr>
+            <a:r>
+              <a:rPr lang="en-US" sz="1700" b="1" dirty="0">
+                <a:solidFill>
+                  <a:schemeClr val="tx2"/>
+                </a:solidFill>
+              </a:rPr>
+              <a:t>Sin información temporal</a:t>
+            </a:r>
+            <a:endParaRPr lang="en-US" sz="1700" dirty="0"/>
+          </a:p>
+        </p:txBody>
+      </p:sp>
+      <p:sp>
+        <p:nvSpPr>
+          <p:cNvPr id="7" name="Text 4"/>
+          <p:cNvSpPr txBox="1"/>
+          <p:nvPr/>
+        </p:nvSpPr>
+        <p:spPr>
+          <a:xfrm>
+            <a:off x="1737360" y="1984248"/>
+            <a:ext cx="3992728" cy="640080"/>
+          </a:xfrm>
+          <a:prstGeom prst="rect">
+            <a:avLst/>
+          </a:prstGeom>
+          <a:noFill/>
+          <a:ln/>
+        </p:spPr>
+        <p:txBody>
           <a:bodyPr wrap="square" lIns="0" tIns="0" rIns="0" bIns="0" rtlCol="0" anchor="t"/>
           <a:lstStyle/>
           <a:p>
@@ -7331,7 +8346,7 @@
                   <a:schemeClr val="tx1"/>
                 </a:solidFill>
               </a:rPr>
-              <a:t>Lewis S. et al. Scalable emulation of protein equilibrium ensembles with generative deep learning. Science 389 (2025). doi:10.1126/science.adv9817</a:t>
+              <a:t>Las muestras son del equilibrio; no dan cinéticas ni rutas de transición.</a:t>
             </a:r>
             <a:endParaRPr lang="en-US" sz="1400" dirty="0"/>
           </a:p>
@@ -7339,13 +8354,40 @@
       </p:sp>
       <p:sp>
         <p:nvSpPr>
-          <p:cNvPr id="7" name="ref-1-circulo"/>
+          <p:cNvPr id="8" name="limite-1"/>
           <p:cNvSpPr/>
           <p:nvPr/>
         </p:nvSpPr>
         <p:spPr>
           <a:xfrm>
-            <a:off x="548640" y="2651760"/>
+            <a:off x="6233008" y="1417320"/>
+            <a:ext cx="5410048" cy="1325880"/>
+          </a:xfrm>
+          <a:prstGeom prst="roundRect">
+            <a:avLst>
+              <a:gd name="adj" fmla="val 5517"/>
+            </a:avLst>
+          </a:prstGeom>
+          <a:solidFill>
+            <a:schemeClr val="bg2"/>
+          </a:solidFill>
+          <a:ln w="12700">
+            <a:solidFill>
+              <a:schemeClr val="bg2"/>
+            </a:solidFill>
+            <a:prstDash val="solid"/>
+          </a:ln>
+        </p:spPr>
+      </p:sp>
+      <p:sp>
+        <p:nvSpPr>
+          <p:cNvPr id="9" name="limite-1-circulo"/>
+          <p:cNvSpPr/>
+          <p:nvPr/>
+        </p:nvSpPr>
+        <p:spPr>
+          <a:xfrm>
+            <a:off x="6507328" y="1737360"/>
             <a:ext cx="685800" cy="685800"/>
           </a:xfrm>
           <a:prstGeom prst="ellipse">
@@ -7364,7 +8406,7 @@
       </p:sp>
       <p:pic>
         <p:nvPicPr>
-          <p:cNvPr id="8" name="ref-1-icono" descr="preencoded.png">    </p:cNvPr>
+          <p:cNvPr id="10" name="limite-1-icono" descr="preencoded.png">    </p:cNvPr>
           <p:cNvPicPr>
             <a:picLocks noChangeAspect="1"/>
           </p:cNvPicPr>
@@ -7378,7 +8420,7 @@
         </p:blipFill>
         <p:spPr>
           <a:xfrm>
-            <a:off x="720090" y="2823210"/>
+            <a:off x="6678778" y="1908810"/>
             <a:ext cx="342900" cy="342900"/>
           </a:xfrm>
           <a:prstGeom prst="rect">
@@ -7388,14 +8430,14 @@
       </p:pic>
       <p:sp>
         <p:nvSpPr>
-          <p:cNvPr id="9" name="Text 5"/>
+          <p:cNvPr id="11" name="Text 7"/>
           <p:cNvSpPr txBox="1"/>
           <p:nvPr/>
         </p:nvSpPr>
         <p:spPr>
           <a:xfrm>
-            <a:off x="1508760" y="2560320"/>
-            <a:ext cx="10134295" cy="365760"/>
+            <a:off x="7421728" y="1600200"/>
+            <a:ext cx="3992728" cy="365760"/>
           </a:xfrm>
           <a:prstGeom prst="rect">
             <a:avLst/>
@@ -7416,7 +8458,7 @@
                   <a:schemeClr val="tx2"/>
                 </a:solidFill>
               </a:rPr>
-              <a:t>Código</a:t>
+              <a:t>Solo backbone</a:t>
             </a:r>
             <a:endParaRPr lang="en-US" sz="1700" dirty="0"/>
           </a:p>
@@ -7424,14 +8466,14 @@
       </p:sp>
       <p:sp>
         <p:nvSpPr>
-          <p:cNvPr id="10" name="Text 6"/>
+          <p:cNvPr id="12" name="Text 8"/>
           <p:cNvSpPr txBox="1"/>
           <p:nvPr/>
         </p:nvSpPr>
         <p:spPr>
           <a:xfrm>
-            <a:off x="1508760" y="2944368"/>
-            <a:ext cx="10134295" cy="594360"/>
+            <a:off x="7421728" y="1984248"/>
+            <a:ext cx="3992728" cy="640080"/>
           </a:xfrm>
           <a:prstGeom prst="rect">
             <a:avLst/>
@@ -7452,7 +8494,7 @@
                   <a:schemeClr val="tx1"/>
                 </a:solidFill>
               </a:rPr>
-              <a:t>github.com/microsoft/bioemu · pesos en huggingface.co/microsoft/bioemu (licencia MIT)</a:t>
+              <a:t>Las cadenas laterales se reconstruyen después con HPacker y OpenMM.</a:t>
             </a:r>
             <a:endParaRPr lang="en-US" sz="1400" dirty="0"/>
           </a:p>
@@ -7460,13 +8502,40 @@
       </p:sp>
       <p:sp>
         <p:nvSpPr>
-          <p:cNvPr id="11" name="ref-2-circulo"/>
+          <p:cNvPr id="13" name="limite-2"/>
           <p:cNvSpPr/>
           <p:nvPr/>
         </p:nvSpPr>
         <p:spPr>
           <a:xfrm>
-            <a:off x="548640" y="3794760"/>
+            <a:off x="548640" y="2971800"/>
+            <a:ext cx="5410048" cy="1325880"/>
+          </a:xfrm>
+          <a:prstGeom prst="roundRect">
+            <a:avLst>
+              <a:gd name="adj" fmla="val 5517"/>
+            </a:avLst>
+          </a:prstGeom>
+          <a:solidFill>
+            <a:schemeClr val="bg2"/>
+          </a:solidFill>
+          <a:ln w="12700">
+            <a:solidFill>
+              <a:schemeClr val="bg2"/>
+            </a:solidFill>
+            <a:prstDash val="solid"/>
+          </a:ln>
+        </p:spPr>
+      </p:sp>
+      <p:sp>
+        <p:nvSpPr>
+          <p:cNvPr id="14" name="limite-2-circulo"/>
+          <p:cNvSpPr/>
+          <p:nvPr/>
+        </p:nvSpPr>
+        <p:spPr>
+          <a:xfrm>
+            <a:off x="822960" y="3291840"/>
             <a:ext cx="685800" cy="685800"/>
           </a:xfrm>
           <a:prstGeom prst="ellipse">
@@ -7485,6 +8554,1573 @@
       </p:sp>
       <p:pic>
         <p:nvPicPr>
+          <p:cNvPr id="15" name="limite-2-icono" descr="preencoded.png">    </p:cNvPr>
+          <p:cNvPicPr>
+            <a:picLocks noChangeAspect="1"/>
+          </p:cNvPicPr>
+          <p:nvPr/>
+        </p:nvPicPr>
+        <p:blipFill>
+          <a:blip r:embed="rId3"/>
+          <a:stretch>
+            <a:fillRect/>
+          </a:stretch>
+        </p:blipFill>
+        <p:spPr>
+          <a:xfrm>
+            <a:off x="994410" y="3463290"/>
+            <a:ext cx="342900" cy="342900"/>
+          </a:xfrm>
+          <a:prstGeom prst="rect">
+            <a:avLst/>
+          </a:prstGeom>
+        </p:spPr>
+      </p:pic>
+      <p:sp>
+        <p:nvSpPr>
+          <p:cNvPr id="16" name="Text 11"/>
+          <p:cNvSpPr txBox="1"/>
+          <p:nvPr/>
+        </p:nvSpPr>
+        <p:spPr>
+          <a:xfrm>
+            <a:off x="1737360" y="3154680"/>
+            <a:ext cx="3992728" cy="365760"/>
+          </a:xfrm>
+          <a:prstGeom prst="rect">
+            <a:avLst/>
+          </a:prstGeom>
+          <a:noFill/>
+          <a:ln/>
+        </p:spPr>
+        <p:txBody>
+          <a:bodyPr wrap="square" lIns="0" tIns="0" rIns="0" bIns="0" rtlCol="0" anchor="ctr"/>
+          <a:lstStyle/>
+          <a:p>
+            <a:pPr indent="0" marL="0">
+              <a:buNone/>
+            </a:pPr>
+            <a:r>
+              <a:rPr lang="en-US" sz="1700" b="1" dirty="0">
+                <a:solidFill>
+                  <a:schemeClr val="tx2"/>
+                </a:solidFill>
+              </a:rPr>
+              <a:t>Una sola cadena</a:t>
+            </a:r>
+            <a:endParaRPr lang="en-US" sz="1700" dirty="0"/>
+          </a:p>
+        </p:txBody>
+      </p:sp>
+      <p:sp>
+        <p:nvSpPr>
+          <p:cNvPr id="17" name="Text 12"/>
+          <p:cNvSpPr txBox="1"/>
+          <p:nvPr/>
+        </p:nvSpPr>
+        <p:spPr>
+          <a:xfrm>
+            <a:off x="1737360" y="3538728"/>
+            <a:ext cx="3992728" cy="640080"/>
+          </a:xfrm>
+          <a:prstGeom prst="rect">
+            <a:avLst/>
+          </a:prstGeom>
+          <a:noFill/>
+          <a:ln/>
+        </p:spPr>
+        <p:txBody>
+          <a:bodyPr wrap="square" lIns="0" tIns="0" rIns="0" bIns="0" rtlCol="0" anchor="t"/>
+          <a:lstStyle/>
+          <a:p>
+            <a:pPr indent="0" marL="0">
+              <a:buNone/>
+            </a:pPr>
+            <a:r>
+              <a:rPr lang="en-US" sz="1400" dirty="0">
+                <a:solidFill>
+                  <a:schemeClr val="tx1"/>
+                </a:solidFill>
+              </a:rPr>
+              <a:t>No modela complejos, ligandos ni cofactores.</a:t>
+            </a:r>
+            <a:endParaRPr lang="en-US" sz="1400" dirty="0"/>
+          </a:p>
+        </p:txBody>
+      </p:sp>
+      <p:sp>
+        <p:nvSpPr>
+          <p:cNvPr id="18" name="limite-3"/>
+          <p:cNvSpPr/>
+          <p:nvPr/>
+        </p:nvSpPr>
+        <p:spPr>
+          <a:xfrm>
+            <a:off x="6233008" y="2971800"/>
+            <a:ext cx="5410048" cy="1325880"/>
+          </a:xfrm>
+          <a:prstGeom prst="roundRect">
+            <a:avLst>
+              <a:gd name="adj" fmla="val 5517"/>
+            </a:avLst>
+          </a:prstGeom>
+          <a:solidFill>
+            <a:schemeClr val="bg2"/>
+          </a:solidFill>
+          <a:ln w="12700">
+            <a:solidFill>
+              <a:schemeClr val="bg2"/>
+            </a:solidFill>
+            <a:prstDash val="solid"/>
+          </a:ln>
+        </p:spPr>
+      </p:sp>
+      <p:sp>
+        <p:nvSpPr>
+          <p:cNvPr id="19" name="limite-3-circulo"/>
+          <p:cNvSpPr/>
+          <p:nvPr/>
+        </p:nvSpPr>
+        <p:spPr>
+          <a:xfrm>
+            <a:off x="6507328" y="3291840"/>
+            <a:ext cx="685800" cy="685800"/>
+          </a:xfrm>
+          <a:prstGeom prst="ellipse">
+            <a:avLst/>
+          </a:prstGeom>
+          <a:solidFill>
+            <a:schemeClr val="tx2"/>
+          </a:solidFill>
+          <a:ln w="12700">
+            <a:solidFill>
+              <a:schemeClr val="tx2"/>
+            </a:solidFill>
+            <a:prstDash val="solid"/>
+          </a:ln>
+        </p:spPr>
+      </p:sp>
+      <p:pic>
+        <p:nvPicPr>
+          <p:cNvPr id="20" name="limite-3-icono" descr="preencoded.png">    </p:cNvPr>
+          <p:cNvPicPr>
+            <a:picLocks noChangeAspect="1"/>
+          </p:cNvPicPr>
+          <p:nvPr/>
+        </p:nvPicPr>
+        <p:blipFill>
+          <a:blip r:embed="rId4"/>
+          <a:stretch>
+            <a:fillRect/>
+          </a:stretch>
+        </p:blipFill>
+        <p:spPr>
+          <a:xfrm>
+            <a:off x="6678778" y="3463290"/>
+            <a:ext cx="342900" cy="342900"/>
+          </a:xfrm>
+          <a:prstGeom prst="rect">
+            <a:avLst/>
+          </a:prstGeom>
+        </p:spPr>
+      </p:pic>
+      <p:sp>
+        <p:nvSpPr>
+          <p:cNvPr id="21" name="Text 15"/>
+          <p:cNvSpPr txBox="1"/>
+          <p:nvPr/>
+        </p:nvSpPr>
+        <p:spPr>
+          <a:xfrm>
+            <a:off x="7421728" y="3154680"/>
+            <a:ext cx="3992728" cy="365760"/>
+          </a:xfrm>
+          <a:prstGeom prst="rect">
+            <a:avLst/>
+          </a:prstGeom>
+          <a:noFill/>
+          <a:ln/>
+        </p:spPr>
+        <p:txBody>
+          <a:bodyPr wrap="square" lIns="0" tIns="0" rIns="0" bIns="0" rtlCol="0" anchor="ctr"/>
+          <a:lstStyle/>
+          <a:p>
+            <a:pPr indent="0" marL="0">
+              <a:buNone/>
+            </a:pPr>
+            <a:r>
+              <a:rPr lang="en-US" sz="1700" b="1" dirty="0">
+                <a:solidFill>
+                  <a:schemeClr val="tx2"/>
+                </a:solidFill>
+              </a:rPr>
+              <a:t>Filtro de calidad</a:t>
+            </a:r>
+            <a:endParaRPr lang="en-US" sz="1700" dirty="0"/>
+          </a:p>
+        </p:txBody>
+      </p:sp>
+      <p:sp>
+        <p:nvSpPr>
+          <p:cNvPr id="22" name="Text 16"/>
+          <p:cNvSpPr txBox="1"/>
+          <p:nvPr/>
+        </p:nvSpPr>
+        <p:spPr>
+          <a:xfrm>
+            <a:off x="7421728" y="3538728"/>
+            <a:ext cx="3992728" cy="640080"/>
+          </a:xfrm>
+          <a:prstGeom prst="rect">
+            <a:avLst/>
+          </a:prstGeom>
+          <a:noFill/>
+          <a:ln/>
+        </p:spPr>
+        <p:txBody>
+          <a:bodyPr wrap="square" lIns="0" tIns="0" rIns="0" bIns="0" rtlCol="0" anchor="t"/>
+          <a:lstStyle/>
+          <a:p>
+            <a:pPr indent="0" marL="0">
+              <a:buNone/>
+            </a:pPr>
+            <a:r>
+              <a:rPr lang="en-US" sz="1400" dirty="0">
+                <a:solidFill>
+                  <a:schemeClr val="tx1"/>
+                </a:solidFill>
+              </a:rPr>
+              <a:t>Se descartaron 54 de 300 muestras (18%) por choques o cadena rota.</a:t>
+            </a:r>
+            <a:endParaRPr lang="en-US" sz="1400" dirty="0"/>
+          </a:p>
+        </p:txBody>
+      </p:sp>
+      <p:sp>
+        <p:nvSpPr>
+          <p:cNvPr id="23" name="limite-4"/>
+          <p:cNvSpPr/>
+          <p:nvPr/>
+        </p:nvSpPr>
+        <p:spPr>
+          <a:xfrm>
+            <a:off x="548640" y="4526280"/>
+            <a:ext cx="5410048" cy="1325880"/>
+          </a:xfrm>
+          <a:prstGeom prst="roundRect">
+            <a:avLst>
+              <a:gd name="adj" fmla="val 5517"/>
+            </a:avLst>
+          </a:prstGeom>
+          <a:solidFill>
+            <a:schemeClr val="bg2"/>
+          </a:solidFill>
+          <a:ln w="12700">
+            <a:solidFill>
+              <a:schemeClr val="bg2"/>
+            </a:solidFill>
+            <a:prstDash val="solid"/>
+          </a:ln>
+        </p:spPr>
+      </p:sp>
+      <p:sp>
+        <p:nvSpPr>
+          <p:cNvPr id="24" name="limite-4-circulo"/>
+          <p:cNvSpPr/>
+          <p:nvPr/>
+        </p:nvSpPr>
+        <p:spPr>
+          <a:xfrm>
+            <a:off x="822960" y="4846320"/>
+            <a:ext cx="685800" cy="685800"/>
+          </a:xfrm>
+          <a:prstGeom prst="ellipse">
+            <a:avLst/>
+          </a:prstGeom>
+          <a:solidFill>
+            <a:schemeClr val="tx2"/>
+          </a:solidFill>
+          <a:ln w="12700">
+            <a:solidFill>
+              <a:schemeClr val="tx2"/>
+            </a:solidFill>
+            <a:prstDash val="solid"/>
+          </a:ln>
+        </p:spPr>
+      </p:sp>
+      <p:pic>
+        <p:nvPicPr>
+          <p:cNvPr id="25" name="limite-4-icono" descr="preencoded.png">    </p:cNvPr>
+          <p:cNvPicPr>
+            <a:picLocks noChangeAspect="1"/>
+          </p:cNvPicPr>
+          <p:nvPr/>
+        </p:nvPicPr>
+        <p:blipFill>
+          <a:blip r:embed="rId5"/>
+          <a:stretch>
+            <a:fillRect/>
+          </a:stretch>
+        </p:blipFill>
+        <p:spPr>
+          <a:xfrm>
+            <a:off x="994410" y="5017770"/>
+            <a:ext cx="342900" cy="342900"/>
+          </a:xfrm>
+          <a:prstGeom prst="rect">
+            <a:avLst/>
+          </a:prstGeom>
+        </p:spPr>
+      </p:pic>
+      <p:sp>
+        <p:nvSpPr>
+          <p:cNvPr id="26" name="Text 19"/>
+          <p:cNvSpPr txBox="1"/>
+          <p:nvPr/>
+        </p:nvSpPr>
+        <p:spPr>
+          <a:xfrm>
+            <a:off x="1737360" y="4709160"/>
+            <a:ext cx="3992728" cy="365760"/>
+          </a:xfrm>
+          <a:prstGeom prst="rect">
+            <a:avLst/>
+          </a:prstGeom>
+          <a:noFill/>
+          <a:ln/>
+        </p:spPr>
+        <p:txBody>
+          <a:bodyPr wrap="square" lIns="0" tIns="0" rIns="0" bIns="0" rtlCol="0" anchor="ctr"/>
+          <a:lstStyle/>
+          <a:p>
+            <a:pPr indent="0" marL="0">
+              <a:buNone/>
+            </a:pPr>
+            <a:r>
+              <a:rPr lang="en-US" sz="1700" b="1" dirty="0">
+                <a:solidFill>
+                  <a:schemeClr val="tx2"/>
+                </a:solidFill>
+              </a:rPr>
+              <a:t>Depende del MSA</a:t>
+            </a:r>
+            <a:endParaRPr lang="en-US" sz="1700" dirty="0"/>
+          </a:p>
+        </p:txBody>
+      </p:sp>
+      <p:sp>
+        <p:nvSpPr>
+          <p:cNvPr id="27" name="Text 20"/>
+          <p:cNvSpPr txBox="1"/>
+          <p:nvPr/>
+        </p:nvSpPr>
+        <p:spPr>
+          <a:xfrm>
+            <a:off x="1737360" y="5093208"/>
+            <a:ext cx="3992728" cy="640080"/>
+          </a:xfrm>
+          <a:prstGeom prst="rect">
+            <a:avLst/>
+          </a:prstGeom>
+          <a:noFill/>
+          <a:ln/>
+        </p:spPr>
+        <p:txBody>
+          <a:bodyPr wrap="square" lIns="0" tIns="0" rIns="0" bIns="0" rtlCol="0" anchor="t"/>
+          <a:lstStyle/>
+          <a:p>
+            <a:pPr indent="0" marL="0">
+              <a:buNone/>
+            </a:pPr>
+            <a:r>
+              <a:rPr lang="en-US" sz="1400" dirty="0">
+                <a:solidFill>
+                  <a:schemeClr val="tx1"/>
+                </a:solidFill>
+              </a:rPr>
+              <a:t>La calidad de los embeddings depende del alineamiento de ColabFold.</a:t>
+            </a:r>
+            <a:endParaRPr lang="en-US" sz="1400" dirty="0"/>
+          </a:p>
+        </p:txBody>
+      </p:sp>
+      <p:sp>
+        <p:nvSpPr>
+          <p:cNvPr id="28" name="limite-5"/>
+          <p:cNvSpPr/>
+          <p:nvPr/>
+        </p:nvSpPr>
+        <p:spPr>
+          <a:xfrm>
+            <a:off x="6233008" y="4526280"/>
+            <a:ext cx="5410048" cy="1325880"/>
+          </a:xfrm>
+          <a:prstGeom prst="roundRect">
+            <a:avLst>
+              <a:gd name="adj" fmla="val 5517"/>
+            </a:avLst>
+          </a:prstGeom>
+          <a:solidFill>
+            <a:schemeClr val="bg2"/>
+          </a:solidFill>
+          <a:ln w="12700">
+            <a:solidFill>
+              <a:schemeClr val="bg2"/>
+            </a:solidFill>
+            <a:prstDash val="solid"/>
+          </a:ln>
+        </p:spPr>
+      </p:sp>
+      <p:sp>
+        <p:nvSpPr>
+          <p:cNvPr id="29" name="limite-5-circulo"/>
+          <p:cNvSpPr/>
+          <p:nvPr/>
+        </p:nvSpPr>
+        <p:spPr>
+          <a:xfrm>
+            <a:off x="6507328" y="4846320"/>
+            <a:ext cx="685800" cy="685800"/>
+          </a:xfrm>
+          <a:prstGeom prst="ellipse">
+            <a:avLst/>
+          </a:prstGeom>
+          <a:solidFill>
+            <a:schemeClr val="tx2"/>
+          </a:solidFill>
+          <a:ln w="12700">
+            <a:solidFill>
+              <a:schemeClr val="tx2"/>
+            </a:solidFill>
+            <a:prstDash val="solid"/>
+          </a:ln>
+        </p:spPr>
+      </p:sp>
+      <p:pic>
+        <p:nvPicPr>
+          <p:cNvPr id="30" name="limite-5-icono" descr="preencoded.png">    </p:cNvPr>
+          <p:cNvPicPr>
+            <a:picLocks noChangeAspect="1"/>
+          </p:cNvPicPr>
+          <p:nvPr/>
+        </p:nvPicPr>
+        <p:blipFill>
+          <a:blip r:embed="rId6"/>
+          <a:stretch>
+            <a:fillRect/>
+          </a:stretch>
+        </p:blipFill>
+        <p:spPr>
+          <a:xfrm>
+            <a:off x="6678778" y="5017770"/>
+            <a:ext cx="342900" cy="342900"/>
+          </a:xfrm>
+          <a:prstGeom prst="rect">
+            <a:avLst/>
+          </a:prstGeom>
+        </p:spPr>
+      </p:pic>
+      <p:sp>
+        <p:nvSpPr>
+          <p:cNvPr id="31" name="Text 23"/>
+          <p:cNvSpPr txBox="1"/>
+          <p:nvPr/>
+        </p:nvSpPr>
+        <p:spPr>
+          <a:xfrm>
+            <a:off x="7421728" y="4709160"/>
+            <a:ext cx="3992728" cy="365760"/>
+          </a:xfrm>
+          <a:prstGeom prst="rect">
+            <a:avLst/>
+          </a:prstGeom>
+          <a:noFill/>
+          <a:ln/>
+        </p:spPr>
+        <p:txBody>
+          <a:bodyPr wrap="square" lIns="0" tIns="0" rIns="0" bIns="0" rtlCol="0" anchor="ctr"/>
+          <a:lstStyle/>
+          <a:p>
+            <a:pPr indent="0" marL="0">
+              <a:buNone/>
+            </a:pPr>
+            <a:r>
+              <a:rPr lang="en-US" sz="1700" b="1" dirty="0">
+                <a:solidFill>
+                  <a:schemeClr val="tx2"/>
+                </a:solidFill>
+              </a:rPr>
+              <a:t>Costo práctico</a:t>
+            </a:r>
+            <a:endParaRPr lang="en-US" sz="1700" dirty="0"/>
+          </a:p>
+        </p:txBody>
+      </p:sp>
+      <p:sp>
+        <p:nvSpPr>
+          <p:cNvPr id="32" name="Text 24"/>
+          <p:cNvSpPr txBox="1"/>
+          <p:nvPr/>
+        </p:nvSpPr>
+        <p:spPr>
+          <a:xfrm>
+            <a:off x="7421728" y="5093208"/>
+            <a:ext cx="3992728" cy="640080"/>
+          </a:xfrm>
+          <a:prstGeom prst="rect">
+            <a:avLst/>
+          </a:prstGeom>
+          <a:noFill/>
+          <a:ln/>
+        </p:spPr>
+        <p:txBody>
+          <a:bodyPr wrap="square" lIns="0" tIns="0" rIns="0" bIns="0" rtlCol="0" anchor="t"/>
+          <a:lstStyle/>
+          <a:p>
+            <a:pPr indent="0" marL="0">
+              <a:buNone/>
+            </a:pPr>
+            <a:r>
+              <a:rPr lang="en-US" sz="1400" dirty="0">
+                <a:solidFill>
+                  <a:schemeClr val="tx1"/>
+                </a:solidFill>
+              </a:rPr>
+              <a:t>Embeddings en CPU (~20 min) y relajación en un hilo (~3.5 h).</a:t>
+            </a:r>
+            <a:endParaRPr lang="en-US" sz="1400" dirty="0"/>
+          </a:p>
+        </p:txBody>
+      </p:sp>
+      <p:sp>
+        <p:nvSpPr>
+          <p:cNvPr id="25" name="Slide Number Placeholder 0"/>
+          <p:cNvSpPr>
+            <a:spLocks noGrp="1"/>
+          </p:cNvSpPr>
+          <p:nvPr>
+            <p:ph type="sldNum" sz="quarter" idx="4294967295"/>
+          </p:nvPr>
+        </p:nvSpPr>
+        <p:spPr>
+          <a:xfrm>
+            <a:off x="11094415" y="6446520"/>
+            <a:ext cx="548640" cy="274320"/>
+          </a:xfrm>
+          <a:prstGeom prst="rect">
+            <a:avLst/>
+          </a:prstGeom>
+          <a:extLst>
+            <a:ext uri="{C572A759-6A51-4108-AA02-DFA0A04FC94B}">
+              <ma14:wrappingTextBoxFlag xmlns:ma14="http://schemas.microsoft.com/office/mac/drawingml/2011/main" val="0"/>
+            </a:ext>
+          </a:extLst>
+        </p:spPr>
+        <p:txBody>
+          <a:bodyPr/>
+          <a:lstStyle>
+            <a:lvl1pPr>
+              <a:defRPr sz="1000">
+                <a:solidFill>
+                  <a:schemeClr val="accent2"/>
+                </a:solidFill>
+                <a:latin typeface="Calibri"/>
+                <a:ea typeface="Calibri"/>
+                <a:cs typeface="Calibri"/>
+              </a:defRPr>
+            </a:lvl1pPr>
+          </a:lstStyle>
+          <a:p>
+            <a:pPr algn="r"/>
+            <a:fld id="{F7021451-1387-4CA6-816F-3879F97B5CBC}" type="slidenum">
+              <a:rPr b="0" lang="en-US"/>
+              <a:t>16</a:t>
+            </a:fld>
+            <a:endParaRPr lang="en-US"/>
+          </a:p>
+        </p:txBody>
+      </p:sp>
+    </p:spTree>
+  </p:cSld>
+  <p:clrMapOvr>
+    <a:masterClrMapping/>
+  </p:clrMapOvr>
+</p:sld>
+</file>
+
+<file path=ppt/slides/slide17.xml><?xml version="1.0" encoding="utf-8"?>
+<p:sld xmlns:a="http://schemas.openxmlformats.org/drawingml/2006/main" xmlns:r="http://schemas.openxmlformats.org/officeDocument/2006/relationships" xmlns:p="http://schemas.openxmlformats.org/presentationml/2006/main">
+  <p:cSld name="Slide 17">
+    <p:spTree>
+      <p:nvGrpSpPr>
+        <p:cNvPr id="1" name=""/>
+        <p:cNvGrpSpPr/>
+        <p:nvPr/>
+      </p:nvGrpSpPr>
+      <p:grpSpPr>
+        <a:xfrm>
+          <a:off x="0" y="0"/>
+          <a:ext cx="0" cy="0"/>
+          <a:chOff x="0" y="0"/>
+          <a:chExt cx="0" cy="0"/>
+        </a:xfrm>
+      </p:grpSpPr>
+      <p:sp>
+        <p:nvSpPr>
+          <p:cNvPr id="2" name="Text 0"/>
+          <p:cNvSpPr/>
+          <p:nvPr>
+            <p:ph idx="100" type="title" hasCustomPrompt="1"/>
+          </p:nvPr>
+        </p:nvSpPr>
+        <p:spPr>
+          <a:xfrm>
+            <a:off x="548640" y="457200"/>
+            <a:ext cx="11094415" cy="822960"/>
+          </a:xfrm>
+          <a:prstGeom prst="rect">
+            <a:avLst/>
+          </a:prstGeom>
+          <a:noFill/>
+          <a:ln/>
+        </p:spPr>
+        <p:txBody>
+          <a:bodyPr wrap="square" lIns="0" tIns="0" rIns="0" bIns="0" rtlCol="0" anchor="ctr"/>
+          <a:lstStyle/>
+          <a:p>
+            <a:pPr algn="l" indent="0" marL="0">
+              <a:buNone/>
+            </a:pPr>
+            <a:r>
+              <a:rPr lang="en-US" sz="3600" b="1" dirty="0">
+                <a:solidFill>
+                  <a:schemeClr val="bg1"/>
+                </a:solidFill>
+                <a:latin typeface="Cambria" pitchFamily="34" charset="0"/>
+                <a:ea typeface="Cambria" pitchFamily="34" charset="-122"/>
+                <a:cs typeface="Cambria" pitchFamily="34" charset="-120"/>
+              </a:rPr>
+              <a:t>Conclusiones y siguientes pasos</a:t>
+            </a:r>
+            <a:endParaRPr lang="en-US" sz="3600" dirty="0"/>
+          </a:p>
+        </p:txBody>
+      </p:sp>
+      <p:sp>
+        <p:nvSpPr>
+          <p:cNvPr id="3" name="conclusion-0"/>
+          <p:cNvSpPr/>
+          <p:nvPr/>
+        </p:nvSpPr>
+        <p:spPr>
+          <a:xfrm>
+            <a:off x="548640" y="1600200"/>
+            <a:ext cx="3520440" cy="2651760"/>
+          </a:xfrm>
+          <a:prstGeom prst="roundRect">
+            <a:avLst>
+              <a:gd name="adj" fmla="val 2759"/>
+            </a:avLst>
+          </a:prstGeom>
+          <a:solidFill>
+            <a:srgbClr val="FFFFFF">
+              <a:alpha val="8000"/>
+            </a:srgbClr>
+          </a:solidFill>
+          <a:ln w="12700">
+            <a:solidFill>
+              <a:schemeClr val="accent2"/>
+            </a:solidFill>
+            <a:prstDash val="solid"/>
+          </a:ln>
+        </p:spPr>
+      </p:sp>
+      <p:sp>
+        <p:nvSpPr>
+          <p:cNvPr id="4" name="Text 2"/>
+          <p:cNvSpPr txBox="1"/>
+          <p:nvPr/>
+        </p:nvSpPr>
+        <p:spPr>
+          <a:xfrm>
+            <a:off x="868680" y="1828800"/>
+            <a:ext cx="914400" cy="548640"/>
+          </a:xfrm>
+          <a:prstGeom prst="rect">
+            <a:avLst/>
+          </a:prstGeom>
+          <a:noFill/>
+          <a:ln/>
+        </p:spPr>
+        <p:txBody>
+          <a:bodyPr wrap="square" lIns="0" tIns="0" rIns="0" bIns="0" rtlCol="0" anchor="ctr"/>
+          <a:lstStyle/>
+          <a:p>
+            <a:pPr indent="0" marL="0">
+              <a:buNone/>
+            </a:pPr>
+            <a:r>
+              <a:rPr lang="en-US" sz="3200" b="1" dirty="0">
+                <a:solidFill>
+                  <a:schemeClr val="accent1"/>
+                </a:solidFill>
+                <a:latin typeface="Cambria" pitchFamily="34" charset="0"/>
+                <a:ea typeface="Cambria" pitchFamily="34" charset="-122"/>
+                <a:cs typeface="Cambria" pitchFamily="34" charset="-120"/>
+              </a:rPr>
+              <a:t>1</a:t>
+            </a:r>
+            <a:endParaRPr lang="en-US" sz="3200" dirty="0"/>
+          </a:p>
+        </p:txBody>
+      </p:sp>
+      <p:sp>
+        <p:nvSpPr>
+          <p:cNvPr id="5" name="Text 3"/>
+          <p:cNvSpPr txBox="1"/>
+          <p:nvPr/>
+        </p:nvSpPr>
+        <p:spPr>
+          <a:xfrm>
+            <a:off x="868680" y="2423160"/>
+            <a:ext cx="2880360" cy="411480"/>
+          </a:xfrm>
+          <a:prstGeom prst="rect">
+            <a:avLst/>
+          </a:prstGeom>
+          <a:noFill/>
+          <a:ln/>
+        </p:spPr>
+        <p:txBody>
+          <a:bodyPr wrap="square" lIns="0" tIns="0" rIns="0" bIns="0" rtlCol="0" anchor="ctr"/>
+          <a:lstStyle/>
+          <a:p>
+            <a:pPr indent="0" marL="0">
+              <a:buNone/>
+            </a:pPr>
+            <a:r>
+              <a:rPr lang="en-US" sz="1900" b="1" dirty="0">
+                <a:solidFill>
+                  <a:schemeClr val="bg1"/>
+                </a:solidFill>
+              </a:rPr>
+              <a:t>Lóbulos estables</a:t>
+            </a:r>
+            <a:endParaRPr lang="en-US" sz="1900" dirty="0"/>
+          </a:p>
+        </p:txBody>
+      </p:sp>
+      <p:sp>
+        <p:nvSpPr>
+          <p:cNvPr id="6" name="Text 4"/>
+          <p:cNvSpPr txBox="1"/>
+          <p:nvPr/>
+        </p:nvSpPr>
+        <p:spPr>
+          <a:xfrm>
+            <a:off x="868680" y="2880360"/>
+            <a:ext cx="2880360" cy="1280160"/>
+          </a:xfrm>
+          <a:prstGeom prst="rect">
+            <a:avLst/>
+          </a:prstGeom>
+          <a:noFill/>
+          <a:ln/>
+        </p:spPr>
+        <p:txBody>
+          <a:bodyPr wrap="square" lIns="0" tIns="0" rIns="0" bIns="0" rtlCol="0" anchor="t"/>
+          <a:lstStyle/>
+          <a:p>
+            <a:pPr indent="0" marL="0">
+              <a:buNone/>
+            </a:pPr>
+            <a:r>
+              <a:rPr lang="en-US" sz="1400" dirty="0">
+                <a:solidFill>
+                  <a:schemeClr val="bg2"/>
+                </a:solidFill>
+              </a:rPr>
+              <a:t>CheY (0.8 Å) y LBP (mediana 1.8 Å) conservan el plegamiento del modelo de AlphaFold3.</a:t>
+            </a:r>
+            <a:endParaRPr lang="en-US" sz="1400" dirty="0"/>
+          </a:p>
+        </p:txBody>
+      </p:sp>
+      <p:sp>
+        <p:nvSpPr>
+          <p:cNvPr id="7" name="conclusion-1"/>
+          <p:cNvSpPr/>
+          <p:nvPr/>
+        </p:nvSpPr>
+        <p:spPr>
+          <a:xfrm>
+            <a:off x="4343400" y="1600200"/>
+            <a:ext cx="3520440" cy="2651760"/>
+          </a:xfrm>
+          <a:prstGeom prst="roundRect">
+            <a:avLst>
+              <a:gd name="adj" fmla="val 2759"/>
+            </a:avLst>
+          </a:prstGeom>
+          <a:solidFill>
+            <a:srgbClr val="FFFFFF">
+              <a:alpha val="8000"/>
+            </a:srgbClr>
+          </a:solidFill>
+          <a:ln w="12700">
+            <a:solidFill>
+              <a:schemeClr val="accent2"/>
+            </a:solidFill>
+            <a:prstDash val="solid"/>
+          </a:ln>
+        </p:spPr>
+      </p:sp>
+      <p:sp>
+        <p:nvSpPr>
+          <p:cNvPr id="8" name="Text 6"/>
+          <p:cNvSpPr txBox="1"/>
+          <p:nvPr/>
+        </p:nvSpPr>
+        <p:spPr>
+          <a:xfrm>
+            <a:off x="4663440" y="1828800"/>
+            <a:ext cx="914400" cy="548640"/>
+          </a:xfrm>
+          <a:prstGeom prst="rect">
+            <a:avLst/>
+          </a:prstGeom>
+          <a:noFill/>
+          <a:ln/>
+        </p:spPr>
+        <p:txBody>
+          <a:bodyPr wrap="square" lIns="0" tIns="0" rIns="0" bIns="0" rtlCol="0" anchor="ctr"/>
+          <a:lstStyle/>
+          <a:p>
+            <a:pPr indent="0" marL="0">
+              <a:buNone/>
+            </a:pPr>
+            <a:r>
+              <a:rPr lang="en-US" sz="3200" b="1" dirty="0">
+                <a:solidFill>
+                  <a:schemeClr val="accent1"/>
+                </a:solidFill>
+                <a:latin typeface="Cambria" pitchFamily="34" charset="0"/>
+                <a:ea typeface="Cambria" pitchFamily="34" charset="-122"/>
+                <a:cs typeface="Cambria" pitchFamily="34" charset="-120"/>
+              </a:rPr>
+              <a:t>2</a:t>
+            </a:r>
+            <a:endParaRPr lang="en-US" sz="3200" dirty="0"/>
+          </a:p>
+        </p:txBody>
+      </p:sp>
+      <p:sp>
+        <p:nvSpPr>
+          <p:cNvPr id="9" name="Text 7"/>
+          <p:cNvSpPr txBox="1"/>
+          <p:nvPr/>
+        </p:nvSpPr>
+        <p:spPr>
+          <a:xfrm>
+            <a:off x="4663440" y="2423160"/>
+            <a:ext cx="2880360" cy="411480"/>
+          </a:xfrm>
+          <a:prstGeom prst="rect">
+            <a:avLst/>
+          </a:prstGeom>
+          <a:noFill/>
+          <a:ln/>
+        </p:spPr>
+        <p:txBody>
+          <a:bodyPr wrap="square" lIns="0" tIns="0" rIns="0" bIns="0" rtlCol="0" anchor="ctr"/>
+          <a:lstStyle/>
+          <a:p>
+            <a:pPr indent="0" marL="0">
+              <a:buNone/>
+            </a:pPr>
+            <a:r>
+              <a:rPr lang="en-US" sz="1900" b="1" dirty="0">
+                <a:solidFill>
+                  <a:schemeClr val="bg1"/>
+                </a:solidFill>
+              </a:rPr>
+              <a:t>Bisagra flexible</a:t>
+            </a:r>
+            <a:endParaRPr lang="en-US" sz="1900" dirty="0"/>
+          </a:p>
+        </p:txBody>
+      </p:sp>
+      <p:sp>
+        <p:nvSpPr>
+          <p:cNvPr id="10" name="Text 8"/>
+          <p:cNvSpPr txBox="1"/>
+          <p:nvPr/>
+        </p:nvSpPr>
+        <p:spPr>
+          <a:xfrm>
+            <a:off x="4663440" y="2880360"/>
+            <a:ext cx="2880360" cy="1280160"/>
+          </a:xfrm>
+          <a:prstGeom prst="rect">
+            <a:avLst/>
+          </a:prstGeom>
+          <a:noFill/>
+          <a:ln/>
+        </p:spPr>
+        <p:txBody>
+          <a:bodyPr wrap="square" lIns="0" tIns="0" rIns="0" bIns="0" rtlCol="0" anchor="t"/>
+          <a:lstStyle/>
+          <a:p>
+            <a:pPr indent="0" marL="0">
+              <a:buNone/>
+            </a:pPr>
+            <a:r>
+              <a:rPr lang="en-US" sz="1400" dirty="0">
+                <a:solidFill>
+                  <a:schemeClr val="bg2"/>
+                </a:solidFill>
+              </a:rPr>
+              <a:t>70% en la orientación de AF3; CheY gira +32° (22%) o −44° (8%) a solo 0.7–1.3 kcal/mol. Por contrastar con el cristal.</a:t>
+            </a:r>
+            <a:endParaRPr lang="en-US" sz="1400" dirty="0"/>
+          </a:p>
+        </p:txBody>
+      </p:sp>
+      <p:sp>
+        <p:nvSpPr>
+          <p:cNvPr id="11" name="conclusion-2"/>
+          <p:cNvSpPr/>
+          <p:nvPr/>
+        </p:nvSpPr>
+        <p:spPr>
+          <a:xfrm>
+            <a:off x="8138160" y="1600200"/>
+            <a:ext cx="3520440" cy="2651760"/>
+          </a:xfrm>
+          <a:prstGeom prst="roundRect">
+            <a:avLst>
+              <a:gd name="adj" fmla="val 2759"/>
+            </a:avLst>
+          </a:prstGeom>
+          <a:solidFill>
+            <a:srgbClr val="FFFFFF">
+              <a:alpha val="8000"/>
+            </a:srgbClr>
+          </a:solidFill>
+          <a:ln w="12700">
+            <a:solidFill>
+              <a:schemeClr val="accent2"/>
+            </a:solidFill>
+            <a:prstDash val="solid"/>
+          </a:ln>
+        </p:spPr>
+      </p:sp>
+      <p:sp>
+        <p:nvSpPr>
+          <p:cNvPr id="12" name="Text 10"/>
+          <p:cNvSpPr txBox="1"/>
+          <p:nvPr/>
+        </p:nvSpPr>
+        <p:spPr>
+          <a:xfrm>
+            <a:off x="8458200" y="1828800"/>
+            <a:ext cx="914400" cy="548640"/>
+          </a:xfrm>
+          <a:prstGeom prst="rect">
+            <a:avLst/>
+          </a:prstGeom>
+          <a:noFill/>
+          <a:ln/>
+        </p:spPr>
+        <p:txBody>
+          <a:bodyPr wrap="square" lIns="0" tIns="0" rIns="0" bIns="0" rtlCol="0" anchor="ctr"/>
+          <a:lstStyle/>
+          <a:p>
+            <a:pPr indent="0" marL="0">
+              <a:buNone/>
+            </a:pPr>
+            <a:r>
+              <a:rPr lang="en-US" sz="3200" b="1" dirty="0">
+                <a:solidFill>
+                  <a:schemeClr val="accent1"/>
+                </a:solidFill>
+                <a:latin typeface="Cambria" pitchFamily="34" charset="0"/>
+                <a:ea typeface="Cambria" pitchFamily="34" charset="-122"/>
+                <a:cs typeface="Cambria" pitchFamily="34" charset="-120"/>
+              </a:rPr>
+              <a:t>3</a:t>
+            </a:r>
+            <a:endParaRPr lang="en-US" sz="3200" dirty="0"/>
+          </a:p>
+        </p:txBody>
+      </p:sp>
+      <p:sp>
+        <p:nvSpPr>
+          <p:cNvPr id="13" name="Text 11"/>
+          <p:cNvSpPr txBox="1"/>
+          <p:nvPr/>
+        </p:nvSpPr>
+        <p:spPr>
+          <a:xfrm>
+            <a:off x="8458200" y="2423160"/>
+            <a:ext cx="2880360" cy="411480"/>
+          </a:xfrm>
+          <a:prstGeom prst="rect">
+            <a:avLst/>
+          </a:prstGeom>
+          <a:noFill/>
+          <a:ln/>
+        </p:spPr>
+        <p:txBody>
+          <a:bodyPr wrap="square" lIns="0" tIns="0" rIns="0" bIns="0" rtlCol="0" anchor="ctr"/>
+          <a:lstStyle/>
+          <a:p>
+            <a:pPr indent="0" marL="0">
+              <a:buNone/>
+            </a:pPr>
+            <a:r>
+              <a:rPr lang="en-US" sz="1900" b="1" dirty="0">
+                <a:solidFill>
+                  <a:schemeClr val="bg1"/>
+                </a:solidFill>
+              </a:rPr>
+              <a:t>Pipeline reproducible</a:t>
+            </a:r>
+            <a:endParaRPr lang="en-US" sz="1900" dirty="0"/>
+          </a:p>
+        </p:txBody>
+      </p:sp>
+      <p:sp>
+        <p:nvSpPr>
+          <p:cNvPr id="14" name="Text 12"/>
+          <p:cNvSpPr txBox="1"/>
+          <p:nvPr/>
+        </p:nvSpPr>
+        <p:spPr>
+          <a:xfrm>
+            <a:off x="8458200" y="2880360"/>
+            <a:ext cx="2880360" cy="1280160"/>
+          </a:xfrm>
+          <a:prstGeom prst="rect">
+            <a:avLst/>
+          </a:prstGeom>
+          <a:noFill/>
+          <a:ln/>
+        </p:spPr>
+        <p:txBody>
+          <a:bodyPr wrap="square" lIns="0" tIns="0" rIns="0" bIns="0" rtlCol="0" anchor="t"/>
+          <a:lstStyle/>
+          <a:p>
+            <a:pPr indent="0" marL="0">
+              <a:buNone/>
+            </a:pPr>
+            <a:r>
+              <a:rPr lang="en-US" sz="1400" dirty="0">
+                <a:solidFill>
+                  <a:schemeClr val="bg2"/>
+                </a:solidFill>
+              </a:rPr>
+              <a:t>Scripts, tutorial y resultados en un repositorio. Cerca de 4 h en una GPU.</a:t>
+            </a:r>
+            <a:endParaRPr lang="en-US" sz="1400" dirty="0"/>
+          </a:p>
+        </p:txBody>
+      </p:sp>
+      <p:sp>
+        <p:nvSpPr>
+          <p:cNvPr id="15" name="Text 13"/>
+          <p:cNvSpPr txBox="1"/>
+          <p:nvPr/>
+        </p:nvSpPr>
+        <p:spPr>
+          <a:xfrm>
+            <a:off x="548640" y="4572000"/>
+            <a:ext cx="3657600" cy="365760"/>
+          </a:xfrm>
+          <a:prstGeom prst="rect">
+            <a:avLst/>
+          </a:prstGeom>
+          <a:noFill/>
+          <a:ln/>
+        </p:spPr>
+        <p:txBody>
+          <a:bodyPr wrap="square" lIns="0" tIns="0" rIns="0" bIns="0" rtlCol="0" anchor="ctr"/>
+          <a:lstStyle/>
+          <a:p>
+            <a:pPr indent="0" marL="0">
+              <a:buNone/>
+            </a:pPr>
+            <a:r>
+              <a:rPr lang="en-US" sz="1800" b="1" dirty="0">
+                <a:solidFill>
+                  <a:schemeClr val="accent5"/>
+                </a:solidFill>
+              </a:rPr>
+              <a:t>Siguientes pasos</a:t>
+            </a:r>
+            <a:endParaRPr lang="en-US" sz="1800" dirty="0"/>
+          </a:p>
+        </p:txBody>
+      </p:sp>
+      <p:sp>
+        <p:nvSpPr>
+          <p:cNvPr id="16" name="Text 14"/>
+          <p:cNvSpPr txBox="1"/>
+          <p:nvPr/>
+        </p:nvSpPr>
+        <p:spPr>
+          <a:xfrm>
+            <a:off x="548640" y="4983480"/>
+            <a:ext cx="11094415" cy="1280160"/>
+          </a:xfrm>
+          <a:prstGeom prst="rect">
+            <a:avLst/>
+          </a:prstGeom>
+          <a:noFill/>
+          <a:ln/>
+        </p:spPr>
+        <p:txBody>
+          <a:bodyPr wrap="square" lIns="0" tIns="0" rIns="0" bIns="0" rtlCol="0" anchor="t"/>
+          <a:lstStyle/>
+          <a:p>
+            <a:pPr marL="342900" indent="-342900">
+              <a:spcAft>
+                <a:spcPts val="400"/>
+              </a:spcAft>
+              <a:buSzPct val="100000"/>
+              <a:buChar char="•"/>
+            </a:pPr>
+            <a:r>
+              <a:rPr lang="en-US" sz="1500" dirty="0">
+                <a:solidFill>
+                  <a:schemeClr val="bg1"/>
+                </a:solidFill>
+              </a:rPr>
+              <a:t>Comparar el ensamble con la estructura cristalográfica (8Q52)</a:t>
+            </a:r>
+            <a:endParaRPr lang="en-US" sz="1500" dirty="0"/>
+          </a:p>
+          <a:p>
+            <a:pPr marL="342900" indent="-342900">
+              <a:spcAft>
+                <a:spcPts val="400"/>
+              </a:spcAft>
+              <a:buSzPct val="100000"/>
+              <a:buChar char="•"/>
+            </a:pPr>
+            <a:r>
+              <a:rPr lang="en-US" sz="1500" dirty="0">
+                <a:solidFill>
+                  <a:schemeClr val="bg1"/>
+                </a:solidFill>
+              </a:rPr>
+              <a:t>Correr la variante LBPCheY-dbb y más muestras (1000) para mejorar la estadística</a:t>
+            </a:r>
+            <a:endParaRPr lang="en-US" sz="1500" dirty="0"/>
+          </a:p>
+          <a:p>
+            <a:pPr marL="342900" indent="-342900">
+              <a:spcAft>
+                <a:spcPts val="400"/>
+              </a:spcAft>
+              <a:buSzPct val="100000"/>
+              <a:buChar char="•"/>
+            </a:pPr>
+            <a:r>
+              <a:rPr lang="en-US" sz="1500" dirty="0">
+                <a:solidFill>
+                  <a:schemeClr val="bg1"/>
+                </a:solidFill>
+              </a:rPr>
+              <a:t>Inspeccionar las muestras de LBP con RMSD &gt; 5 Å (posible desplegamiento local)</a:t>
+            </a:r>
+            <a:endParaRPr lang="en-US" sz="1500" dirty="0"/>
+          </a:p>
+        </p:txBody>
+      </p:sp>
+      <p:sp>
+        <p:nvSpPr>
+          <p:cNvPr id="25" name="Slide Number Placeholder 0"/>
+          <p:cNvSpPr>
+            <a:spLocks noGrp="1"/>
+          </p:cNvSpPr>
+          <p:nvPr>
+            <p:ph type="sldNum" sz="quarter" idx="4294967295"/>
+          </p:nvPr>
+        </p:nvSpPr>
+        <p:spPr>
+          <a:xfrm>
+            <a:off x="11094415" y="6446520"/>
+            <a:ext cx="548640" cy="274320"/>
+          </a:xfrm>
+          <a:prstGeom prst="rect">
+            <a:avLst/>
+          </a:prstGeom>
+          <a:extLst>
+            <a:ext uri="{C572A759-6A51-4108-AA02-DFA0A04FC94B}">
+              <ma14:wrappingTextBoxFlag xmlns:ma14="http://schemas.microsoft.com/office/mac/drawingml/2011/main" val="0"/>
+            </a:ext>
+          </a:extLst>
+        </p:spPr>
+        <p:txBody>
+          <a:bodyPr/>
+          <a:lstStyle>
+            <a:lvl1pPr>
+              <a:defRPr sz="1000">
+                <a:solidFill>
+                  <a:schemeClr val="accent4"/>
+                </a:solidFill>
+                <a:latin typeface="Calibri"/>
+                <a:ea typeface="Calibri"/>
+                <a:cs typeface="Calibri"/>
+              </a:defRPr>
+            </a:lvl1pPr>
+          </a:lstStyle>
+          <a:p>
+            <a:pPr algn="r"/>
+            <a:fld id="{F7021451-1387-4CA6-816F-3879F97B5CBC}" type="slidenum">
+              <a:rPr b="0" lang="en-US"/>
+              <a:t>17</a:t>
+            </a:fld>
+            <a:endParaRPr lang="en-US"/>
+          </a:p>
+        </p:txBody>
+      </p:sp>
+    </p:spTree>
+  </p:cSld>
+  <p:clrMapOvr>
+    <a:masterClrMapping/>
+  </p:clrMapOvr>
+</p:sld>
+</file>
+
+<file path=ppt/slides/slide18.xml><?xml version="1.0" encoding="utf-8"?>
+<p:sld xmlns:a="http://schemas.openxmlformats.org/drawingml/2006/main" xmlns:r="http://schemas.openxmlformats.org/officeDocument/2006/relationships" xmlns:p="http://schemas.openxmlformats.org/presentationml/2006/main">
+  <p:cSld name="Slide 18">
+    <p:spTree>
+      <p:nvGrpSpPr>
+        <p:cNvPr id="1" name=""/>
+        <p:cNvGrpSpPr/>
+        <p:nvPr/>
+      </p:nvGrpSpPr>
+      <p:grpSpPr>
+        <a:xfrm>
+          <a:off x="0" y="0"/>
+          <a:ext cx="0" cy="0"/>
+          <a:chOff x="0" y="0"/>
+          <a:chExt cx="0" cy="0"/>
+        </a:xfrm>
+      </p:grpSpPr>
+      <p:sp>
+        <p:nvSpPr>
+          <p:cNvPr id="2" name="Text 0"/>
+          <p:cNvSpPr/>
+          <p:nvPr>
+            <p:ph idx="100" type="title" hasCustomPrompt="1"/>
+          </p:nvPr>
+        </p:nvSpPr>
+        <p:spPr>
+          <a:xfrm>
+            <a:off x="548640" y="365760"/>
+            <a:ext cx="11094415" cy="731520"/>
+          </a:xfrm>
+          <a:prstGeom prst="rect">
+            <a:avLst/>
+          </a:prstGeom>
+          <a:noFill/>
+          <a:ln/>
+        </p:spPr>
+        <p:txBody>
+          <a:bodyPr wrap="square" lIns="0" tIns="0" rIns="0" bIns="0" rtlCol="0" anchor="ctr"/>
+          <a:lstStyle/>
+          <a:p>
+            <a:pPr algn="l" indent="0" marL="0">
+              <a:buNone/>
+            </a:pPr>
+            <a:r>
+              <a:rPr lang="en-US" sz="3200" b="1" dirty="0">
+                <a:solidFill>
+                  <a:schemeClr val="tx2"/>
+                </a:solidFill>
+                <a:latin typeface="Cambria" pitchFamily="34" charset="0"/>
+                <a:ea typeface="Cambria" pitchFamily="34" charset="-122"/>
+                <a:cs typeface="Cambria" pitchFamily="34" charset="-120"/>
+              </a:rPr>
+              <a:t>Referencias y recursos</a:t>
+            </a:r>
+            <a:endParaRPr lang="en-US" sz="3200" dirty="0"/>
+          </a:p>
+        </p:txBody>
+      </p:sp>
+      <p:sp>
+        <p:nvSpPr>
+          <p:cNvPr id="3" name="ref-0-circulo"/>
+          <p:cNvSpPr/>
+          <p:nvPr/>
+        </p:nvSpPr>
+        <p:spPr>
+          <a:xfrm>
+            <a:off x="548640" y="1508760"/>
+            <a:ext cx="685800" cy="685800"/>
+          </a:xfrm>
+          <a:prstGeom prst="ellipse">
+            <a:avLst/>
+          </a:prstGeom>
+          <a:solidFill>
+            <a:schemeClr val="tx2"/>
+          </a:solidFill>
+          <a:ln w="12700">
+            <a:solidFill>
+              <a:schemeClr val="tx2"/>
+            </a:solidFill>
+            <a:prstDash val="solid"/>
+          </a:ln>
+        </p:spPr>
+      </p:sp>
+      <p:pic>
+        <p:nvPicPr>
+          <p:cNvPr id="4" name="ref-0-icono" descr="preencoded.png">    </p:cNvPr>
+          <p:cNvPicPr>
+            <a:picLocks noChangeAspect="1"/>
+          </p:cNvPicPr>
+          <p:nvPr/>
+        </p:nvPicPr>
+        <p:blipFill>
+          <a:blip r:embed="rId1"/>
+          <a:stretch>
+            <a:fillRect/>
+          </a:stretch>
+        </p:blipFill>
+        <p:spPr>
+          <a:xfrm>
+            <a:off x="720090" y="1680210"/>
+            <a:ext cx="342900" cy="342900"/>
+          </a:xfrm>
+          <a:prstGeom prst="rect">
+            <a:avLst/>
+          </a:prstGeom>
+        </p:spPr>
+      </p:pic>
+      <p:sp>
+        <p:nvSpPr>
+          <p:cNvPr id="5" name="Text 2"/>
+          <p:cNvSpPr txBox="1"/>
+          <p:nvPr/>
+        </p:nvSpPr>
+        <p:spPr>
+          <a:xfrm>
+            <a:off x="1508760" y="1417320"/>
+            <a:ext cx="10134295" cy="365760"/>
+          </a:xfrm>
+          <a:prstGeom prst="rect">
+            <a:avLst/>
+          </a:prstGeom>
+          <a:noFill/>
+          <a:ln/>
+        </p:spPr>
+        <p:txBody>
+          <a:bodyPr wrap="square" lIns="0" tIns="0" rIns="0" bIns="0" rtlCol="0" anchor="ctr"/>
+          <a:lstStyle/>
+          <a:p>
+            <a:pPr indent="0" marL="0">
+              <a:buNone/>
+            </a:pPr>
+            <a:r>
+              <a:rPr lang="en-US" sz="1700" b="1" dirty="0">
+                <a:solidFill>
+                  <a:schemeClr val="tx2"/>
+                </a:solidFill>
+              </a:rPr>
+              <a:t>Artículo</a:t>
+            </a:r>
+            <a:endParaRPr lang="en-US" sz="1700" dirty="0"/>
+          </a:p>
+        </p:txBody>
+      </p:sp>
+      <p:sp>
+        <p:nvSpPr>
+          <p:cNvPr id="6" name="Text 3"/>
+          <p:cNvSpPr txBox="1"/>
+          <p:nvPr/>
+        </p:nvSpPr>
+        <p:spPr>
+          <a:xfrm>
+            <a:off x="1508760" y="1801368"/>
+            <a:ext cx="10134295" cy="594360"/>
+          </a:xfrm>
+          <a:prstGeom prst="rect">
+            <a:avLst/>
+          </a:prstGeom>
+          <a:noFill/>
+          <a:ln/>
+        </p:spPr>
+        <p:txBody>
+          <a:bodyPr wrap="square" lIns="0" tIns="0" rIns="0" bIns="0" rtlCol="0" anchor="t"/>
+          <a:lstStyle/>
+          <a:p>
+            <a:pPr indent="0" marL="0">
+              <a:buNone/>
+            </a:pPr>
+            <a:r>
+              <a:rPr lang="en-US" sz="1400" dirty="0">
+                <a:solidFill>
+                  <a:schemeClr val="tx1"/>
+                </a:solidFill>
+              </a:rPr>
+              <a:t>Lewis S. et al. Scalable emulation of protein equilibrium ensembles with generative deep learning. Science 389 (2025). doi:10.1126/science.adv9817</a:t>
+            </a:r>
+            <a:endParaRPr lang="en-US" sz="1400" dirty="0"/>
+          </a:p>
+        </p:txBody>
+      </p:sp>
+      <p:sp>
+        <p:nvSpPr>
+          <p:cNvPr id="7" name="ref-1-circulo"/>
+          <p:cNvSpPr/>
+          <p:nvPr/>
+        </p:nvSpPr>
+        <p:spPr>
+          <a:xfrm>
+            <a:off x="548640" y="2651760"/>
+            <a:ext cx="685800" cy="685800"/>
+          </a:xfrm>
+          <a:prstGeom prst="ellipse">
+            <a:avLst/>
+          </a:prstGeom>
+          <a:solidFill>
+            <a:schemeClr val="tx2"/>
+          </a:solidFill>
+          <a:ln w="12700">
+            <a:solidFill>
+              <a:schemeClr val="tx2"/>
+            </a:solidFill>
+            <a:prstDash val="solid"/>
+          </a:ln>
+        </p:spPr>
+      </p:sp>
+      <p:pic>
+        <p:nvPicPr>
+          <p:cNvPr id="8" name="ref-1-icono" descr="preencoded.png">    </p:cNvPr>
+          <p:cNvPicPr>
+            <a:picLocks noChangeAspect="1"/>
+          </p:cNvPicPr>
+          <p:nvPr/>
+        </p:nvPicPr>
+        <p:blipFill>
+          <a:blip r:embed="rId2"/>
+          <a:stretch>
+            <a:fillRect/>
+          </a:stretch>
+        </p:blipFill>
+        <p:spPr>
+          <a:xfrm>
+            <a:off x="720090" y="2823210"/>
+            <a:ext cx="342900" cy="342900"/>
+          </a:xfrm>
+          <a:prstGeom prst="rect">
+            <a:avLst/>
+          </a:prstGeom>
+        </p:spPr>
+      </p:pic>
+      <p:sp>
+        <p:nvSpPr>
+          <p:cNvPr id="9" name="Text 5"/>
+          <p:cNvSpPr txBox="1"/>
+          <p:nvPr/>
+        </p:nvSpPr>
+        <p:spPr>
+          <a:xfrm>
+            <a:off x="1508760" y="2560320"/>
+            <a:ext cx="10134295" cy="365760"/>
+          </a:xfrm>
+          <a:prstGeom prst="rect">
+            <a:avLst/>
+          </a:prstGeom>
+          <a:noFill/>
+          <a:ln/>
+        </p:spPr>
+        <p:txBody>
+          <a:bodyPr wrap="square" lIns="0" tIns="0" rIns="0" bIns="0" rtlCol="0" anchor="ctr"/>
+          <a:lstStyle/>
+          <a:p>
+            <a:pPr indent="0" marL="0">
+              <a:buNone/>
+            </a:pPr>
+            <a:r>
+              <a:rPr lang="en-US" sz="1700" b="1" dirty="0">
+                <a:solidFill>
+                  <a:schemeClr val="tx2"/>
+                </a:solidFill>
+              </a:rPr>
+              <a:t>Código</a:t>
+            </a:r>
+            <a:endParaRPr lang="en-US" sz="1700" dirty="0"/>
+          </a:p>
+        </p:txBody>
+      </p:sp>
+      <p:sp>
+        <p:nvSpPr>
+          <p:cNvPr id="10" name="Text 6"/>
+          <p:cNvSpPr txBox="1"/>
+          <p:nvPr/>
+        </p:nvSpPr>
+        <p:spPr>
+          <a:xfrm>
+            <a:off x="1508760" y="2944368"/>
+            <a:ext cx="10134295" cy="594360"/>
+          </a:xfrm>
+          <a:prstGeom prst="rect">
+            <a:avLst/>
+          </a:prstGeom>
+          <a:noFill/>
+          <a:ln/>
+        </p:spPr>
+        <p:txBody>
+          <a:bodyPr wrap="square" lIns="0" tIns="0" rIns="0" bIns="0" rtlCol="0" anchor="t"/>
+          <a:lstStyle/>
+          <a:p>
+            <a:pPr indent="0" marL="0">
+              <a:buNone/>
+            </a:pPr>
+            <a:r>
+              <a:rPr lang="en-US" sz="1400" dirty="0">
+                <a:solidFill>
+                  <a:schemeClr val="tx1"/>
+                </a:solidFill>
+              </a:rPr>
+              <a:t>github.com/microsoft/bioemu · pesos en huggingface.co/microsoft/bioemu (licencia MIT)</a:t>
+            </a:r>
+            <a:endParaRPr lang="en-US" sz="1400" dirty="0"/>
+          </a:p>
+        </p:txBody>
+      </p:sp>
+      <p:sp>
+        <p:nvSpPr>
+          <p:cNvPr id="11" name="ref-2-circulo"/>
+          <p:cNvSpPr/>
+          <p:nvPr/>
+        </p:nvSpPr>
+        <p:spPr>
+          <a:xfrm>
+            <a:off x="548640" y="3794760"/>
+            <a:ext cx="685800" cy="685800"/>
+          </a:xfrm>
+          <a:prstGeom prst="ellipse">
+            <a:avLst/>
+          </a:prstGeom>
+          <a:solidFill>
+            <a:schemeClr val="tx2"/>
+          </a:solidFill>
+          <a:ln w="12700">
+            <a:solidFill>
+              <a:schemeClr val="tx2"/>
+            </a:solidFill>
+            <a:prstDash val="solid"/>
+          </a:ln>
+        </p:spPr>
+      </p:sp>
+      <p:pic>
+        <p:nvPicPr>
           <p:cNvPr id="12" name="ref-2-icono" descr="preencoded.png">    </p:cNvPr>
           <p:cNvPicPr>
             <a:picLocks noChangeAspect="1"/>
@@ -7742,7 +10378,7 @@
             <a:pPr algn="r"/>
             <a:fld id="{F7021451-1387-4CA6-816F-3879F97B5CBC}" type="slidenum">
               <a:rPr b="0" lang="en-US"/>
-              <a:t>16</a:t>
+              <a:t>18</a:t>
             </a:fld>
             <a:endParaRPr lang="en-US"/>
           </a:p>
